--- a/ClearCart_GreenTech_Assessment.pptx
+++ b/ClearCart_GreenTech_Assessment.pptx
@@ -4,6 +4,9 @@
   <p:sldMasterIdLst>
     <p:sldMasterId id="2147483648" r:id="rId1"/>
   </p:sldMasterIdLst>
+  <p:notesMasterIdLst>
+    <p:notesMasterId r:id="rId15"/>
+  </p:notesMasterIdLst>
   <p:sldIdLst>
     <p:sldId id="256" r:id="rId2"/>
     <p:sldId id="257" r:id="rId3"/>
@@ -19,10 +22,7 @@
     <p:sldId id="267" r:id="rId13"/>
     <p:sldId id="268" r:id="rId14"/>
   </p:sldIdLst>
-  <p:notesMasterIdLst>
-    <p:notesMasterId r:id="rId15"/>
-  </p:notesMasterIdLst>
-  <p:sldSz cx="9144000" cy="5143500"/>
+  <p:sldSz cx="9144000" cy="5143500" type="screen16x9"/>
   <p:notesSz cx="5143500" cy="9144000"/>
   <p:defaultTextStyle>
     <a:lvl1pPr marL="0" algn="l" defTabSz="914400" rtl="0" eaLnBrk="1" latinLnBrk="0" hangingPunct="1">
@@ -116,6 +116,11 @@
       </a:defRPr>
     </a:lvl9pPr>
   </p:defaultTextStyle>
+  <p:extLst>
+    <p:ext uri="{EFAFB233-063F-42B5-8137-9DF3F51BA10A}">
+      <p15:sldGuideLst xmlns:p15="http://schemas.microsoft.com/office/powerpoint/2012/main"/>
+    </p:ext>
+  </p:extLst>
 </p:presentation>
 </file>
 
@@ -141,234 +146,10 @@
           <a:chExt cx="0" cy="0"/>
         </a:xfrm>
       </p:grpSpPr>
-      <p:sp>
-        <p:nvSpPr>
-          <p:cNvPr id="2" name="Header Placeholder 1"/>
-          <p:cNvSpPr>
-            <a:spLocks noGrp="1"/>
-          </p:cNvSpPr>
-          <p:nvPr>
-            <p:ph type="hdr" sz="quarter"/>
-          </p:nvPr>
-        </p:nvSpPr>
-        <p:spPr>
-          <a:xfrm>
-            <a:off x="0" y="0"/>
-            <a:ext cx="2971800" cy="458788"/>
-          </a:xfrm>
-          <a:prstGeom prst="rect">
-            <a:avLst/>
-          </a:prstGeom>
-        </p:spPr>
-        <p:txBody>
-          <a:bodyPr vert="horz" lIns="91440" tIns="45720" rIns="91440" bIns="45720" rtlCol="0"/>
-          <a:lstStyle>
-            <a:lvl1pPr algn="l">
-              <a:defRPr sz="1200"/>
-            </a:lvl1pPr>
-          </a:lstStyle>
-          <a:p>
-            <a:endParaRPr lang="en-US"/>
-          </a:p>
-        </p:txBody>
-      </p:sp>
-      <p:sp>
-        <p:nvSpPr>
-          <p:cNvPr id="3" name="Date Placeholder 2"/>
-          <p:cNvSpPr>
-            <a:spLocks noGrp="1"/>
-          </p:cNvSpPr>
-          <p:nvPr>
-            <p:ph type="dt" idx="1"/>
-          </p:nvPr>
-        </p:nvSpPr>
-        <p:spPr>
-          <a:xfrm>
-            <a:off x="3884613" y="0"/>
-            <a:ext cx="2971800" cy="458788"/>
-          </a:xfrm>
-          <a:prstGeom prst="rect">
-            <a:avLst/>
-          </a:prstGeom>
-        </p:spPr>
-        <p:txBody>
-          <a:bodyPr vert="horz" lIns="91440" tIns="45720" rIns="91440" bIns="45720" rtlCol="0"/>
-          <a:lstStyle>
-            <a:lvl1pPr algn="r">
-              <a:defRPr sz="1200"/>
-            </a:lvl1pPr>
-          </a:lstStyle>
-          <a:p>
-            <a:fld id="{5282F153-3F37-0F45-9E97-73ACFA13230C}" type="datetimeFigureOut">
-              <a:rPr lang="en-US"/>
-              <a:t>7/23/19</a:t>
-            </a:fld>
-            <a:endParaRPr lang="en-US"/>
-          </a:p>
-        </p:txBody>
-      </p:sp>
-      <p:sp>
-        <p:nvSpPr>
-          <p:cNvPr id="4" name="Slide Image Placeholder 3"/>
-          <p:cNvSpPr>
-            <a:spLocks noGrp="1" noRot="1" noChangeAspect="1"/>
-          </p:cNvSpPr>
-          <p:nvPr>
-            <p:ph type="sldImg" idx="2"/>
-          </p:nvPr>
-        </p:nvSpPr>
-        <p:spPr>
-          <a:xfrm>
-            <a:off x="685800" y="1143000"/>
-            <a:ext cx="5486400" cy="3086100"/>
-          </a:xfrm>
-          <a:prstGeom prst="rect">
-            <a:avLst/>
-          </a:prstGeom>
-          <a:noFill/>
-          <a:ln w="12700">
-            <a:solidFill>
-              <a:prstClr val="black"/>
-            </a:solidFill>
-          </a:ln>
-        </p:spPr>
-        <p:txBody>
-          <a:bodyPr vert="horz" lIns="91440" tIns="45720" rIns="91440" bIns="45720" rtlCol="0" anchor="ctr"/>
-          <a:lstStyle/>
-          <a:p>
-            <a:endParaRPr lang="en-US"/>
-          </a:p>
-        </p:txBody>
-      </p:sp>
-      <p:sp>
-        <p:nvSpPr>
-          <p:cNvPr id="5" name="Notes Placeholder 4"/>
-          <p:cNvSpPr>
-            <a:spLocks noGrp="1"/>
-          </p:cNvSpPr>
-          <p:nvPr>
-            <p:ph type="body" sz="quarter" idx="3"/>
-          </p:nvPr>
-        </p:nvSpPr>
-        <p:spPr>
-          <a:xfrm>
-            <a:off x="685800" y="4400550"/>
-            <a:ext cx="5486400" cy="3600450"/>
-          </a:xfrm>
-          <a:prstGeom prst="rect">
-            <a:avLst/>
-          </a:prstGeom>
-        </p:spPr>
-        <p:txBody>
-          <a:bodyPr vert="horz" lIns="91440" tIns="45720" rIns="91440" bIns="45720" rtlCol="0"/>
-          <a:lstStyle/>
-          <a:p>
-            <a:pPr lvl="0"/>
-            <a:r>
-              <a:rPr lang="en-US"/>
-              <a:t>Click to edit Master text styles</a:t>
-            </a:r>
-          </a:p>
-          <a:p>
-            <a:pPr lvl="1"/>
-            <a:r>
-              <a:rPr lang="en-US"/>
-              <a:t>Second level</a:t>
-            </a:r>
-          </a:p>
-          <a:p>
-            <a:pPr lvl="2"/>
-            <a:r>
-              <a:rPr lang="en-US"/>
-              <a:t>Third level</a:t>
-            </a:r>
-          </a:p>
-          <a:p>
-            <a:pPr lvl="3"/>
-            <a:r>
-              <a:rPr lang="en-US"/>
-              <a:t>Fourth level</a:t>
-            </a:r>
-          </a:p>
-          <a:p>
-            <a:pPr lvl="4"/>
-            <a:r>
-              <a:rPr lang="en-US"/>
-              <a:t>Fifth level</a:t>
-            </a:r>
-          </a:p>
-        </p:txBody>
-      </p:sp>
-      <p:sp>
-        <p:nvSpPr>
-          <p:cNvPr id="6" name="Footer Placeholder 5"/>
-          <p:cNvSpPr>
-            <a:spLocks noGrp="1"/>
-          </p:cNvSpPr>
-          <p:nvPr>
-            <p:ph type="ftr" sz="quarter" idx="4"/>
-          </p:nvPr>
-        </p:nvSpPr>
-        <p:spPr>
-          <a:xfrm>
-            <a:off x="0" y="8685213"/>
-            <a:ext cx="2971800" cy="458787"/>
-          </a:xfrm>
-          <a:prstGeom prst="rect">
-            <a:avLst/>
-          </a:prstGeom>
-        </p:spPr>
-        <p:txBody>
-          <a:bodyPr vert="horz" lIns="91440" tIns="45720" rIns="91440" bIns="45720" rtlCol="0" anchor="b"/>
-          <a:lstStyle>
-            <a:lvl1pPr algn="l">
-              <a:defRPr sz="1200"/>
-            </a:lvl1pPr>
-          </a:lstStyle>
-          <a:p>
-            <a:endParaRPr lang="en-US"/>
-          </a:p>
-        </p:txBody>
-      </p:sp>
-      <p:sp>
-        <p:nvSpPr>
-          <p:cNvPr id="7" name="Slide Number Placeholder 6"/>
-          <p:cNvSpPr>
-            <a:spLocks noGrp="1"/>
-          </p:cNvSpPr>
-          <p:nvPr>
-            <p:ph type="sldNum" sz="quarter" idx="5"/>
-          </p:nvPr>
-        </p:nvSpPr>
-        <p:spPr>
-          <a:xfrm>
-            <a:off x="3884613" y="8685213"/>
-            <a:ext cx="2971800" cy="458787"/>
-          </a:xfrm>
-          <a:prstGeom prst="rect">
-            <a:avLst/>
-          </a:prstGeom>
-        </p:spPr>
-        <p:txBody>
-          <a:bodyPr vert="horz" lIns="91440" tIns="45720" rIns="91440" bIns="45720" rtlCol="0" anchor="b"/>
-          <a:lstStyle>
-            <a:lvl1pPr algn="r">
-              <a:defRPr sz="1200"/>
-            </a:lvl1pPr>
-          </a:lstStyle>
-          <a:p>
-            <a:fld id="{CE5E9CC1-C706-0F49-92D6-E571CC5EEA8F}" type="slidenum">
-              <a:rPr lang="en-US"/>
-              <a:t>‹#›</a:t>
-            </a:fld>
-            <a:endParaRPr lang="en-US"/>
-          </a:p>
-        </p:txBody>
-      </p:sp>
     </p:spTree>
     <p:extLst>
       <p:ext uri="{BB962C8B-B14F-4D97-AF65-F5344CB8AC3E}">
-        <p14:creationId xmlns:p14="http://schemas.microsoft.com/office/powerpoint/2010/main" val="1024086991"/>
+        <p14:creationId xmlns:p14="http://schemas.microsoft.com/office/powerpoint/2010/main" val="280960174"/>
       </p:ext>
     </p:extLst>
   </p:cSld>
@@ -512,10 +293,6 @@
           <a:bodyPr/>
           <a:lstStyle/>
           <a:p>
-            <a:r>
-              <a:rPr lang="en-US" dirty="0"/>
-              <a:t/>
-            </a:r>
             <a:endParaRPr lang="en-US" dirty="0"/>
           </a:p>
         </p:txBody>
@@ -609,7 +386,6 @@
 - Build the SCI formula: E × I + M / R
 First 2 weeks: instrument only, no changes. Then apply solutions in order: cache → region → batching → cascade.</a:t>
             </a:r>
-            <a:endParaRPr lang="en-US" dirty="0"/>
           </a:p>
         </p:txBody>
       </p:sp>
@@ -702,7 +478,6 @@
 Key metric to watch: tokens per R (cost proxy) and cache hit rate.
 SCI baseline calculation will follow from week 1 data.</a:t>
             </a:r>
-            <a:endParaRPr lang="en-US" dirty="0"/>
           </a:p>
         </p:txBody>
       </p:sp>
@@ -792,7 +567,6 @@
 Key lesson reminder: SCI (Software Carbon Intensity) does not count offsets. The score is about what you actually emit per unit of value, not what you offset on paper.
 Validate sequence: measurement → cache → region → cascade. Don't skip ahead.</a:t>
             </a:r>
-            <a:endParaRPr lang="en-US" dirty="0"/>
           </a:p>
         </p:txBody>
       </p:sp>
@@ -883,7 +657,6 @@
 The 'Watch for' column is the key: each hypothesis has a single falsifiable metric.
 If the metric doesn't move after 1 week, the assumption behind it was wrong — re-assess before the next step.</a:t>
             </a:r>
-            <a:endParaRPr lang="en-US" dirty="0"/>
           </a:p>
         </p:txBody>
       </p:sp>
@@ -976,7 +749,6 @@
 - Idle capacity during off-peak hours wastes hardware utilisation
 Tie to lesson: carbon, energy, hardware, measurement all have direct cost proxies — making the business case easy.</a:t>
             </a:r>
-            <a:endParaRPr lang="en-US" dirty="0"/>
           </a:p>
         </p:txBody>
       </p:sp>
@@ -1069,7 +841,6 @@
 - M = embodied carbon of hardware (amortised per call)
 We will use cost-per-call as a proxy for E until real measurement is in place.</a:t>
             </a:r>
-            <a:endParaRPr lang="en-US" dirty="0"/>
           </a:p>
         </p:txBody>
       </p:sp>
@@ -1161,7 +932,6 @@
 3. Region mismatch is a verifiable fact if the API provider dashboard shows region selection.
 4. Model sizing: typical vision moderation can be handled by smaller, cheaper models for 80%+ of clear-cut cases.</a:t>
             </a:r>
-            <a:endParaRPr lang="en-US" dirty="0"/>
           </a:p>
         </p:txBody>
       </p:sp>
@@ -1252,7 +1022,6 @@
 - Medium = likely true based on industry benchmarks, needs 1 data pull to confirm
 - Low = pure assumption, must validate before proposing solutions as definitive</a:t>
             </a:r>
-            <a:endParaRPr lang="en-US" dirty="0"/>
           </a:p>
         </p:txBody>
       </p:sp>
@@ -1344,7 +1113,6 @@
 - Hardware: we influence via demand reduction (batching, caching) not direct HW choice
 - Measurement: nothing can be proven or defended without a baseline — this is the unlock for all other slides</a:t>
             </a:r>
-            <a:endParaRPr lang="en-US" dirty="0"/>
           </a:p>
         </p:txBody>
       </p:sp>
@@ -1438,7 +1206,6 @@
 Quality safeguard: 5% random sample of auto-passes reviewed weekly — prevents silent model drift.
 GSF Pattern: Demand Shaping — reduce demand on energy-intensive resources by routing away from them.</a:t>
             </a:r>
-            <a:endParaRPr lang="en-US" dirty="0"/>
           </a:p>
         </p:txBody>
       </p:sp>
@@ -1529,7 +1296,6 @@
 TTL 90 days balances freshness vs cost savings.
 Cache hit rate is the key metric — instrument from day 1.</a:t>
             </a:r>
-            <a:endParaRPr lang="en-US" dirty="0"/>
           </a:p>
         </p:txBody>
       </p:sp>
@@ -1623,7 +1389,6 @@
 - Seller UX: show "being reviewed" status with estimated completion time for deferred items
 - Pattern: Time-shifting workloads = GSF Patterns: Optimize Utilization</a:t>
             </a:r>
-            <a:endParaRPr lang="en-US" dirty="0"/>
           </a:p>
         </p:txBody>
       </p:sp>
@@ -1696,6 +1461,11 @@
 <file path=ppt/slideMasters/slideMaster1.xml><?xml version="1.0" encoding="utf-8"?>
 <p:sldMaster xmlns:a="http://schemas.openxmlformats.org/drawingml/2006/main" xmlns:r="http://schemas.openxmlformats.org/officeDocument/2006/relationships" xmlns:p="http://schemas.openxmlformats.org/presentationml/2006/main">
   <p:cSld>
+    <p:bg>
+      <p:bgRef idx="1001">
+        <a:schemeClr val="bg1"/>
+      </p:bgRef>
+    </p:bg>
     <p:spTree>
       <p:nvGrpSpPr>
         <p:cNvPr id="1" name=""/>
@@ -1978,6 +1748,7 @@
         <a:solidFill>
           <a:srgbClr val="1A2E2A"/>
         </a:solidFill>
+        <a:effectLst/>
       </p:bgPr>
     </p:bg>
     <p:spTree>
@@ -2040,7 +1811,7 @@
           <a:bodyPr wrap="square" lIns="0" tIns="0" rIns="0" bIns="0" rtlCol="0" anchor="ctr"/>
           <a:lstStyle/>
           <a:p>
-            <a:pPr indent="0" marL="0">
+            <a:pPr marL="0" indent="0">
               <a:buNone/>
             </a:pPr>
             <a:r>
@@ -2079,7 +1850,7 @@
           <a:bodyPr wrap="square" lIns="0" tIns="0" rIns="0" bIns="0" rtlCol="0" anchor="ctr"/>
           <a:lstStyle/>
           <a:p>
-            <a:pPr indent="0" marL="0">
+            <a:pPr marL="0" indent="0">
               <a:buNone/>
             </a:pPr>
             <a:r>
@@ -2118,7 +1889,7 @@
           <a:bodyPr wrap="square" lIns="0" tIns="0" rIns="0" bIns="0" rtlCol="0" anchor="ctr"/>
           <a:lstStyle/>
           <a:p>
-            <a:pPr indent="0" marL="0">
+            <a:pPr marL="0" indent="0">
               <a:buNone/>
             </a:pPr>
             <a:r>
@@ -2157,7 +1928,7 @@
           <a:bodyPr wrap="square" lIns="0" tIns="0" rIns="0" bIns="0" rtlCol="0" anchor="ctr"/>
           <a:lstStyle/>
           <a:p>
-            <a:pPr indent="0" marL="0">
+            <a:pPr marL="0" indent="0">
               <a:buNone/>
             </a:pPr>
             <a:r>
@@ -2196,7 +1967,7 @@
           <a:bodyPr wrap="square" lIns="0" tIns="0" rIns="0" bIns="0" rtlCol="0" anchor="ctr"/>
           <a:lstStyle/>
           <a:p>
-            <a:pPr indent="0" marL="0">
+            <a:pPr marL="0" indent="0">
               <a:buNone/>
             </a:pPr>
             <a:r>
@@ -2235,7 +2006,7 @@
           <a:bodyPr wrap="square" lIns="0" tIns="0" rIns="0" bIns="0" rtlCol="0" anchor="ctr"/>
           <a:lstStyle/>
           <a:p>
-            <a:pPr indent="0" marL="0">
+            <a:pPr marL="0" indent="0">
               <a:buNone/>
             </a:pPr>
             <a:r>
@@ -2269,6 +2040,7 @@
         <a:solidFill>
           <a:srgbClr val="F4F7F4"/>
         </a:solidFill>
+        <a:effectLst/>
       </p:bgPr>
     </p:bg>
     <p:spTree>
@@ -2306,7 +2078,7 @@
           <a:bodyPr wrap="square" lIns="0" tIns="0" rIns="0" bIns="0" rtlCol="0" anchor="ctr"/>
           <a:lstStyle/>
           <a:p>
-            <a:pPr indent="0" marL="0">
+            <a:pPr marL="0" indent="0">
               <a:buNone/>
             </a:pPr>
             <a:r>
@@ -2332,8 +2104,8 @@
         </p:nvSpPr>
         <p:spPr>
           <a:xfrm>
-            <a:off x="365760" y="868680"/>
-            <a:ext cx="8412480" cy="640080"/>
+            <a:off x="457200" y="1024128"/>
+            <a:ext cx="8412480" cy="530352"/>
           </a:xfrm>
           <a:prstGeom prst="roundRect">
             <a:avLst>
@@ -2350,7 +2122,7 @@
             <a:prstDash val="solid"/>
           </a:ln>
           <a:effectLst>
-            <a:outerShdw sx="100000" sy="100000" kx="0" ky="0" algn="bl" rotWithShape="0" blurRad="101600" dist="38100" dir="8100000">
+            <a:outerShdw blurRad="101600" dist="38100" dir="8100000" algn="bl" rotWithShape="0">
               <a:srgbClr val="000000">
                 <a:alpha val="8000"/>
               </a:srgbClr>
@@ -2379,7 +2151,7 @@
           <a:bodyPr wrap="square" lIns="0" tIns="0" rIns="0" bIns="0" rtlCol="0" anchor="ctr"/>
           <a:lstStyle/>
           <a:p>
-            <a:pPr indent="0" marL="0">
+            <a:pPr marL="0" indent="0">
               <a:buNone/>
             </a:pPr>
             <a:r>
@@ -2420,9 +2192,27 @@
             <a:tbl>
               <a:tblPr/>
               <a:tblGrid>
-                <a:gridCol w="2286000"/>
-                <a:gridCol w="3200400"/>
-                <a:gridCol w="2926080"/>
+                <a:gridCol w="2286000">
+                  <a:extLst>
+                    <a:ext uri="{9D8B030D-6E8A-4147-A177-3AD203B41FA5}">
+                      <a16:colId xmlns:a16="http://schemas.microsoft.com/office/drawing/2014/main" val="20000"/>
+                    </a:ext>
+                  </a:extLst>
+                </a:gridCol>
+                <a:gridCol w="3200400">
+                  <a:extLst>
+                    <a:ext uri="{9D8B030D-6E8A-4147-A177-3AD203B41FA5}">
+                      <a16:colId xmlns:a16="http://schemas.microsoft.com/office/drawing/2014/main" val="20001"/>
+                    </a:ext>
+                  </a:extLst>
+                </a:gridCol>
+                <a:gridCol w="2926080">
+                  <a:extLst>
+                    <a:ext uri="{9D8B030D-6E8A-4147-A177-3AD203B41FA5}">
+                      <a16:colId xmlns:a16="http://schemas.microsoft.com/office/drawing/2014/main" val="20002"/>
+                    </a:ext>
+                  </a:extLst>
+                </a:gridCol>
               </a:tblGrid>
               <a:tr h="502920">
                 <a:tc>
@@ -2430,7 +2220,7 @@
                     <a:bodyPr/>
                     <a:lstStyle/>
                     <a:p>
-                      <a:pPr indent="0" marL="0">
+                      <a:pPr marL="0" indent="0">
                         <a:buNone/>
                       </a:pPr>
                       <a:r>
@@ -2451,7 +2241,7 @@
                       </a:endParaRPr>
                     </a:p>
                   </a:txBody>
-                  <a:tcPr marL="91440" marR="91440" marT="45720" marB="45720">
+                  <a:tcPr>
                     <a:lnL w="6350" cap="flat" cmpd="sng" algn="ctr">
                       <a:solidFill>
                         <a:srgbClr val="D1E8D1"/>
@@ -2498,7 +2288,7 @@
                     <a:bodyPr/>
                     <a:lstStyle/>
                     <a:p>
-                      <a:pPr indent="0" marL="0">
+                      <a:pPr marL="0" indent="0">
                         <a:buNone/>
                       </a:pPr>
                       <a:r>
@@ -2519,7 +2309,7 @@
                       </a:endParaRPr>
                     </a:p>
                   </a:txBody>
-                  <a:tcPr marL="91440" marR="91440" marT="45720" marB="45720">
+                  <a:tcPr>
                     <a:lnL w="6350" cap="flat" cmpd="sng" algn="ctr">
                       <a:solidFill>
                         <a:srgbClr val="D1E8D1"/>
@@ -2566,7 +2356,7 @@
                     <a:bodyPr/>
                     <a:lstStyle/>
                     <a:p>
-                      <a:pPr indent="0" marL="0">
+                      <a:pPr marL="0" indent="0">
                         <a:buNone/>
                       </a:pPr>
                       <a:r>
@@ -2587,7 +2377,7 @@
                       </a:endParaRPr>
                     </a:p>
                   </a:txBody>
-                  <a:tcPr marL="91440" marR="91440" marT="45720" marB="45720">
+                  <a:tcPr>
                     <a:lnL w="6350" cap="flat" cmpd="sng" algn="ctr">
                       <a:solidFill>
                         <a:srgbClr val="D1E8D1"/>
@@ -2629,6 +2419,11 @@
                     </a:solidFill>
                   </a:tcPr>
                 </a:tc>
+                <a:extLst>
+                  <a:ext uri="{0D108BD9-81ED-4DB2-BD59-A6C34878D82A}">
+                    <a16:rowId xmlns:a16="http://schemas.microsoft.com/office/drawing/2014/main" val="10000"/>
+                  </a:ext>
+                </a:extLst>
               </a:tr>
               <a:tr h="502920">
                 <a:tc>
@@ -2636,7 +2431,7 @@
                     <a:bodyPr/>
                     <a:lstStyle/>
                     <a:p>
-                      <a:pPr indent="0" marL="0">
+                      <a:pPr marL="0" indent="0">
                         <a:buNone/>
                       </a:pPr>
                       <a:r>
@@ -2657,7 +2452,7 @@
                       </a:endParaRPr>
                     </a:p>
                   </a:txBody>
-                  <a:tcPr marL="91440" marR="91440" marT="45720" marB="45720">
+                  <a:tcPr>
                     <a:lnL w="6350" cap="flat" cmpd="sng" algn="ctr">
                       <a:solidFill>
                         <a:srgbClr val="D1E8D1"/>
@@ -2704,7 +2499,7 @@
                     <a:bodyPr/>
                     <a:lstStyle/>
                     <a:p>
-                      <a:pPr indent="0" marL="0">
+                      <a:pPr marL="0" indent="0">
                         <a:buNone/>
                       </a:pPr>
                       <a:r>
@@ -2725,7 +2520,7 @@
                       </a:endParaRPr>
                     </a:p>
                   </a:txBody>
-                  <a:tcPr marL="91440" marR="91440" marT="45720" marB="45720">
+                  <a:tcPr>
                     <a:lnL w="6350" cap="flat" cmpd="sng" algn="ctr">
                       <a:solidFill>
                         <a:srgbClr val="D1E8D1"/>
@@ -2772,7 +2567,7 @@
                     <a:bodyPr/>
                     <a:lstStyle/>
                     <a:p>
-                      <a:pPr indent="0" marL="0">
+                      <a:pPr marL="0" indent="0">
                         <a:buNone/>
                       </a:pPr>
                       <a:r>
@@ -2793,7 +2588,7 @@
                       </a:endParaRPr>
                     </a:p>
                   </a:txBody>
-                  <a:tcPr marL="91440" marR="91440" marT="45720" marB="45720">
+                  <a:tcPr>
                     <a:lnL w="6350" cap="flat" cmpd="sng" algn="ctr">
                       <a:solidFill>
                         <a:srgbClr val="D1E8D1"/>
@@ -2835,6 +2630,11 @@
                     </a:solidFill>
                   </a:tcPr>
                 </a:tc>
+                <a:extLst>
+                  <a:ext uri="{0D108BD9-81ED-4DB2-BD59-A6C34878D82A}">
+                    <a16:rowId xmlns:a16="http://schemas.microsoft.com/office/drawing/2014/main" val="10001"/>
+                  </a:ext>
+                </a:extLst>
               </a:tr>
               <a:tr h="502920">
                 <a:tc>
@@ -2842,7 +2642,7 @@
                     <a:bodyPr/>
                     <a:lstStyle/>
                     <a:p>
-                      <a:pPr indent="0" marL="0">
+                      <a:pPr marL="0" indent="0">
                         <a:buNone/>
                       </a:pPr>
                       <a:r>
@@ -2863,7 +2663,7 @@
                       </a:endParaRPr>
                     </a:p>
                   </a:txBody>
-                  <a:tcPr marL="91440" marR="91440" marT="45720" marB="45720">
+                  <a:tcPr>
                     <a:lnL w="6350" cap="flat" cmpd="sng" algn="ctr">
                       <a:solidFill>
                         <a:srgbClr val="D1E8D1"/>
@@ -2910,7 +2710,7 @@
                     <a:bodyPr/>
                     <a:lstStyle/>
                     <a:p>
-                      <a:pPr indent="0" marL="0">
+                      <a:pPr marL="0" indent="0">
                         <a:buNone/>
                       </a:pPr>
                       <a:r>
@@ -2931,7 +2731,7 @@
                       </a:endParaRPr>
                     </a:p>
                   </a:txBody>
-                  <a:tcPr marL="91440" marR="91440" marT="45720" marB="45720">
+                  <a:tcPr>
                     <a:lnL w="6350" cap="flat" cmpd="sng" algn="ctr">
                       <a:solidFill>
                         <a:srgbClr val="D1E8D1"/>
@@ -2978,7 +2778,7 @@
                     <a:bodyPr/>
                     <a:lstStyle/>
                     <a:p>
-                      <a:pPr indent="0" marL="0">
+                      <a:pPr marL="0" indent="0">
                         <a:buNone/>
                       </a:pPr>
                       <a:r>
@@ -2999,7 +2799,7 @@
                       </a:endParaRPr>
                     </a:p>
                   </a:txBody>
-                  <a:tcPr marL="91440" marR="91440" marT="45720" marB="45720">
+                  <a:tcPr>
                     <a:lnL w="6350" cap="flat" cmpd="sng" algn="ctr">
                       <a:solidFill>
                         <a:srgbClr val="D1E8D1"/>
@@ -3041,6 +2841,11 @@
                     </a:solidFill>
                   </a:tcPr>
                 </a:tc>
+                <a:extLst>
+                  <a:ext uri="{0D108BD9-81ED-4DB2-BD59-A6C34878D82A}">
+                    <a16:rowId xmlns:a16="http://schemas.microsoft.com/office/drawing/2014/main" val="10002"/>
+                  </a:ext>
+                </a:extLst>
               </a:tr>
               <a:tr h="502920">
                 <a:tc>
@@ -3048,7 +2853,7 @@
                     <a:bodyPr/>
                     <a:lstStyle/>
                     <a:p>
-                      <a:pPr indent="0" marL="0">
+                      <a:pPr marL="0" indent="0">
                         <a:buNone/>
                       </a:pPr>
                       <a:r>
@@ -3069,7 +2874,7 @@
                       </a:endParaRPr>
                     </a:p>
                   </a:txBody>
-                  <a:tcPr marL="91440" marR="91440" marT="45720" marB="45720">
+                  <a:tcPr>
                     <a:lnL w="6350" cap="flat" cmpd="sng" algn="ctr">
                       <a:solidFill>
                         <a:srgbClr val="D1E8D1"/>
@@ -3116,7 +2921,7 @@
                     <a:bodyPr/>
                     <a:lstStyle/>
                     <a:p>
-                      <a:pPr indent="0" marL="0">
+                      <a:pPr marL="0" indent="0">
                         <a:buNone/>
                       </a:pPr>
                       <a:r>
@@ -3137,7 +2942,7 @@
                       </a:endParaRPr>
                     </a:p>
                   </a:txBody>
-                  <a:tcPr marL="91440" marR="91440" marT="45720" marB="45720">
+                  <a:tcPr>
                     <a:lnL w="6350" cap="flat" cmpd="sng" algn="ctr">
                       <a:solidFill>
                         <a:srgbClr val="D1E8D1"/>
@@ -3184,7 +2989,7 @@
                     <a:bodyPr/>
                     <a:lstStyle/>
                     <a:p>
-                      <a:pPr indent="0" marL="0">
+                      <a:pPr marL="0" indent="0">
                         <a:buNone/>
                       </a:pPr>
                       <a:r>
@@ -3205,7 +3010,7 @@
                       </a:endParaRPr>
                     </a:p>
                   </a:txBody>
-                  <a:tcPr marL="91440" marR="91440" marT="45720" marB="45720">
+                  <a:tcPr>
                     <a:lnL w="6350" cap="flat" cmpd="sng" algn="ctr">
                       <a:solidFill>
                         <a:srgbClr val="D1E8D1"/>
@@ -3247,6 +3052,11 @@
                     </a:solidFill>
                   </a:tcPr>
                 </a:tc>
+                <a:extLst>
+                  <a:ext uri="{0D108BD9-81ED-4DB2-BD59-A6C34878D82A}">
+                    <a16:rowId xmlns:a16="http://schemas.microsoft.com/office/drawing/2014/main" val="10003"/>
+                  </a:ext>
+                </a:extLst>
               </a:tr>
               <a:tr h="502920">
                 <a:tc>
@@ -3254,7 +3064,7 @@
                     <a:bodyPr/>
                     <a:lstStyle/>
                     <a:p>
-                      <a:pPr indent="0" marL="0">
+                      <a:pPr marL="0" indent="0">
                         <a:buNone/>
                       </a:pPr>
                       <a:r>
@@ -3275,7 +3085,7 @@
                       </a:endParaRPr>
                     </a:p>
                   </a:txBody>
-                  <a:tcPr marL="91440" marR="91440" marT="45720" marB="45720">
+                  <a:tcPr>
                     <a:lnL w="6350" cap="flat" cmpd="sng" algn="ctr">
                       <a:solidFill>
                         <a:srgbClr val="D1E8D1"/>
@@ -3322,7 +3132,7 @@
                     <a:bodyPr/>
                     <a:lstStyle/>
                     <a:p>
-                      <a:pPr indent="0" marL="0">
+                      <a:pPr marL="0" indent="0">
                         <a:buNone/>
                       </a:pPr>
                       <a:r>
@@ -3343,7 +3153,7 @@
                       </a:endParaRPr>
                     </a:p>
                   </a:txBody>
-                  <a:tcPr marL="91440" marR="91440" marT="45720" marB="45720">
+                  <a:tcPr>
                     <a:lnL w="6350" cap="flat" cmpd="sng" algn="ctr">
                       <a:solidFill>
                         <a:srgbClr val="D1E8D1"/>
@@ -3390,7 +3200,7 @@
                     <a:bodyPr/>
                     <a:lstStyle/>
                     <a:p>
-                      <a:pPr indent="0" marL="0">
+                      <a:pPr marL="0" indent="0">
                         <a:buNone/>
                       </a:pPr>
                       <a:r>
@@ -3411,7 +3221,7 @@
                       </a:endParaRPr>
                     </a:p>
                   </a:txBody>
-                  <a:tcPr marL="91440" marR="91440" marT="45720" marB="45720">
+                  <a:tcPr>
                     <a:lnL w="6350" cap="flat" cmpd="sng" algn="ctr">
                       <a:solidFill>
                         <a:srgbClr val="D1E8D1"/>
@@ -3453,6 +3263,11 @@
                     </a:solidFill>
                   </a:tcPr>
                 </a:tc>
+                <a:extLst>
+                  <a:ext uri="{0D108BD9-81ED-4DB2-BD59-A6C34878D82A}">
+                    <a16:rowId xmlns:a16="http://schemas.microsoft.com/office/drawing/2014/main" val="10004"/>
+                  </a:ext>
+                </a:extLst>
               </a:tr>
               <a:tr h="502920">
                 <a:tc>
@@ -3460,7 +3275,7 @@
                     <a:bodyPr/>
                     <a:lstStyle/>
                     <a:p>
-                      <a:pPr indent="0" marL="0">
+                      <a:pPr marL="0" indent="0">
                         <a:buNone/>
                       </a:pPr>
                       <a:r>
@@ -3481,7 +3296,7 @@
                       </a:endParaRPr>
                     </a:p>
                   </a:txBody>
-                  <a:tcPr marL="91440" marR="91440" marT="45720" marB="45720">
+                  <a:tcPr>
                     <a:lnL w="6350" cap="flat" cmpd="sng" algn="ctr">
                       <a:solidFill>
                         <a:srgbClr val="D1E8D1"/>
@@ -3528,7 +3343,7 @@
                     <a:bodyPr/>
                     <a:lstStyle/>
                     <a:p>
-                      <a:pPr indent="0" marL="0">
+                      <a:pPr marL="0" indent="0">
                         <a:buNone/>
                       </a:pPr>
                       <a:r>
@@ -3549,7 +3364,7 @@
                       </a:endParaRPr>
                     </a:p>
                   </a:txBody>
-                  <a:tcPr marL="91440" marR="91440" marT="45720" marB="45720">
+                  <a:tcPr>
                     <a:lnL w="6350" cap="flat" cmpd="sng" algn="ctr">
                       <a:solidFill>
                         <a:srgbClr val="D1E8D1"/>
@@ -3596,7 +3411,7 @@
                     <a:bodyPr/>
                     <a:lstStyle/>
                     <a:p>
-                      <a:pPr indent="0" marL="0">
+                      <a:pPr marL="0" indent="0">
                         <a:buNone/>
                       </a:pPr>
                       <a:r>
@@ -3617,7 +3432,7 @@
                       </a:endParaRPr>
                     </a:p>
                   </a:txBody>
-                  <a:tcPr marL="91440" marR="91440" marT="45720" marB="45720">
+                  <a:tcPr>
                     <a:lnL w="6350" cap="flat" cmpd="sng" algn="ctr">
                       <a:solidFill>
                         <a:srgbClr val="D1E8D1"/>
@@ -3659,6 +3474,11 @@
                     </a:solidFill>
                   </a:tcPr>
                 </a:tc>
+                <a:extLst>
+                  <a:ext uri="{0D108BD9-81ED-4DB2-BD59-A6C34878D82A}">
+                    <a16:rowId xmlns:a16="http://schemas.microsoft.com/office/drawing/2014/main" val="10005"/>
+                  </a:ext>
+                </a:extLst>
               </a:tr>
             </a:tbl>
           </a:graphicData>
@@ -3685,7 +3505,7 @@
           <a:bodyPr wrap="square" lIns="0" tIns="0" rIns="0" bIns="0" rtlCol="0" anchor="ctr"/>
           <a:lstStyle/>
           <a:p>
-            <a:pPr indent="0" marL="0">
+            <a:pPr marL="0" indent="0">
               <a:buNone/>
             </a:pPr>
             <a:r>
@@ -3699,9 +3519,6 @@
               </a:rPr>
               <a:t>Pillar: </a:t>
             </a:r>
-            <a:pPr indent="0" marL="0">
-              <a:buNone/>
-            </a:pPr>
             <a:r>
               <a:rPr lang="en-US" sz="1100" b="1" dirty="0">
                 <a:solidFill>
@@ -3733,6 +3550,7 @@
         <a:solidFill>
           <a:srgbClr val="F4F7F4"/>
         </a:solidFill>
+        <a:effectLst/>
       </p:bgPr>
     </p:bg>
     <p:spTree>
@@ -3770,7 +3588,7 @@
           <a:bodyPr wrap="square" lIns="0" tIns="0" rIns="0" bIns="0" rtlCol="0" anchor="ctr"/>
           <a:lstStyle/>
           <a:p>
-            <a:pPr indent="0" marL="0">
+            <a:pPr marL="0" indent="0">
               <a:buNone/>
             </a:pPr>
             <a:r>
@@ -3836,7 +3654,7 @@
           <a:bodyPr wrap="square" lIns="0" tIns="0" rIns="0" bIns="0" rtlCol="0" anchor="ctr"/>
           <a:lstStyle/>
           <a:p>
-            <a:pPr indent="0" marL="0">
+            <a:pPr marL="0" indent="0">
               <a:buNone/>
             </a:pPr>
             <a:r>
@@ -3875,7 +3693,7 @@
           <a:bodyPr wrap="square" lIns="0" tIns="0" rIns="0" bIns="0" rtlCol="0" anchor="ctr"/>
           <a:lstStyle/>
           <a:p>
-            <a:pPr indent="0" marL="0">
+            <a:pPr marL="0" indent="0">
               <a:buNone/>
             </a:pPr>
             <a:r>
@@ -3914,7 +3732,7 @@
           <a:bodyPr wrap="square" lIns="0" tIns="0" rIns="0" bIns="0" rtlCol="0" anchor="ctr"/>
           <a:lstStyle/>
           <a:p>
-            <a:pPr indent="0" marL="0">
+            <a:pPr marL="0" indent="0">
               <a:buNone/>
             </a:pPr>
             <a:r>
@@ -3928,9 +3746,6 @@
               </a:rPr>
               <a:t>→  </a:t>
             </a:r>
-            <a:pPr indent="0" marL="0">
-              <a:buNone/>
-            </a:pPr>
             <a:r>
               <a:rPr lang="en-US" sz="1050" dirty="0">
                 <a:solidFill>
@@ -3967,7 +3782,7 @@
           <a:bodyPr wrap="square" lIns="0" tIns="0" rIns="0" bIns="0" rtlCol="0" anchor="ctr"/>
           <a:lstStyle/>
           <a:p>
-            <a:pPr indent="0" marL="0">
+            <a:pPr marL="0" indent="0">
               <a:buNone/>
             </a:pPr>
             <a:r>
@@ -3981,9 +3796,6 @@
               </a:rPr>
               <a:t>→  </a:t>
             </a:r>
-            <a:pPr indent="0" marL="0">
-              <a:buNone/>
-            </a:pPr>
             <a:r>
               <a:rPr lang="en-US" sz="1050" dirty="0">
                 <a:solidFill>
@@ -4020,7 +3832,7 @@
           <a:bodyPr wrap="square" lIns="0" tIns="0" rIns="0" bIns="0" rtlCol="0" anchor="ctr"/>
           <a:lstStyle/>
           <a:p>
-            <a:pPr indent="0" marL="0">
+            <a:pPr marL="0" indent="0">
               <a:buNone/>
             </a:pPr>
             <a:r>
@@ -4034,9 +3846,6 @@
               </a:rPr>
               <a:t>→  </a:t>
             </a:r>
-            <a:pPr indent="0" marL="0">
-              <a:buNone/>
-            </a:pPr>
             <a:r>
               <a:rPr lang="en-US" sz="1050" dirty="0">
                 <a:solidFill>
@@ -4073,7 +3882,7 @@
           <a:bodyPr wrap="square" lIns="0" tIns="0" rIns="0" bIns="0" rtlCol="0" anchor="ctr"/>
           <a:lstStyle/>
           <a:p>
-            <a:pPr indent="0" marL="0">
+            <a:pPr marL="0" indent="0">
               <a:buNone/>
             </a:pPr>
             <a:r>
@@ -4087,9 +3896,6 @@
               </a:rPr>
               <a:t>→  </a:t>
             </a:r>
-            <a:pPr indent="0" marL="0">
-              <a:buNone/>
-            </a:pPr>
             <a:r>
               <a:rPr lang="en-US" sz="1050" dirty="0">
                 <a:solidFill>
@@ -4153,7 +3959,7 @@
           <a:bodyPr wrap="square" lIns="0" tIns="0" rIns="0" bIns="0" rtlCol="0" anchor="ctr"/>
           <a:lstStyle/>
           <a:p>
-            <a:pPr indent="0" marL="0">
+            <a:pPr marL="0" indent="0">
               <a:buNone/>
             </a:pPr>
             <a:r>
@@ -4192,7 +3998,7 @@
           <a:bodyPr wrap="square" lIns="0" tIns="0" rIns="0" bIns="0" rtlCol="0" anchor="ctr"/>
           <a:lstStyle/>
           <a:p>
-            <a:pPr indent="0" marL="0">
+            <a:pPr marL="0" indent="0">
               <a:buNone/>
             </a:pPr>
             <a:r>
@@ -4258,7 +4064,7 @@
           <a:bodyPr wrap="square" lIns="0" tIns="0" rIns="0" bIns="0" rtlCol="0" anchor="ctr"/>
           <a:lstStyle/>
           <a:p>
-            <a:pPr indent="0" marL="0">
+            <a:pPr marL="0" indent="0">
               <a:buNone/>
             </a:pPr>
             <a:r>
@@ -4297,7 +4103,7 @@
           <a:bodyPr wrap="square" lIns="0" tIns="0" rIns="0" bIns="0" rtlCol="0" anchor="ctr"/>
           <a:lstStyle/>
           <a:p>
-            <a:pPr indent="0" marL="0">
+            <a:pPr marL="0" indent="0">
               <a:buNone/>
             </a:pPr>
             <a:r>
@@ -4336,7 +4142,7 @@
           <a:bodyPr wrap="square" lIns="0" tIns="0" rIns="0" bIns="0" rtlCol="0" anchor="ctr"/>
           <a:lstStyle/>
           <a:p>
-            <a:pPr indent="0" marL="0">
+            <a:pPr marL="0" indent="0">
               <a:buNone/>
             </a:pPr>
             <a:r>
@@ -4350,9 +4156,6 @@
               </a:rPr>
               <a:t>→  </a:t>
             </a:r>
-            <a:pPr indent="0" marL="0">
-              <a:buNone/>
-            </a:pPr>
             <a:r>
               <a:rPr lang="en-US" sz="1050" dirty="0">
                 <a:solidFill>
@@ -4389,7 +4192,7 @@
           <a:bodyPr wrap="square" lIns="0" tIns="0" rIns="0" bIns="0" rtlCol="0" anchor="ctr"/>
           <a:lstStyle/>
           <a:p>
-            <a:pPr indent="0" marL="0">
+            <a:pPr marL="0" indent="0">
               <a:buNone/>
             </a:pPr>
             <a:r>
@@ -4403,9 +4206,6 @@
               </a:rPr>
               <a:t>→  </a:t>
             </a:r>
-            <a:pPr indent="0" marL="0">
-              <a:buNone/>
-            </a:pPr>
             <a:r>
               <a:rPr lang="en-US" sz="1050" dirty="0">
                 <a:solidFill>
@@ -4442,7 +4242,7 @@
           <a:bodyPr wrap="square" lIns="0" tIns="0" rIns="0" bIns="0" rtlCol="0" anchor="ctr"/>
           <a:lstStyle/>
           <a:p>
-            <a:pPr indent="0" marL="0">
+            <a:pPr marL="0" indent="0">
               <a:buNone/>
             </a:pPr>
             <a:r>
@@ -4456,9 +4256,6 @@
               </a:rPr>
               <a:t>→  </a:t>
             </a:r>
-            <a:pPr indent="0" marL="0">
-              <a:buNone/>
-            </a:pPr>
             <a:r>
               <a:rPr lang="en-US" sz="1050" dirty="0">
                 <a:solidFill>
@@ -4495,7 +4292,7 @@
           <a:bodyPr wrap="square" lIns="0" tIns="0" rIns="0" bIns="0" rtlCol="0" anchor="ctr"/>
           <a:lstStyle/>
           <a:p>
-            <a:pPr indent="0" marL="0">
+            <a:pPr marL="0" indent="0">
               <a:buNone/>
             </a:pPr>
             <a:r>
@@ -4509,9 +4306,6 @@
               </a:rPr>
               <a:t>→  </a:t>
             </a:r>
-            <a:pPr indent="0" marL="0">
-              <a:buNone/>
-            </a:pPr>
             <a:r>
               <a:rPr lang="en-US" sz="1050" dirty="0">
                 <a:solidFill>
@@ -4575,7 +4369,7 @@
           <a:bodyPr wrap="square" lIns="0" tIns="0" rIns="0" bIns="0" rtlCol="0" anchor="ctr"/>
           <a:lstStyle/>
           <a:p>
-            <a:pPr indent="0" marL="0">
+            <a:pPr marL="0" indent="0">
               <a:buNone/>
             </a:pPr>
             <a:r>
@@ -4614,7 +4408,7 @@
           <a:bodyPr wrap="square" lIns="0" tIns="0" rIns="0" bIns="0" rtlCol="0" anchor="ctr"/>
           <a:lstStyle/>
           <a:p>
-            <a:pPr indent="0" marL="0">
+            <a:pPr marL="0" indent="0">
               <a:buNone/>
             </a:pPr>
             <a:r>
@@ -4648,6 +4442,7 @@
         <a:solidFill>
           <a:srgbClr val="1A2E2A"/>
         </a:solidFill>
+        <a:effectLst/>
       </p:bgPr>
     </p:bg>
     <p:spTree>
@@ -4685,7 +4480,7 @@
           <a:bodyPr wrap="square" lIns="0" tIns="0" rIns="0" bIns="0" rtlCol="0" anchor="ctr"/>
           <a:lstStyle/>
           <a:p>
-            <a:pPr indent="0" marL="0">
+            <a:pPr marL="0" indent="0">
               <a:buNone/>
             </a:pPr>
             <a:r>
@@ -4732,14 +4527,14 @@
       </p:sp>
       <p:pic>
         <p:nvPicPr>
-          <p:cNvPr id="4" name="Image 0" descr="preencoded.png">    </p:cNvPr>
+          <p:cNvPr id="4" name="Image 0" descr="preencoded.png"/>
           <p:cNvPicPr>
             <a:picLocks noChangeAspect="1"/>
           </p:cNvPicPr>
           <p:nvPr/>
         </p:nvPicPr>
         <p:blipFill>
-          <a:blip r:embed="rId1"/>
+          <a:blip r:embed="rId3"/>
           <a:stretch>
             <a:fillRect/>
           </a:stretch>
@@ -4775,7 +4570,7 @@
           <a:bodyPr wrap="square" lIns="0" tIns="0" rIns="0" bIns="0" rtlCol="0" anchor="ctr"/>
           <a:lstStyle/>
           <a:p>
-            <a:pPr indent="0" marL="0">
+            <a:pPr marL="0" indent="0">
               <a:buNone/>
             </a:pPr>
             <a:r>
@@ -4814,7 +4609,7 @@
           <a:bodyPr wrap="square" lIns="0" tIns="0" rIns="0" bIns="0" rtlCol="0" anchor="ctr"/>
           <a:lstStyle/>
           <a:p>
-            <a:pPr indent="0" marL="0">
+            <a:pPr marL="0" indent="0">
               <a:buNone/>
             </a:pPr>
             <a:r>
@@ -4861,14 +4656,14 @@
       </p:sp>
       <p:pic>
         <p:nvPicPr>
-          <p:cNvPr id="8" name="Image 1" descr="preencoded.png">    </p:cNvPr>
+          <p:cNvPr id="8" name="Image 1" descr="preencoded.png"/>
           <p:cNvPicPr>
             <a:picLocks noChangeAspect="1"/>
           </p:cNvPicPr>
           <p:nvPr/>
         </p:nvPicPr>
         <p:blipFill>
-          <a:blip r:embed="rId2"/>
+          <a:blip r:embed="rId4"/>
           <a:stretch>
             <a:fillRect/>
           </a:stretch>
@@ -4904,7 +4699,7 @@
           <a:bodyPr wrap="square" lIns="0" tIns="0" rIns="0" bIns="0" rtlCol="0" anchor="ctr"/>
           <a:lstStyle/>
           <a:p>
-            <a:pPr indent="0" marL="0">
+            <a:pPr marL="0" indent="0">
               <a:buNone/>
             </a:pPr>
             <a:r>
@@ -4943,7 +4738,7 @@
           <a:bodyPr wrap="square" lIns="0" tIns="0" rIns="0" bIns="0" rtlCol="0" anchor="ctr"/>
           <a:lstStyle/>
           <a:p>
-            <a:pPr indent="0" marL="0">
+            <a:pPr marL="0" indent="0">
               <a:buNone/>
             </a:pPr>
             <a:r>
@@ -4990,14 +4785,14 @@
       </p:sp>
       <p:pic>
         <p:nvPicPr>
-          <p:cNvPr id="12" name="Image 2" descr="preencoded.png">    </p:cNvPr>
+          <p:cNvPr id="12" name="Image 2" descr="preencoded.png"/>
           <p:cNvPicPr>
             <a:picLocks noChangeAspect="1"/>
           </p:cNvPicPr>
           <p:nvPr/>
         </p:nvPicPr>
         <p:blipFill>
-          <a:blip r:embed="rId3"/>
+          <a:blip r:embed="rId5"/>
           <a:stretch>
             <a:fillRect/>
           </a:stretch>
@@ -5033,7 +4828,7 @@
           <a:bodyPr wrap="square" lIns="0" tIns="0" rIns="0" bIns="0" rtlCol="0" anchor="ctr"/>
           <a:lstStyle/>
           <a:p>
-            <a:pPr indent="0" marL="0">
+            <a:pPr marL="0" indent="0">
               <a:buNone/>
             </a:pPr>
             <a:r>
@@ -5072,7 +4867,7 @@
           <a:bodyPr wrap="square" lIns="0" tIns="0" rIns="0" bIns="0" rtlCol="0" anchor="ctr"/>
           <a:lstStyle/>
           <a:p>
-            <a:pPr indent="0" marL="0">
+            <a:pPr marL="0" indent="0">
               <a:buNone/>
             </a:pPr>
             <a:r>
@@ -5119,14 +4914,14 @@
       </p:sp>
       <p:pic>
         <p:nvPicPr>
-          <p:cNvPr id="16" name="Image 3" descr="preencoded.png">    </p:cNvPr>
+          <p:cNvPr id="16" name="Image 3" descr="preencoded.png"/>
           <p:cNvPicPr>
             <a:picLocks noChangeAspect="1"/>
           </p:cNvPicPr>
           <p:nvPr/>
         </p:nvPicPr>
         <p:blipFill>
-          <a:blip r:embed="rId4"/>
+          <a:blip r:embed="rId6"/>
           <a:stretch>
             <a:fillRect/>
           </a:stretch>
@@ -5162,7 +4957,7 @@
           <a:bodyPr wrap="square" lIns="0" tIns="0" rIns="0" bIns="0" rtlCol="0" anchor="ctr"/>
           <a:lstStyle/>
           <a:p>
-            <a:pPr indent="0" marL="0">
+            <a:pPr marL="0" indent="0">
               <a:buNone/>
             </a:pPr>
             <a:r>
@@ -5201,7 +4996,7 @@
           <a:bodyPr wrap="square" lIns="0" tIns="0" rIns="0" bIns="0" rtlCol="0" anchor="ctr"/>
           <a:lstStyle/>
           <a:p>
-            <a:pPr indent="0" marL="0">
+            <a:pPr marL="0" indent="0">
               <a:buNone/>
             </a:pPr>
             <a:r>
@@ -5240,7 +5035,7 @@
           <a:bodyPr wrap="square" lIns="0" tIns="0" rIns="0" bIns="0" rtlCol="0" anchor="ctr"/>
           <a:lstStyle/>
           <a:p>
-            <a:pPr algn="ctr" indent="0" marL="0">
+            <a:pPr marL="0" indent="0" algn="ctr">
               <a:buNone/>
             </a:pPr>
             <a:r>
@@ -5274,6 +5069,7 @@
         <a:solidFill>
           <a:srgbClr val="2C5F2D"/>
         </a:solidFill>
+        <a:effectLst/>
       </p:bgPr>
     </p:bg>
     <p:spTree>
@@ -5311,7 +5107,7 @@
           <a:bodyPr wrap="square" lIns="0" tIns="0" rIns="0" bIns="0" rtlCol="0" anchor="ctr"/>
           <a:lstStyle/>
           <a:p>
-            <a:pPr indent="0" marL="0">
+            <a:pPr marL="0" indent="0">
               <a:buNone/>
             </a:pPr>
             <a:r>
@@ -5337,7 +5133,7 @@
         </p:nvSpPr>
         <p:spPr>
           <a:xfrm>
-            <a:off x="457200" y="457200"/>
+            <a:off x="457200" y="475989"/>
             <a:ext cx="8229600" cy="548640"/>
           </a:xfrm>
           <a:prstGeom prst="rect">
@@ -5350,7 +5146,7 @@
           <a:bodyPr wrap="square" lIns="0" tIns="0" rIns="0" bIns="0" rtlCol="0" anchor="ctr"/>
           <a:lstStyle/>
           <a:p>
-            <a:pPr indent="0" marL="0">
+            <a:pPr marL="0" indent="0">
               <a:buNone/>
             </a:pPr>
             <a:r>
@@ -5391,11 +5187,41 @@
             <a:tbl>
               <a:tblPr/>
               <a:tblGrid>
-                <a:gridCol w="1554480"/>
-                <a:gridCol w="1828800"/>
-                <a:gridCol w="1188720"/>
-                <a:gridCol w="2103120"/>
-                <a:gridCol w="1828800"/>
+                <a:gridCol w="1554480">
+                  <a:extLst>
+                    <a:ext uri="{9D8B030D-6E8A-4147-A177-3AD203B41FA5}">
+                      <a16:colId xmlns:a16="http://schemas.microsoft.com/office/drawing/2014/main" val="20000"/>
+                    </a:ext>
+                  </a:extLst>
+                </a:gridCol>
+                <a:gridCol w="1828800">
+                  <a:extLst>
+                    <a:ext uri="{9D8B030D-6E8A-4147-A177-3AD203B41FA5}">
+                      <a16:colId xmlns:a16="http://schemas.microsoft.com/office/drawing/2014/main" val="20001"/>
+                    </a:ext>
+                  </a:extLst>
+                </a:gridCol>
+                <a:gridCol w="1188720">
+                  <a:extLst>
+                    <a:ext uri="{9D8B030D-6E8A-4147-A177-3AD203B41FA5}">
+                      <a16:colId xmlns:a16="http://schemas.microsoft.com/office/drawing/2014/main" val="20002"/>
+                    </a:ext>
+                  </a:extLst>
+                </a:gridCol>
+                <a:gridCol w="2103120">
+                  <a:extLst>
+                    <a:ext uri="{9D8B030D-6E8A-4147-A177-3AD203B41FA5}">
+                      <a16:colId xmlns:a16="http://schemas.microsoft.com/office/drawing/2014/main" val="20003"/>
+                    </a:ext>
+                  </a:extLst>
+                </a:gridCol>
+                <a:gridCol w="1828800">
+                  <a:extLst>
+                    <a:ext uri="{9D8B030D-6E8A-4147-A177-3AD203B41FA5}">
+                      <a16:colId xmlns:a16="http://schemas.microsoft.com/office/drawing/2014/main" val="20004"/>
+                    </a:ext>
+                  </a:extLst>
+                </a:gridCol>
               </a:tblGrid>
               <a:tr h="694944">
                 <a:tc>
@@ -5403,7 +5229,7 @@
                     <a:bodyPr/>
                     <a:lstStyle/>
                     <a:p>
-                      <a:pPr indent="0" marL="0">
+                      <a:pPr marL="0" indent="0">
                         <a:buNone/>
                       </a:pPr>
                       <a:r>
@@ -5424,7 +5250,7 @@
                       </a:endParaRPr>
                     </a:p>
                   </a:txBody>
-                  <a:tcPr marL="91440" marR="91440" marT="45720" marB="45720">
+                  <a:tcPr>
                     <a:lnL w="6350" cap="flat" cmpd="sng" algn="ctr">
                       <a:solidFill>
                         <a:srgbClr val="2C6A30"/>
@@ -5471,7 +5297,7 @@
                     <a:bodyPr/>
                     <a:lstStyle/>
                     <a:p>
-                      <a:pPr indent="0" marL="0">
+                      <a:pPr marL="0" indent="0">
                         <a:buNone/>
                       </a:pPr>
                       <a:r>
@@ -5492,7 +5318,7 @@
                       </a:endParaRPr>
                     </a:p>
                   </a:txBody>
-                  <a:tcPr marL="91440" marR="91440" marT="45720" marB="45720">
+                  <a:tcPr>
                     <a:lnL w="6350" cap="flat" cmpd="sng" algn="ctr">
                       <a:solidFill>
                         <a:srgbClr val="2C6A30"/>
@@ -5539,7 +5365,7 @@
                     <a:bodyPr/>
                     <a:lstStyle/>
                     <a:p>
-                      <a:pPr indent="0" marL="0">
+                      <a:pPr marL="0" indent="0">
                         <a:buNone/>
                       </a:pPr>
                       <a:r>
@@ -5560,7 +5386,7 @@
                       </a:endParaRPr>
                     </a:p>
                   </a:txBody>
-                  <a:tcPr marL="91440" marR="91440" marT="45720" marB="45720">
+                  <a:tcPr>
                     <a:lnL w="6350" cap="flat" cmpd="sng" algn="ctr">
                       <a:solidFill>
                         <a:srgbClr val="2C6A30"/>
@@ -5607,7 +5433,7 @@
                     <a:bodyPr/>
                     <a:lstStyle/>
                     <a:p>
-                      <a:pPr indent="0" marL="0">
+                      <a:pPr marL="0" indent="0">
                         <a:buNone/>
                       </a:pPr>
                       <a:r>
@@ -5628,7 +5454,7 @@
                       </a:endParaRPr>
                     </a:p>
                   </a:txBody>
-                  <a:tcPr marL="91440" marR="91440" marT="45720" marB="45720">
+                  <a:tcPr>
                     <a:lnL w="6350" cap="flat" cmpd="sng" algn="ctr">
                       <a:solidFill>
                         <a:srgbClr val="2C6A30"/>
@@ -5675,7 +5501,7 @@
                     <a:bodyPr/>
                     <a:lstStyle/>
                     <a:p>
-                      <a:pPr indent="0" marL="0">
+                      <a:pPr marL="0" indent="0">
                         <a:buNone/>
                       </a:pPr>
                       <a:r>
@@ -5696,7 +5522,7 @@
                       </a:endParaRPr>
                     </a:p>
                   </a:txBody>
-                  <a:tcPr marL="91440" marR="91440" marT="45720" marB="45720">
+                  <a:tcPr>
                     <a:lnL w="6350" cap="flat" cmpd="sng" algn="ctr">
                       <a:solidFill>
                         <a:srgbClr val="2C6A30"/>
@@ -5738,6 +5564,11 @@
                     </a:solidFill>
                   </a:tcPr>
                 </a:tc>
+                <a:extLst>
+                  <a:ext uri="{0D108BD9-81ED-4DB2-BD59-A6C34878D82A}">
+                    <a16:rowId xmlns:a16="http://schemas.microsoft.com/office/drawing/2014/main" val="10000"/>
+                  </a:ext>
+                </a:extLst>
               </a:tr>
               <a:tr h="694944">
                 <a:tc>
@@ -5745,7 +5576,7 @@
                     <a:bodyPr/>
                     <a:lstStyle/>
                     <a:p>
-                      <a:pPr indent="0" marL="0">
+                      <a:pPr marL="0" indent="0">
                         <a:buNone/>
                       </a:pPr>
                       <a:r>
@@ -5766,7 +5597,7 @@
                       </a:endParaRPr>
                     </a:p>
                   </a:txBody>
-                  <a:tcPr marL="91440" marR="91440" marT="45720" marB="45720">
+                  <a:tcPr>
                     <a:lnL w="6350" cap="flat" cmpd="sng" algn="ctr">
                       <a:solidFill>
                         <a:srgbClr val="2C6A30"/>
@@ -5813,7 +5644,7 @@
                     <a:bodyPr/>
                     <a:lstStyle/>
                     <a:p>
-                      <a:pPr indent="0" marL="0">
+                      <a:pPr marL="0" indent="0">
                         <a:buNone/>
                       </a:pPr>
                       <a:r>
@@ -5834,7 +5665,7 @@
                       </a:endParaRPr>
                     </a:p>
                   </a:txBody>
-                  <a:tcPr marL="91440" marR="91440" marT="45720" marB="45720">
+                  <a:tcPr>
                     <a:lnL w="6350" cap="flat" cmpd="sng" algn="ctr">
                       <a:solidFill>
                         <a:srgbClr val="2C6A30"/>
@@ -5881,7 +5712,7 @@
                     <a:bodyPr/>
                     <a:lstStyle/>
                     <a:p>
-                      <a:pPr indent="0" marL="0">
+                      <a:pPr marL="0" indent="0">
                         <a:buNone/>
                       </a:pPr>
                       <a:r>
@@ -5902,7 +5733,7 @@
                       </a:endParaRPr>
                     </a:p>
                   </a:txBody>
-                  <a:tcPr marL="91440" marR="91440" marT="45720" marB="45720">
+                  <a:tcPr>
                     <a:lnL w="6350" cap="flat" cmpd="sng" algn="ctr">
                       <a:solidFill>
                         <a:srgbClr val="2C6A30"/>
@@ -5949,7 +5780,7 @@
                     <a:bodyPr/>
                     <a:lstStyle/>
                     <a:p>
-                      <a:pPr indent="0" marL="0">
+                      <a:pPr marL="0" indent="0">
                         <a:buNone/>
                       </a:pPr>
                       <a:r>
@@ -5970,7 +5801,7 @@
                       </a:endParaRPr>
                     </a:p>
                     <a:p>
-                      <a:pPr indent="0" marL="0">
+                      <a:pPr marL="0" indent="0">
                         <a:buNone/>
                       </a:pPr>
                       <a:r>
@@ -5991,7 +5822,7 @@
                       </a:endParaRPr>
                     </a:p>
                   </a:txBody>
-                  <a:tcPr marL="91440" marR="91440" marT="45720" marB="45720">
+                  <a:tcPr>
                     <a:lnL w="6350" cap="flat" cmpd="sng" algn="ctr">
                       <a:solidFill>
                         <a:srgbClr val="2C6A30"/>
@@ -6038,7 +5869,7 @@
                     <a:bodyPr/>
                     <a:lstStyle/>
                     <a:p>
-                      <a:pPr indent="0" marL="0">
+                      <a:pPr marL="0" indent="0">
                         <a:buNone/>
                       </a:pPr>
                       <a:r>
@@ -6059,7 +5890,7 @@
                       </a:endParaRPr>
                     </a:p>
                   </a:txBody>
-                  <a:tcPr marL="91440" marR="91440" marT="45720" marB="45720">
+                  <a:tcPr>
                     <a:lnL w="6350" cap="flat" cmpd="sng" algn="ctr">
                       <a:solidFill>
                         <a:srgbClr val="2C6A30"/>
@@ -6101,6 +5932,11 @@
                     </a:solidFill>
                   </a:tcPr>
                 </a:tc>
+                <a:extLst>
+                  <a:ext uri="{0D108BD9-81ED-4DB2-BD59-A6C34878D82A}">
+                    <a16:rowId xmlns:a16="http://schemas.microsoft.com/office/drawing/2014/main" val="10001"/>
+                  </a:ext>
+                </a:extLst>
               </a:tr>
               <a:tr h="694944">
                 <a:tc>
@@ -6108,7 +5944,7 @@
                     <a:bodyPr/>
                     <a:lstStyle/>
                     <a:p>
-                      <a:pPr indent="0" marL="0">
+                      <a:pPr marL="0" indent="0">
                         <a:buNone/>
                       </a:pPr>
                       <a:r>
@@ -6129,7 +5965,7 @@
                       </a:endParaRPr>
                     </a:p>
                   </a:txBody>
-                  <a:tcPr marL="91440" marR="91440" marT="45720" marB="45720">
+                  <a:tcPr>
                     <a:lnL w="6350" cap="flat" cmpd="sng" algn="ctr">
                       <a:solidFill>
                         <a:srgbClr val="2C6A30"/>
@@ -6176,7 +6012,7 @@
                     <a:bodyPr/>
                     <a:lstStyle/>
                     <a:p>
-                      <a:pPr indent="0" marL="0">
+                      <a:pPr marL="0" indent="0">
                         <a:buNone/>
                       </a:pPr>
                       <a:r>
@@ -6197,7 +6033,7 @@
                       </a:endParaRPr>
                     </a:p>
                   </a:txBody>
-                  <a:tcPr marL="91440" marR="91440" marT="45720" marB="45720">
+                  <a:tcPr>
                     <a:lnL w="6350" cap="flat" cmpd="sng" algn="ctr">
                       <a:solidFill>
                         <a:srgbClr val="2C6A30"/>
@@ -6244,7 +6080,7 @@
                     <a:bodyPr/>
                     <a:lstStyle/>
                     <a:p>
-                      <a:pPr indent="0" marL="0">
+                      <a:pPr marL="0" indent="0">
                         <a:buNone/>
                       </a:pPr>
                       <a:r>
@@ -6265,7 +6101,7 @@
                       </a:endParaRPr>
                     </a:p>
                   </a:txBody>
-                  <a:tcPr marL="91440" marR="91440" marT="45720" marB="45720">
+                  <a:tcPr>
                     <a:lnL w="6350" cap="flat" cmpd="sng" algn="ctr">
                       <a:solidFill>
                         <a:srgbClr val="2C6A30"/>
@@ -6312,7 +6148,7 @@
                     <a:bodyPr/>
                     <a:lstStyle/>
                     <a:p>
-                      <a:pPr indent="0" marL="0">
+                      <a:pPr marL="0" indent="0">
                         <a:buNone/>
                       </a:pPr>
                       <a:r>
@@ -6333,7 +6169,7 @@
                       </a:endParaRPr>
                     </a:p>
                     <a:p>
-                      <a:pPr indent="0" marL="0">
+                      <a:pPr marL="0" indent="0">
                         <a:buNone/>
                       </a:pPr>
                       <a:r>
@@ -6354,7 +6190,7 @@
                       </a:endParaRPr>
                     </a:p>
                   </a:txBody>
-                  <a:tcPr marL="91440" marR="91440" marT="45720" marB="45720">
+                  <a:tcPr>
                     <a:lnL w="6350" cap="flat" cmpd="sng" algn="ctr">
                       <a:solidFill>
                         <a:srgbClr val="2C6A30"/>
@@ -6401,7 +6237,7 @@
                     <a:bodyPr/>
                     <a:lstStyle/>
                     <a:p>
-                      <a:pPr indent="0" marL="0">
+                      <a:pPr marL="0" indent="0">
                         <a:buNone/>
                       </a:pPr>
                       <a:r>
@@ -6422,7 +6258,7 @@
                       </a:endParaRPr>
                     </a:p>
                   </a:txBody>
-                  <a:tcPr marL="91440" marR="91440" marT="45720" marB="45720">
+                  <a:tcPr>
                     <a:lnL w="6350" cap="flat" cmpd="sng" algn="ctr">
                       <a:solidFill>
                         <a:srgbClr val="2C6A30"/>
@@ -6464,6 +6300,11 @@
                     </a:solidFill>
                   </a:tcPr>
                 </a:tc>
+                <a:extLst>
+                  <a:ext uri="{0D108BD9-81ED-4DB2-BD59-A6C34878D82A}">
+                    <a16:rowId xmlns:a16="http://schemas.microsoft.com/office/drawing/2014/main" val="10002"/>
+                  </a:ext>
+                </a:extLst>
               </a:tr>
               <a:tr h="694944">
                 <a:tc>
@@ -6471,7 +6312,7 @@
                     <a:bodyPr/>
                     <a:lstStyle/>
                     <a:p>
-                      <a:pPr indent="0" marL="0">
+                      <a:pPr marL="0" indent="0">
                         <a:buNone/>
                       </a:pPr>
                       <a:r>
@@ -6492,7 +6333,7 @@
                       </a:endParaRPr>
                     </a:p>
                   </a:txBody>
-                  <a:tcPr marL="91440" marR="91440" marT="45720" marB="45720">
+                  <a:tcPr>
                     <a:lnL w="6350" cap="flat" cmpd="sng" algn="ctr">
                       <a:solidFill>
                         <a:srgbClr val="2C6A30"/>
@@ -6539,7 +6380,7 @@
                     <a:bodyPr/>
                     <a:lstStyle/>
                     <a:p>
-                      <a:pPr indent="0" marL="0">
+                      <a:pPr marL="0" indent="0">
                         <a:buNone/>
                       </a:pPr>
                       <a:r>
@@ -6560,7 +6401,7 @@
                       </a:endParaRPr>
                     </a:p>
                   </a:txBody>
-                  <a:tcPr marL="91440" marR="91440" marT="45720" marB="45720">
+                  <a:tcPr>
                     <a:lnL w="6350" cap="flat" cmpd="sng" algn="ctr">
                       <a:solidFill>
                         <a:srgbClr val="2C6A30"/>
@@ -6607,7 +6448,7 @@
                     <a:bodyPr/>
                     <a:lstStyle/>
                     <a:p>
-                      <a:pPr indent="0" marL="0">
+                      <a:pPr marL="0" indent="0">
                         <a:buNone/>
                       </a:pPr>
                       <a:r>
@@ -6628,7 +6469,7 @@
                       </a:endParaRPr>
                     </a:p>
                   </a:txBody>
-                  <a:tcPr marL="91440" marR="91440" marT="45720" marB="45720">
+                  <a:tcPr>
                     <a:lnL w="6350" cap="flat" cmpd="sng" algn="ctr">
                       <a:solidFill>
                         <a:srgbClr val="2C6A30"/>
@@ -6675,7 +6516,7 @@
                     <a:bodyPr/>
                     <a:lstStyle/>
                     <a:p>
-                      <a:pPr indent="0" marL="0">
+                      <a:pPr marL="0" indent="0">
                         <a:buNone/>
                       </a:pPr>
                       <a:r>
@@ -6696,7 +6537,7 @@
                       </a:endParaRPr>
                     </a:p>
                     <a:p>
-                      <a:pPr indent="0" marL="0">
+                      <a:pPr marL="0" indent="0">
                         <a:buNone/>
                       </a:pPr>
                       <a:r>
@@ -6717,7 +6558,7 @@
                       </a:endParaRPr>
                     </a:p>
                   </a:txBody>
-                  <a:tcPr marL="91440" marR="91440" marT="45720" marB="45720">
+                  <a:tcPr>
                     <a:lnL w="6350" cap="flat" cmpd="sng" algn="ctr">
                       <a:solidFill>
                         <a:srgbClr val="2C6A30"/>
@@ -6764,7 +6605,7 @@
                     <a:bodyPr/>
                     <a:lstStyle/>
                     <a:p>
-                      <a:pPr indent="0" marL="0">
+                      <a:pPr marL="0" indent="0">
                         <a:buNone/>
                       </a:pPr>
                       <a:r>
@@ -6785,7 +6626,7 @@
                       </a:endParaRPr>
                     </a:p>
                   </a:txBody>
-                  <a:tcPr marL="91440" marR="91440" marT="45720" marB="45720">
+                  <a:tcPr>
                     <a:lnL w="6350" cap="flat" cmpd="sng" algn="ctr">
                       <a:solidFill>
                         <a:srgbClr val="2C6A30"/>
@@ -6827,6 +6668,11 @@
                     </a:solidFill>
                   </a:tcPr>
                 </a:tc>
+                <a:extLst>
+                  <a:ext uri="{0D108BD9-81ED-4DB2-BD59-A6C34878D82A}">
+                    <a16:rowId xmlns:a16="http://schemas.microsoft.com/office/drawing/2014/main" val="10003"/>
+                  </a:ext>
+                </a:extLst>
               </a:tr>
               <a:tr h="694944">
                 <a:tc>
@@ -6834,7 +6680,7 @@
                     <a:bodyPr/>
                     <a:lstStyle/>
                     <a:p>
-                      <a:pPr indent="0" marL="0">
+                      <a:pPr marL="0" indent="0">
                         <a:buNone/>
                       </a:pPr>
                       <a:r>
@@ -6855,7 +6701,7 @@
                       </a:endParaRPr>
                     </a:p>
                   </a:txBody>
-                  <a:tcPr marL="91440" marR="91440" marT="45720" marB="45720">
+                  <a:tcPr>
                     <a:lnL w="6350" cap="flat" cmpd="sng" algn="ctr">
                       <a:solidFill>
                         <a:srgbClr val="2C6A30"/>
@@ -6902,7 +6748,7 @@
                     <a:bodyPr/>
                     <a:lstStyle/>
                     <a:p>
-                      <a:pPr indent="0" marL="0">
+                      <a:pPr marL="0" indent="0">
                         <a:buNone/>
                       </a:pPr>
                       <a:r>
@@ -6923,7 +6769,7 @@
                       </a:endParaRPr>
                     </a:p>
                   </a:txBody>
-                  <a:tcPr marL="91440" marR="91440" marT="45720" marB="45720">
+                  <a:tcPr>
                     <a:lnL w="6350" cap="flat" cmpd="sng" algn="ctr">
                       <a:solidFill>
                         <a:srgbClr val="2C6A30"/>
@@ -6970,7 +6816,7 @@
                     <a:bodyPr/>
                     <a:lstStyle/>
                     <a:p>
-                      <a:pPr indent="0" marL="0">
+                      <a:pPr marL="0" indent="0">
                         <a:buNone/>
                       </a:pPr>
                       <a:r>
@@ -6991,7 +6837,7 @@
                       </a:endParaRPr>
                     </a:p>
                   </a:txBody>
-                  <a:tcPr marL="91440" marR="91440" marT="45720" marB="45720">
+                  <a:tcPr>
                     <a:lnL w="6350" cap="flat" cmpd="sng" algn="ctr">
                       <a:solidFill>
                         <a:srgbClr val="2C6A30"/>
@@ -7038,7 +6884,7 @@
                     <a:bodyPr/>
                     <a:lstStyle/>
                     <a:p>
-                      <a:pPr indent="0" marL="0">
+                      <a:pPr marL="0" indent="0">
                         <a:buNone/>
                       </a:pPr>
                       <a:r>
@@ -7059,7 +6905,7 @@
                       </a:endParaRPr>
                     </a:p>
                     <a:p>
-                      <a:pPr indent="0" marL="0">
+                      <a:pPr marL="0" indent="0">
                         <a:buNone/>
                       </a:pPr>
                       <a:r>
@@ -7080,7 +6926,7 @@
                       </a:endParaRPr>
                     </a:p>
                   </a:txBody>
-                  <a:tcPr marL="91440" marR="91440" marT="45720" marB="45720">
+                  <a:tcPr>
                     <a:lnL w="6350" cap="flat" cmpd="sng" algn="ctr">
                       <a:solidFill>
                         <a:srgbClr val="2C6A30"/>
@@ -7127,7 +6973,7 @@
                     <a:bodyPr/>
                     <a:lstStyle/>
                     <a:p>
-                      <a:pPr indent="0" marL="0">
+                      <a:pPr marL="0" indent="0">
                         <a:buNone/>
                       </a:pPr>
                       <a:r>
@@ -7148,7 +6994,7 @@
                       </a:endParaRPr>
                     </a:p>
                   </a:txBody>
-                  <a:tcPr marL="91440" marR="91440" marT="45720" marB="45720">
+                  <a:tcPr>
                     <a:lnL w="6350" cap="flat" cmpd="sng" algn="ctr">
                       <a:solidFill>
                         <a:srgbClr val="2C6A30"/>
@@ -7190,6 +7036,11 @@
                     </a:solidFill>
                   </a:tcPr>
                 </a:tc>
+                <a:extLst>
+                  <a:ext uri="{0D108BD9-81ED-4DB2-BD59-A6C34878D82A}">
+                    <a16:rowId xmlns:a16="http://schemas.microsoft.com/office/drawing/2014/main" val="10004"/>
+                  </a:ext>
+                </a:extLst>
               </a:tr>
             </a:tbl>
           </a:graphicData>
@@ -7216,7 +7067,7 @@
           <a:bodyPr wrap="square" lIns="0" tIns="0" rIns="0" bIns="0" rtlCol="0" anchor="ctr"/>
           <a:lstStyle/>
           <a:p>
-            <a:pPr algn="ctr" indent="0" marL="0">
+            <a:pPr marL="0" indent="0" algn="ctr">
               <a:buNone/>
             </a:pPr>
             <a:r>
@@ -7250,6 +7101,7 @@
         <a:solidFill>
           <a:srgbClr val="2C5F2D"/>
         </a:solidFill>
+        <a:effectLst/>
       </p:bgPr>
     </p:bg>
     <p:spTree>
@@ -7287,7 +7139,7 @@
           <a:bodyPr wrap="square" lIns="0" tIns="0" rIns="0" bIns="0" rtlCol="0" anchor="ctr"/>
           <a:lstStyle/>
           <a:p>
-            <a:pPr indent="0" marL="0">
+            <a:pPr marL="0" indent="0">
               <a:buNone/>
             </a:pPr>
             <a:r>
@@ -7326,7 +7178,7 @@
           <a:bodyPr wrap="square" lIns="0" tIns="0" rIns="0" bIns="0" rtlCol="0" anchor="ctr"/>
           <a:lstStyle/>
           <a:p>
-            <a:pPr indent="0" marL="0">
+            <a:pPr marL="0" indent="0">
               <a:buNone/>
             </a:pPr>
             <a:r>
@@ -7370,7 +7222,7 @@
             <a:prstDash val="solid"/>
           </a:ln>
           <a:effectLst>
-            <a:outerShdw sx="100000" sy="100000" kx="0" ky="0" algn="bl" rotWithShape="0" blurRad="101600" dist="38100" dir="8100000">
+            <a:outerShdw blurRad="101600" dist="38100" dir="8100000" algn="bl" rotWithShape="0">
               <a:srgbClr val="000000">
                 <a:alpha val="8000"/>
               </a:srgbClr>
@@ -7380,14 +7232,14 @@
       </p:sp>
       <p:pic>
         <p:nvPicPr>
-          <p:cNvPr id="5" name="Image 0" descr="preencoded.png">    </p:cNvPr>
+          <p:cNvPr id="5" name="Image 0" descr="preencoded.png"/>
           <p:cNvPicPr>
             <a:picLocks noChangeAspect="1"/>
           </p:cNvPicPr>
           <p:nvPr/>
         </p:nvPicPr>
         <p:blipFill>
-          <a:blip r:embed="rId1"/>
+          <a:blip r:embed="rId3"/>
           <a:stretch>
             <a:fillRect/>
           </a:stretch>
@@ -7423,7 +7275,7 @@
           <a:bodyPr wrap="square" lIns="0" tIns="0" rIns="0" bIns="0" rtlCol="0" anchor="ctr"/>
           <a:lstStyle/>
           <a:p>
-            <a:pPr algn="ctr" indent="0" marL="0">
+            <a:pPr marL="0" indent="0" algn="ctr">
               <a:buNone/>
             </a:pPr>
             <a:r>
@@ -7462,7 +7314,7 @@
           <a:bodyPr wrap="square" lIns="0" tIns="0" rIns="0" bIns="0" rtlCol="0" anchor="ctr"/>
           <a:lstStyle/>
           <a:p>
-            <a:pPr algn="ctr" indent="0" marL="0">
+            <a:pPr marL="0" indent="0" algn="ctr">
               <a:buNone/>
             </a:pPr>
             <a:r>
@@ -7479,7 +7331,7 @@
             <a:endParaRPr lang="en-US" sz="1050" dirty="0"/>
           </a:p>
           <a:p>
-            <a:pPr algn="ctr" indent="0" marL="0">
+            <a:pPr marL="0" indent="0" algn="ctr">
               <a:buNone/>
             </a:pPr>
             <a:r>
@@ -7523,7 +7375,7 @@
             <a:prstDash val="solid"/>
           </a:ln>
           <a:effectLst>
-            <a:outerShdw sx="100000" sy="100000" kx="0" ky="0" algn="bl" rotWithShape="0" blurRad="101600" dist="38100" dir="8100000">
+            <a:outerShdw blurRad="101600" dist="38100" dir="8100000" algn="bl" rotWithShape="0">
               <a:srgbClr val="000000">
                 <a:alpha val="8000"/>
               </a:srgbClr>
@@ -7533,14 +7385,14 @@
       </p:sp>
       <p:pic>
         <p:nvPicPr>
-          <p:cNvPr id="9" name="Image 1" descr="preencoded.png">    </p:cNvPr>
+          <p:cNvPr id="9" name="Image 1" descr="preencoded.png"/>
           <p:cNvPicPr>
             <a:picLocks noChangeAspect="1"/>
           </p:cNvPicPr>
           <p:nvPr/>
         </p:nvPicPr>
         <p:blipFill>
-          <a:blip r:embed="rId2"/>
+          <a:blip r:embed="rId4"/>
           <a:stretch>
             <a:fillRect/>
           </a:stretch>
@@ -7576,7 +7428,7 @@
           <a:bodyPr wrap="square" lIns="0" tIns="0" rIns="0" bIns="0" rtlCol="0" anchor="ctr"/>
           <a:lstStyle/>
           <a:p>
-            <a:pPr algn="ctr" indent="0" marL="0">
+            <a:pPr marL="0" indent="0" algn="ctr">
               <a:buNone/>
             </a:pPr>
             <a:r>
@@ -7615,7 +7467,7 @@
           <a:bodyPr wrap="square" lIns="0" tIns="0" rIns="0" bIns="0" rtlCol="0" anchor="ctr"/>
           <a:lstStyle/>
           <a:p>
-            <a:pPr algn="ctr" indent="0" marL="0">
+            <a:pPr marL="0" indent="0" algn="ctr">
               <a:buNone/>
             </a:pPr>
             <a:r>
@@ -7632,7 +7484,7 @@
             <a:endParaRPr lang="en-US" sz="1050" dirty="0"/>
           </a:p>
           <a:p>
-            <a:pPr algn="ctr" indent="0" marL="0">
+            <a:pPr marL="0" indent="0" algn="ctr">
               <a:buNone/>
             </a:pPr>
             <a:r>
@@ -7676,7 +7528,7 @@
             <a:prstDash val="solid"/>
           </a:ln>
           <a:effectLst>
-            <a:outerShdw sx="100000" sy="100000" kx="0" ky="0" algn="bl" rotWithShape="0" blurRad="101600" dist="38100" dir="8100000">
+            <a:outerShdw blurRad="101600" dist="38100" dir="8100000" algn="bl" rotWithShape="0">
               <a:srgbClr val="000000">
                 <a:alpha val="8000"/>
               </a:srgbClr>
@@ -7686,14 +7538,14 @@
       </p:sp>
       <p:pic>
         <p:nvPicPr>
-          <p:cNvPr id="13" name="Image 2" descr="preencoded.png">    </p:cNvPr>
+          <p:cNvPr id="13" name="Image 2" descr="preencoded.png"/>
           <p:cNvPicPr>
             <a:picLocks noChangeAspect="1"/>
           </p:cNvPicPr>
           <p:nvPr/>
         </p:nvPicPr>
         <p:blipFill>
-          <a:blip r:embed="rId3"/>
+          <a:blip r:embed="rId5"/>
           <a:stretch>
             <a:fillRect/>
           </a:stretch>
@@ -7729,7 +7581,7 @@
           <a:bodyPr wrap="square" lIns="0" tIns="0" rIns="0" bIns="0" rtlCol="0" anchor="ctr"/>
           <a:lstStyle/>
           <a:p>
-            <a:pPr algn="ctr" indent="0" marL="0">
+            <a:pPr marL="0" indent="0" algn="ctr">
               <a:buNone/>
             </a:pPr>
             <a:r>
@@ -7768,7 +7620,7 @@
           <a:bodyPr wrap="square" lIns="0" tIns="0" rIns="0" bIns="0" rtlCol="0" anchor="ctr"/>
           <a:lstStyle/>
           <a:p>
-            <a:pPr algn="ctr" indent="0" marL="0">
+            <a:pPr marL="0" indent="0" algn="ctr">
               <a:buNone/>
             </a:pPr>
             <a:r>
@@ -7785,7 +7637,7 @@
             <a:endParaRPr lang="en-US" sz="1050" dirty="0"/>
           </a:p>
           <a:p>
-            <a:pPr algn="ctr" indent="0" marL="0">
+            <a:pPr marL="0" indent="0" algn="ctr">
               <a:buNone/>
             </a:pPr>
             <a:r>
@@ -7829,7 +7681,7 @@
             <a:prstDash val="solid"/>
           </a:ln>
           <a:effectLst>
-            <a:outerShdw sx="100000" sy="100000" kx="0" ky="0" algn="bl" rotWithShape="0" blurRad="101600" dist="38100" dir="8100000">
+            <a:outerShdw blurRad="101600" dist="38100" dir="8100000" algn="bl" rotWithShape="0">
               <a:srgbClr val="000000">
                 <a:alpha val="8000"/>
               </a:srgbClr>
@@ -7839,14 +7691,14 @@
       </p:sp>
       <p:pic>
         <p:nvPicPr>
-          <p:cNvPr id="17" name="Image 3" descr="preencoded.png">    </p:cNvPr>
+          <p:cNvPr id="17" name="Image 3" descr="preencoded.png"/>
           <p:cNvPicPr>
             <a:picLocks noChangeAspect="1"/>
           </p:cNvPicPr>
           <p:nvPr/>
         </p:nvPicPr>
         <p:blipFill>
-          <a:blip r:embed="rId4"/>
+          <a:blip r:embed="rId6"/>
           <a:stretch>
             <a:fillRect/>
           </a:stretch>
@@ -7882,7 +7734,7 @@
           <a:bodyPr wrap="square" lIns="0" tIns="0" rIns="0" bIns="0" rtlCol="0" anchor="ctr"/>
           <a:lstStyle/>
           <a:p>
-            <a:pPr algn="ctr" indent="0" marL="0">
+            <a:pPr marL="0" indent="0" algn="ctr">
               <a:buNone/>
             </a:pPr>
             <a:r>
@@ -7921,7 +7773,7 @@
           <a:bodyPr wrap="square" lIns="0" tIns="0" rIns="0" bIns="0" rtlCol="0" anchor="ctr"/>
           <a:lstStyle/>
           <a:p>
-            <a:pPr algn="ctr" indent="0" marL="0">
+            <a:pPr marL="0" indent="0" algn="ctr">
               <a:buNone/>
             </a:pPr>
             <a:r>
@@ -7938,7 +7790,7 @@
             <a:endParaRPr lang="en-US" sz="1050" dirty="0"/>
           </a:p>
           <a:p>
-            <a:pPr algn="ctr" indent="0" marL="0">
+            <a:pPr marL="0" indent="0" algn="ctr">
               <a:buNone/>
             </a:pPr>
             <a:r>
@@ -7977,7 +7829,7 @@
           <a:bodyPr wrap="square" lIns="0" tIns="0" rIns="0" bIns="0" rtlCol="0" anchor="ctr"/>
           <a:lstStyle/>
           <a:p>
-            <a:pPr algn="ctr" indent="0" marL="0">
+            <a:pPr marL="0" indent="0" algn="ctr">
               <a:buNone/>
             </a:pPr>
             <a:r>
@@ -8011,6 +7863,7 @@
         <a:solidFill>
           <a:srgbClr val="F4F7F4"/>
         </a:solidFill>
+        <a:effectLst/>
       </p:bgPr>
     </p:bg>
     <p:spTree>
@@ -8048,7 +7901,7 @@
           <a:bodyPr wrap="square" lIns="0" tIns="0" rIns="0" bIns="0" rtlCol="0" anchor="ctr"/>
           <a:lstStyle/>
           <a:p>
-            <a:pPr indent="0" marL="0">
+            <a:pPr marL="0" indent="0">
               <a:buNone/>
             </a:pPr>
             <a:r>
@@ -8092,7 +7945,7 @@
             <a:prstDash val="solid"/>
           </a:ln>
           <a:effectLst>
-            <a:outerShdw sx="100000" sy="100000" kx="0" ky="0" algn="bl" rotWithShape="0" blurRad="101600" dist="38100" dir="8100000">
+            <a:outerShdw blurRad="101600" dist="38100" dir="8100000" algn="bl" rotWithShape="0">
               <a:srgbClr val="000000">
                 <a:alpha val="8000"/>
               </a:srgbClr>
@@ -8121,7 +7974,7 @@
           <a:bodyPr wrap="square" lIns="0" tIns="0" rIns="0" bIns="0" rtlCol="0" anchor="ctr"/>
           <a:lstStyle/>
           <a:p>
-            <a:pPr indent="0" marL="0">
+            <a:pPr marL="0" indent="0">
               <a:buNone/>
             </a:pPr>
             <a:r>
@@ -8160,7 +8013,7 @@
           <a:bodyPr wrap="square" lIns="0" tIns="0" rIns="0" bIns="0" rtlCol="0" anchor="ctr"/>
           <a:lstStyle/>
           <a:p>
-            <a:pPr indent="0" marL="0">
+            <a:pPr marL="0" indent="0">
               <a:buNone/>
             </a:pPr>
             <a:r>
@@ -8177,7 +8030,7 @@
             <a:endParaRPr lang="en-US" sz="2200" dirty="0"/>
           </a:p>
           <a:p>
-            <a:pPr indent="0" marL="0">
+            <a:pPr marL="0" indent="0">
               <a:buNone/>
             </a:pPr>
             <a:r>
@@ -8216,7 +8069,7 @@
           <a:bodyPr wrap="square" lIns="0" tIns="0" rIns="0" bIns="0" rtlCol="0" anchor="ctr"/>
           <a:lstStyle/>
           <a:p>
-            <a:pPr indent="0" marL="0">
+            <a:pPr marL="0" indent="0">
               <a:buNone/>
             </a:pPr>
             <a:r>
@@ -8255,7 +8108,7 @@
           <a:bodyPr wrap="square" lIns="0" tIns="0" rIns="0" bIns="0" rtlCol="0" anchor="ctr"/>
           <a:lstStyle/>
           <a:p>
-            <a:pPr indent="0" marL="0">
+            <a:pPr marL="0" indent="0">
               <a:buNone/>
             </a:pPr>
             <a:r>
@@ -8269,9 +8122,6 @@
               </a:rPr>
               <a:t>Countable  </a:t>
             </a:r>
-            <a:pPr indent="0" marL="0">
-              <a:buNone/>
-            </a:pPr>
             <a:r>
               <a:rPr lang="en-US" sz="1300" dirty="0">
                 <a:solidFill>
@@ -8284,9 +8134,6 @@
               <a:t>— each upload triggers exactly one moderation decision
 </a:t>
             </a:r>
-            <a:pPr indent="0" marL="0">
-              <a:buNone/>
-            </a:pPr>
             <a:r>
               <a:rPr lang="en-US" sz="1300" b="1" dirty="0">
                 <a:solidFill>
@@ -8298,9 +8145,6 @@
               </a:rPr>
               <a:t>Comparable  </a:t>
             </a:r>
-            <a:pPr indent="0" marL="0">
-              <a:buNone/>
-            </a:pPr>
             <a:r>
               <a:rPr lang="en-US" sz="1300" dirty="0">
                 <a:solidFill>
@@ -8313,9 +8157,6 @@
               <a:t>— consistent across model changes and A/B tests
 </a:t>
             </a:r>
-            <a:pPr indent="0" marL="0">
-              <a:buNone/>
-            </a:pPr>
             <a:r>
               <a:rPr lang="en-US" sz="1300" b="1" dirty="0">
                 <a:solidFill>
@@ -8327,9 +8168,6 @@
               </a:rPr>
               <a:t>Traceable  </a:t>
             </a:r>
-            <a:pPr indent="0" marL="0">
-              <a:buNone/>
-            </a:pPr>
             <a:r>
               <a:rPr lang="en-US" sz="1300" dirty="0">
                 <a:solidFill>
@@ -8393,7 +8231,7 @@
           <a:bodyPr wrap="square" lIns="0" tIns="0" rIns="0" bIns="0" rtlCol="0" anchor="ctr"/>
           <a:lstStyle/>
           <a:p>
-            <a:pPr algn="ctr" indent="0" marL="0">
+            <a:pPr marL="0" indent="0" algn="ctr">
               <a:buNone/>
             </a:pPr>
             <a:r>
@@ -8427,6 +8265,7 @@
         <a:solidFill>
           <a:srgbClr val="F4F7F4"/>
         </a:solidFill>
+        <a:effectLst/>
       </p:bgPr>
     </p:bg>
     <p:spTree>
@@ -8464,7 +8303,7 @@
           <a:bodyPr wrap="square" lIns="0" tIns="0" rIns="0" bIns="0" rtlCol="0" anchor="ctr"/>
           <a:lstStyle/>
           <a:p>
-            <a:pPr indent="0" marL="0">
+            <a:pPr marL="0" indent="0">
               <a:buNone/>
             </a:pPr>
             <a:r>
@@ -8511,14 +8350,14 @@
       </p:sp>
       <p:pic>
         <p:nvPicPr>
-          <p:cNvPr id="4" name="Image 0" descr="preencoded.png">    </p:cNvPr>
+          <p:cNvPr id="4" name="Image 0" descr="preencoded.png"/>
           <p:cNvPicPr>
             <a:picLocks noChangeAspect="1"/>
           </p:cNvPicPr>
           <p:nvPr/>
         </p:nvPicPr>
         <p:blipFill>
-          <a:blip r:embed="rId1"/>
+          <a:blip r:embed="rId3"/>
           <a:stretch>
             <a:fillRect/>
           </a:stretch>
@@ -8554,7 +8393,7 @@
           <a:bodyPr wrap="square" lIns="0" tIns="0" rIns="0" bIns="0" rtlCol="0" anchor="ctr"/>
           <a:lstStyle/>
           <a:p>
-            <a:pPr indent="0" marL="0">
+            <a:pPr marL="0" indent="0">
               <a:buNone/>
             </a:pPr>
             <a:r>
@@ -8593,7 +8432,7 @@
           <a:bodyPr wrap="square" lIns="0" tIns="0" rIns="0" bIns="0" rtlCol="0" anchor="ctr"/>
           <a:lstStyle/>
           <a:p>
-            <a:pPr indent="0" marL="0">
+            <a:pPr marL="0" indent="0">
               <a:buNone/>
             </a:pPr>
             <a:r>
@@ -8610,7 +8449,7 @@
             <a:endParaRPr lang="en-US" sz="1000" dirty="0"/>
           </a:p>
           <a:p>
-            <a:pPr indent="0" marL="0">
+            <a:pPr marL="0" indent="0">
               <a:buNone/>
             </a:pPr>
             <a:r>
@@ -8676,7 +8515,7 @@
           <a:bodyPr wrap="square" lIns="0" tIns="0" rIns="0" bIns="0" rtlCol="0" anchor="ctr"/>
           <a:lstStyle/>
           <a:p>
-            <a:pPr algn="ctr" indent="0" marL="0">
+            <a:pPr marL="0" indent="0" algn="ctr">
               <a:buNone/>
             </a:pPr>
             <a:r>
@@ -8723,14 +8562,14 @@
       </p:sp>
       <p:pic>
         <p:nvPicPr>
-          <p:cNvPr id="10" name="Image 1" descr="preencoded.png">    </p:cNvPr>
+          <p:cNvPr id="10" name="Image 1" descr="preencoded.png"/>
           <p:cNvPicPr>
             <a:picLocks noChangeAspect="1"/>
           </p:cNvPicPr>
           <p:nvPr/>
         </p:nvPicPr>
         <p:blipFill>
-          <a:blip r:embed="rId2"/>
+          <a:blip r:embed="rId4"/>
           <a:stretch>
             <a:fillRect/>
           </a:stretch>
@@ -8766,7 +8605,7 @@
           <a:bodyPr wrap="square" lIns="0" tIns="0" rIns="0" bIns="0" rtlCol="0" anchor="ctr"/>
           <a:lstStyle/>
           <a:p>
-            <a:pPr indent="0" marL="0">
+            <a:pPr marL="0" indent="0">
               <a:buNone/>
             </a:pPr>
             <a:r>
@@ -8805,7 +8644,7 @@
           <a:bodyPr wrap="square" lIns="0" tIns="0" rIns="0" bIns="0" rtlCol="0" anchor="ctr"/>
           <a:lstStyle/>
           <a:p>
-            <a:pPr indent="0" marL="0">
+            <a:pPr marL="0" indent="0">
               <a:buNone/>
             </a:pPr>
             <a:r>
@@ -8822,7 +8661,7 @@
             <a:endParaRPr lang="en-US" sz="1000" dirty="0"/>
           </a:p>
           <a:p>
-            <a:pPr indent="0" marL="0">
+            <a:pPr marL="0" indent="0">
               <a:buNone/>
             </a:pPr>
             <a:r>
@@ -8888,7 +8727,7 @@
           <a:bodyPr wrap="square" lIns="0" tIns="0" rIns="0" bIns="0" rtlCol="0" anchor="ctr"/>
           <a:lstStyle/>
           <a:p>
-            <a:pPr algn="ctr" indent="0" marL="0">
+            <a:pPr marL="0" indent="0" algn="ctr">
               <a:buNone/>
             </a:pPr>
             <a:r>
@@ -8935,14 +8774,14 @@
       </p:sp>
       <p:pic>
         <p:nvPicPr>
-          <p:cNvPr id="16" name="Image 2" descr="preencoded.png">    </p:cNvPr>
+          <p:cNvPr id="16" name="Image 2" descr="preencoded.png"/>
           <p:cNvPicPr>
             <a:picLocks noChangeAspect="1"/>
           </p:cNvPicPr>
           <p:nvPr/>
         </p:nvPicPr>
         <p:blipFill>
-          <a:blip r:embed="rId3"/>
+          <a:blip r:embed="rId5"/>
           <a:stretch>
             <a:fillRect/>
           </a:stretch>
@@ -8978,7 +8817,7 @@
           <a:bodyPr wrap="square" lIns="0" tIns="0" rIns="0" bIns="0" rtlCol="0" anchor="ctr"/>
           <a:lstStyle/>
           <a:p>
-            <a:pPr indent="0" marL="0">
+            <a:pPr marL="0" indent="0">
               <a:buNone/>
             </a:pPr>
             <a:r>
@@ -9017,7 +8856,7 @@
           <a:bodyPr wrap="square" lIns="0" tIns="0" rIns="0" bIns="0" rtlCol="0" anchor="ctr"/>
           <a:lstStyle/>
           <a:p>
-            <a:pPr indent="0" marL="0">
+            <a:pPr marL="0" indent="0">
               <a:buNone/>
             </a:pPr>
             <a:r>
@@ -9034,7 +8873,7 @@
             <a:endParaRPr lang="en-US" sz="1000" dirty="0"/>
           </a:p>
           <a:p>
-            <a:pPr indent="0" marL="0">
+            <a:pPr marL="0" indent="0">
               <a:buNone/>
             </a:pPr>
             <a:r>
@@ -9100,7 +8939,7 @@
           <a:bodyPr wrap="square" lIns="0" tIns="0" rIns="0" bIns="0" rtlCol="0" anchor="ctr"/>
           <a:lstStyle/>
           <a:p>
-            <a:pPr algn="ctr" indent="0" marL="0">
+            <a:pPr marL="0" indent="0" algn="ctr">
               <a:buNone/>
             </a:pPr>
             <a:r>
@@ -9147,14 +8986,14 @@
       </p:sp>
       <p:pic>
         <p:nvPicPr>
-          <p:cNvPr id="22" name="Image 3" descr="preencoded.png">    </p:cNvPr>
+          <p:cNvPr id="22" name="Image 3" descr="preencoded.png"/>
           <p:cNvPicPr>
             <a:picLocks noChangeAspect="1"/>
           </p:cNvPicPr>
           <p:nvPr/>
         </p:nvPicPr>
         <p:blipFill>
-          <a:blip r:embed="rId4"/>
+          <a:blip r:embed="rId6"/>
           <a:stretch>
             <a:fillRect/>
           </a:stretch>
@@ -9190,7 +9029,7 @@
           <a:bodyPr wrap="square" lIns="0" tIns="0" rIns="0" bIns="0" rtlCol="0" anchor="ctr"/>
           <a:lstStyle/>
           <a:p>
-            <a:pPr indent="0" marL="0">
+            <a:pPr marL="0" indent="0">
               <a:buNone/>
             </a:pPr>
             <a:r>
@@ -9229,7 +9068,7 @@
           <a:bodyPr wrap="square" lIns="0" tIns="0" rIns="0" bIns="0" rtlCol="0" anchor="ctr"/>
           <a:lstStyle/>
           <a:p>
-            <a:pPr indent="0" marL="0">
+            <a:pPr marL="0" indent="0">
               <a:buNone/>
             </a:pPr>
             <a:r>
@@ -9246,7 +9085,7 @@
             <a:endParaRPr lang="en-US" sz="1000" dirty="0"/>
           </a:p>
           <a:p>
-            <a:pPr indent="0" marL="0">
+            <a:pPr marL="0" indent="0">
               <a:buNone/>
             </a:pPr>
             <a:r>
@@ -9312,7 +9151,7 @@
           <a:bodyPr wrap="square" lIns="0" tIns="0" rIns="0" bIns="0" rtlCol="0" anchor="ctr"/>
           <a:lstStyle/>
           <a:p>
-            <a:pPr algn="ctr" indent="0" marL="0">
+            <a:pPr marL="0" indent="0" algn="ctr">
               <a:buNone/>
             </a:pPr>
             <a:r>
@@ -9351,7 +9190,7 @@
           <a:bodyPr wrap="square" lIns="0" tIns="0" rIns="0" bIns="0" rtlCol="0" anchor="ctr"/>
           <a:lstStyle/>
           <a:p>
-            <a:pPr indent="0" marL="0">
+            <a:pPr marL="0" indent="0">
               <a:buNone/>
             </a:pPr>
             <a:r>
@@ -9385,6 +9224,7 @@
         <a:solidFill>
           <a:srgbClr val="F4F7F4"/>
         </a:solidFill>
+        <a:effectLst/>
       </p:bgPr>
     </p:bg>
     <p:spTree>
@@ -9422,7 +9262,7 @@
           <a:bodyPr wrap="square" lIns="0" tIns="0" rIns="0" bIns="0" rtlCol="0" anchor="ctr"/>
           <a:lstStyle/>
           <a:p>
-            <a:pPr indent="0" marL="0">
+            <a:pPr marL="0" indent="0">
               <a:buNone/>
             </a:pPr>
             <a:r>
@@ -9466,7 +9306,7 @@
             <a:prstDash val="solid"/>
           </a:ln>
           <a:effectLst>
-            <a:outerShdw sx="100000" sy="100000" kx="0" ky="0" algn="bl" rotWithShape="0" blurRad="101600" dist="38100" dir="8100000">
+            <a:outerShdw blurRad="101600" dist="38100" dir="8100000" algn="bl" rotWithShape="0">
               <a:srgbClr val="000000">
                 <a:alpha val="8000"/>
               </a:srgbClr>
@@ -9476,14 +9316,14 @@
       </p:sp>
       <p:pic>
         <p:nvPicPr>
-          <p:cNvPr id="4" name="Image 0" descr="preencoded.png">    </p:cNvPr>
+          <p:cNvPr id="4" name="Image 0" descr="preencoded.png"/>
           <p:cNvPicPr>
             <a:picLocks noChangeAspect="1"/>
           </p:cNvPicPr>
           <p:nvPr/>
         </p:nvPicPr>
         <p:blipFill>
-          <a:blip r:embed="rId1"/>
+          <a:blip r:embed="rId3"/>
           <a:stretch>
             <a:fillRect/>
           </a:stretch>
@@ -9519,7 +9359,7 @@
           <a:bodyPr wrap="square" lIns="0" tIns="0" rIns="0" bIns="0" rtlCol="0" anchor="ctr"/>
           <a:lstStyle/>
           <a:p>
-            <a:pPr indent="0" marL="0">
+            <a:pPr marL="0" indent="0">
               <a:buNone/>
             </a:pPr>
             <a:r>
@@ -9558,7 +9398,7 @@
           <a:bodyPr wrap="square" lIns="0" tIns="0" rIns="0" bIns="0" rtlCol="0" anchor="ctr"/>
           <a:lstStyle/>
           <a:p>
-            <a:pPr indent="0" marL="0">
+            <a:pPr marL="0" indent="0">
               <a:buNone/>
             </a:pPr>
             <a:r>
@@ -9624,7 +9464,7 @@
           <a:bodyPr wrap="square" lIns="0" tIns="0" rIns="0" bIns="0" rtlCol="0" anchor="ctr"/>
           <a:lstStyle/>
           <a:p>
-            <a:pPr algn="ctr" indent="0" marL="0">
+            <a:pPr marL="0" indent="0" algn="ctr">
               <a:buNone/>
             </a:pPr>
             <a:r>
@@ -9668,7 +9508,7 @@
             <a:prstDash val="solid"/>
           </a:ln>
           <a:effectLst>
-            <a:outerShdw sx="100000" sy="100000" kx="0" ky="0" algn="bl" rotWithShape="0" blurRad="101600" dist="38100" dir="8100000">
+            <a:outerShdw blurRad="101600" dist="38100" dir="8100000" algn="bl" rotWithShape="0">
               <a:srgbClr val="000000">
                 <a:alpha val="8000"/>
               </a:srgbClr>
@@ -9678,14 +9518,14 @@
       </p:sp>
       <p:pic>
         <p:nvPicPr>
-          <p:cNvPr id="10" name="Image 1" descr="preencoded.png">    </p:cNvPr>
+          <p:cNvPr id="10" name="Image 1" descr="preencoded.png"/>
           <p:cNvPicPr>
             <a:picLocks noChangeAspect="1"/>
           </p:cNvPicPr>
           <p:nvPr/>
         </p:nvPicPr>
         <p:blipFill>
-          <a:blip r:embed="rId2"/>
+          <a:blip r:embed="rId4"/>
           <a:stretch>
             <a:fillRect/>
           </a:stretch>
@@ -9721,7 +9561,7 @@
           <a:bodyPr wrap="square" lIns="0" tIns="0" rIns="0" bIns="0" rtlCol="0" anchor="ctr"/>
           <a:lstStyle/>
           <a:p>
-            <a:pPr indent="0" marL="0">
+            <a:pPr marL="0" indent="0">
               <a:buNone/>
             </a:pPr>
             <a:r>
@@ -9760,7 +9600,7 @@
           <a:bodyPr wrap="square" lIns="0" tIns="0" rIns="0" bIns="0" rtlCol="0" anchor="ctr"/>
           <a:lstStyle/>
           <a:p>
-            <a:pPr indent="0" marL="0">
+            <a:pPr marL="0" indent="0">
               <a:buNone/>
             </a:pPr>
             <a:r>
@@ -9826,7 +9666,7 @@
           <a:bodyPr wrap="square" lIns="0" tIns="0" rIns="0" bIns="0" rtlCol="0" anchor="ctr"/>
           <a:lstStyle/>
           <a:p>
-            <a:pPr algn="ctr" indent="0" marL="0">
+            <a:pPr marL="0" indent="0" algn="ctr">
               <a:buNone/>
             </a:pPr>
             <a:r>
@@ -9870,7 +9710,7 @@
             <a:prstDash val="solid"/>
           </a:ln>
           <a:effectLst>
-            <a:outerShdw sx="100000" sy="100000" kx="0" ky="0" algn="bl" rotWithShape="0" blurRad="101600" dist="38100" dir="8100000">
+            <a:outerShdw blurRad="101600" dist="38100" dir="8100000" algn="bl" rotWithShape="0">
               <a:srgbClr val="000000">
                 <a:alpha val="8000"/>
               </a:srgbClr>
@@ -9880,14 +9720,14 @@
       </p:sp>
       <p:pic>
         <p:nvPicPr>
-          <p:cNvPr id="16" name="Image 2" descr="preencoded.png">    </p:cNvPr>
+          <p:cNvPr id="16" name="Image 2" descr="preencoded.png"/>
           <p:cNvPicPr>
             <a:picLocks noChangeAspect="1"/>
           </p:cNvPicPr>
           <p:nvPr/>
         </p:nvPicPr>
         <p:blipFill>
-          <a:blip r:embed="rId3"/>
+          <a:blip r:embed="rId4"/>
           <a:stretch>
             <a:fillRect/>
           </a:stretch>
@@ -9923,7 +9763,7 @@
           <a:bodyPr wrap="square" lIns="0" tIns="0" rIns="0" bIns="0" rtlCol="0" anchor="ctr"/>
           <a:lstStyle/>
           <a:p>
-            <a:pPr indent="0" marL="0">
+            <a:pPr marL="0" indent="0">
               <a:buNone/>
             </a:pPr>
             <a:r>
@@ -9962,7 +9802,7 @@
           <a:bodyPr wrap="square" lIns="0" tIns="0" rIns="0" bIns="0" rtlCol="0" anchor="ctr"/>
           <a:lstStyle/>
           <a:p>
-            <a:pPr indent="0" marL="0">
+            <a:pPr marL="0" indent="0">
               <a:buNone/>
             </a:pPr>
             <a:r>
@@ -10028,7 +9868,7 @@
           <a:bodyPr wrap="square" lIns="0" tIns="0" rIns="0" bIns="0" rtlCol="0" anchor="ctr"/>
           <a:lstStyle/>
           <a:p>
-            <a:pPr algn="ctr" indent="0" marL="0">
+            <a:pPr marL="0" indent="0" algn="ctr">
               <a:buNone/>
             </a:pPr>
             <a:r>
@@ -10072,7 +9912,7 @@
             <a:prstDash val="solid"/>
           </a:ln>
           <a:effectLst>
-            <a:outerShdw sx="100000" sy="100000" kx="0" ky="0" algn="bl" rotWithShape="0" blurRad="101600" dist="38100" dir="8100000">
+            <a:outerShdw blurRad="101600" dist="38100" dir="8100000" algn="bl" rotWithShape="0">
               <a:srgbClr val="000000">
                 <a:alpha val="8000"/>
               </a:srgbClr>
@@ -10082,14 +9922,14 @@
       </p:sp>
       <p:pic>
         <p:nvPicPr>
-          <p:cNvPr id="22" name="Image 3" descr="preencoded.png">    </p:cNvPr>
+          <p:cNvPr id="22" name="Image 3" descr="preencoded.png"/>
           <p:cNvPicPr>
             <a:picLocks noChangeAspect="1"/>
           </p:cNvPicPr>
           <p:nvPr/>
         </p:nvPicPr>
         <p:blipFill>
-          <a:blip r:embed="rId4"/>
+          <a:blip r:embed="rId5"/>
           <a:stretch>
             <a:fillRect/>
           </a:stretch>
@@ -10125,7 +9965,7 @@
           <a:bodyPr wrap="square" lIns="0" tIns="0" rIns="0" bIns="0" rtlCol="0" anchor="ctr"/>
           <a:lstStyle/>
           <a:p>
-            <a:pPr indent="0" marL="0">
+            <a:pPr marL="0" indent="0">
               <a:buNone/>
             </a:pPr>
             <a:r>
@@ -10164,7 +10004,7 @@
           <a:bodyPr wrap="square" lIns="0" tIns="0" rIns="0" bIns="0" rtlCol="0" anchor="ctr"/>
           <a:lstStyle/>
           <a:p>
-            <a:pPr indent="0" marL="0">
+            <a:pPr marL="0" indent="0">
               <a:buNone/>
             </a:pPr>
             <a:r>
@@ -10230,7 +10070,7 @@
           <a:bodyPr wrap="square" lIns="0" tIns="0" rIns="0" bIns="0" rtlCol="0" anchor="ctr"/>
           <a:lstStyle/>
           <a:p>
-            <a:pPr algn="ctr" indent="0" marL="0">
+            <a:pPr marL="0" indent="0" algn="ctr">
               <a:buNone/>
             </a:pPr>
             <a:r>
@@ -10274,7 +10114,7 @@
             <a:prstDash val="solid"/>
           </a:ln>
           <a:effectLst>
-            <a:outerShdw sx="100000" sy="100000" kx="0" ky="0" algn="bl" rotWithShape="0" blurRad="101600" dist="38100" dir="8100000">
+            <a:outerShdw blurRad="101600" dist="38100" dir="8100000" algn="bl" rotWithShape="0">
               <a:srgbClr val="000000">
                 <a:alpha val="8000"/>
               </a:srgbClr>
@@ -10284,14 +10124,14 @@
       </p:sp>
       <p:pic>
         <p:nvPicPr>
-          <p:cNvPr id="28" name="Image 4" descr="preencoded.png">    </p:cNvPr>
+          <p:cNvPr id="28" name="Image 4" descr="preencoded.png"/>
           <p:cNvPicPr>
             <a:picLocks noChangeAspect="1"/>
           </p:cNvPicPr>
           <p:nvPr/>
         </p:nvPicPr>
         <p:blipFill>
-          <a:blip r:embed="rId5"/>
+          <a:blip r:embed="rId3"/>
           <a:stretch>
             <a:fillRect/>
           </a:stretch>
@@ -10327,7 +10167,7 @@
           <a:bodyPr wrap="square" lIns="0" tIns="0" rIns="0" bIns="0" rtlCol="0" anchor="ctr"/>
           <a:lstStyle/>
           <a:p>
-            <a:pPr indent="0" marL="0">
+            <a:pPr marL="0" indent="0">
               <a:buNone/>
             </a:pPr>
             <a:r>
@@ -10366,7 +10206,7 @@
           <a:bodyPr wrap="square" lIns="0" tIns="0" rIns="0" bIns="0" rtlCol="0" anchor="ctr"/>
           <a:lstStyle/>
           <a:p>
-            <a:pPr indent="0" marL="0">
+            <a:pPr marL="0" indent="0">
               <a:buNone/>
             </a:pPr>
             <a:r>
@@ -10432,7 +10272,7 @@
           <a:bodyPr wrap="square" lIns="0" tIns="0" rIns="0" bIns="0" rtlCol="0" anchor="ctr"/>
           <a:lstStyle/>
           <a:p>
-            <a:pPr algn="ctr" indent="0" marL="0">
+            <a:pPr marL="0" indent="0" algn="ctr">
               <a:buNone/>
             </a:pPr>
             <a:r>
@@ -10466,6 +10306,7 @@
         <a:solidFill>
           <a:srgbClr val="F4F7F4"/>
         </a:solidFill>
+        <a:effectLst/>
       </p:bgPr>
     </p:bg>
     <p:spTree>
@@ -10503,7 +10344,7 @@
           <a:bodyPr wrap="square" lIns="0" tIns="0" rIns="0" bIns="0" rtlCol="0" anchor="ctr"/>
           <a:lstStyle/>
           <a:p>
-            <a:pPr indent="0" marL="0">
+            <a:pPr marL="0" indent="0">
               <a:buNone/>
             </a:pPr>
             <a:r>
@@ -10550,14 +10391,14 @@
       </p:sp>
       <p:pic>
         <p:nvPicPr>
-          <p:cNvPr id="4" name="Image 0" descr="preencoded.png">    </p:cNvPr>
+          <p:cNvPr id="4" name="Image 0" descr="preencoded.png"/>
           <p:cNvPicPr>
             <a:picLocks noChangeAspect="1"/>
           </p:cNvPicPr>
           <p:nvPr/>
         </p:nvPicPr>
         <p:blipFill>
-          <a:blip r:embed="rId1"/>
+          <a:blip r:embed="rId3"/>
           <a:stretch>
             <a:fillRect/>
           </a:stretch>
@@ -10593,7 +10434,7 @@
           <a:bodyPr wrap="square" lIns="0" tIns="0" rIns="0" bIns="0" rtlCol="0" anchor="ctr"/>
           <a:lstStyle/>
           <a:p>
-            <a:pPr indent="0" marL="0">
+            <a:pPr marL="0" indent="0">
               <a:buNone/>
             </a:pPr>
             <a:r>
@@ -10632,7 +10473,7 @@
           <a:bodyPr wrap="square" lIns="0" tIns="0" rIns="0" bIns="0" rtlCol="0" anchor="ctr"/>
           <a:lstStyle/>
           <a:p>
-            <a:pPr indent="0" marL="0">
+            <a:pPr marL="0" indent="0">
               <a:buNone/>
             </a:pPr>
             <a:r>
@@ -10649,7 +10490,7 @@
             <a:endParaRPr lang="en-US" sz="1050" dirty="0"/>
           </a:p>
           <a:p>
-            <a:pPr indent="0" marL="0">
+            <a:pPr marL="0" indent="0">
               <a:buNone/>
             </a:pPr>
             <a:r>
@@ -10666,7 +10507,7 @@
             <a:endParaRPr lang="en-US" sz="1050" dirty="0"/>
           </a:p>
           <a:p>
-            <a:pPr indent="0" marL="0">
+            <a:pPr marL="0" indent="0">
               <a:buNone/>
             </a:pPr>
             <a:r>
@@ -10713,14 +10554,14 @@
       </p:sp>
       <p:pic>
         <p:nvPicPr>
-          <p:cNvPr id="8" name="Image 1" descr="preencoded.png">    </p:cNvPr>
+          <p:cNvPr id="8" name="Image 1" descr="preencoded.png"/>
           <p:cNvPicPr>
             <a:picLocks noChangeAspect="1"/>
           </p:cNvPicPr>
           <p:nvPr/>
         </p:nvPicPr>
         <p:blipFill>
-          <a:blip r:embed="rId2"/>
+          <a:blip r:embed="rId4"/>
           <a:stretch>
             <a:fillRect/>
           </a:stretch>
@@ -10756,7 +10597,7 @@
           <a:bodyPr wrap="square" lIns="0" tIns="0" rIns="0" bIns="0" rtlCol="0" anchor="ctr"/>
           <a:lstStyle/>
           <a:p>
-            <a:pPr indent="0" marL="0">
+            <a:pPr marL="0" indent="0">
               <a:buNone/>
             </a:pPr>
             <a:r>
@@ -10795,7 +10636,7 @@
           <a:bodyPr wrap="square" lIns="0" tIns="0" rIns="0" bIns="0" rtlCol="0" anchor="ctr"/>
           <a:lstStyle/>
           <a:p>
-            <a:pPr indent="0" marL="0">
+            <a:pPr marL="0" indent="0">
               <a:buNone/>
             </a:pPr>
             <a:r>
@@ -10812,7 +10653,7 @@
             <a:endParaRPr lang="en-US" sz="1050" dirty="0"/>
           </a:p>
           <a:p>
-            <a:pPr indent="0" marL="0">
+            <a:pPr marL="0" indent="0">
               <a:buNone/>
             </a:pPr>
             <a:r>
@@ -10829,7 +10670,7 @@
             <a:endParaRPr lang="en-US" sz="1050" dirty="0"/>
           </a:p>
           <a:p>
-            <a:pPr indent="0" marL="0">
+            <a:pPr marL="0" indent="0">
               <a:buNone/>
             </a:pPr>
             <a:r>
@@ -10876,14 +10717,14 @@
       </p:sp>
       <p:pic>
         <p:nvPicPr>
-          <p:cNvPr id="12" name="Image 2" descr="preencoded.png">    </p:cNvPr>
+          <p:cNvPr id="12" name="Image 2" descr="preencoded.png"/>
           <p:cNvPicPr>
             <a:picLocks noChangeAspect="1"/>
           </p:cNvPicPr>
           <p:nvPr/>
         </p:nvPicPr>
         <p:blipFill>
-          <a:blip r:embed="rId3"/>
+          <a:blip r:embed="rId5"/>
           <a:stretch>
             <a:fillRect/>
           </a:stretch>
@@ -10919,7 +10760,7 @@
           <a:bodyPr wrap="square" lIns="0" tIns="0" rIns="0" bIns="0" rtlCol="0" anchor="ctr"/>
           <a:lstStyle/>
           <a:p>
-            <a:pPr indent="0" marL="0">
+            <a:pPr marL="0" indent="0">
               <a:buNone/>
             </a:pPr>
             <a:r>
@@ -10958,7 +10799,7 @@
           <a:bodyPr wrap="square" lIns="0" tIns="0" rIns="0" bIns="0" rtlCol="0" anchor="ctr"/>
           <a:lstStyle/>
           <a:p>
-            <a:pPr indent="0" marL="0">
+            <a:pPr marL="0" indent="0">
               <a:buNone/>
             </a:pPr>
             <a:r>
@@ -10975,7 +10816,7 @@
             <a:endParaRPr lang="en-US" sz="1050" dirty="0"/>
           </a:p>
           <a:p>
-            <a:pPr indent="0" marL="0">
+            <a:pPr marL="0" indent="0">
               <a:buNone/>
             </a:pPr>
             <a:r>
@@ -10992,7 +10833,7 @@
             <a:endParaRPr lang="en-US" sz="1050" dirty="0"/>
           </a:p>
           <a:p>
-            <a:pPr indent="0" marL="0">
+            <a:pPr marL="0" indent="0">
               <a:buNone/>
             </a:pPr>
             <a:r>
@@ -11039,14 +10880,14 @@
       </p:sp>
       <p:pic>
         <p:nvPicPr>
-          <p:cNvPr id="16" name="Image 3" descr="preencoded.png">    </p:cNvPr>
+          <p:cNvPr id="16" name="Image 3" descr="preencoded.png"/>
           <p:cNvPicPr>
             <a:picLocks noChangeAspect="1"/>
           </p:cNvPicPr>
           <p:nvPr/>
         </p:nvPicPr>
         <p:blipFill>
-          <a:blip r:embed="rId4"/>
+          <a:blip r:embed="rId6"/>
           <a:stretch>
             <a:fillRect/>
           </a:stretch>
@@ -11082,7 +10923,7 @@
           <a:bodyPr wrap="square" lIns="0" tIns="0" rIns="0" bIns="0" rtlCol="0" anchor="ctr"/>
           <a:lstStyle/>
           <a:p>
-            <a:pPr indent="0" marL="0">
+            <a:pPr marL="0" indent="0">
               <a:buNone/>
             </a:pPr>
             <a:r>
@@ -11121,7 +10962,7 @@
           <a:bodyPr wrap="square" lIns="0" tIns="0" rIns="0" bIns="0" rtlCol="0" anchor="ctr"/>
           <a:lstStyle/>
           <a:p>
-            <a:pPr indent="0" marL="0">
+            <a:pPr marL="0" indent="0">
               <a:buNone/>
             </a:pPr>
             <a:r>
@@ -11138,7 +10979,7 @@
             <a:endParaRPr lang="en-US" sz="1050" dirty="0"/>
           </a:p>
           <a:p>
-            <a:pPr indent="0" marL="0">
+            <a:pPr marL="0" indent="0">
               <a:buNone/>
             </a:pPr>
             <a:r>
@@ -11155,7 +10996,7 @@
             <a:endParaRPr lang="en-US" sz="1050" dirty="0"/>
           </a:p>
           <a:p>
-            <a:pPr indent="0" marL="0">
+            <a:pPr marL="0" indent="0">
               <a:buNone/>
             </a:pPr>
             <a:r>
@@ -11189,6 +11030,7 @@
         <a:solidFill>
           <a:srgbClr val="F4F7F4"/>
         </a:solidFill>
+        <a:effectLst/>
       </p:bgPr>
     </p:bg>
     <p:spTree>
@@ -11226,7 +11068,7 @@
           <a:bodyPr wrap="square" lIns="0" tIns="0" rIns="0" bIns="0" rtlCol="0" anchor="ctr"/>
           <a:lstStyle/>
           <a:p>
-            <a:pPr indent="0" marL="0">
+            <a:pPr marL="0" indent="0">
               <a:buNone/>
             </a:pPr>
             <a:r>
@@ -11292,7 +11134,7 @@
           <a:bodyPr wrap="square" lIns="0" tIns="0" rIns="0" bIns="0" rtlCol="0" anchor="ctr"/>
           <a:lstStyle/>
           <a:p>
-            <a:pPr algn="ctr" indent="0" marL="0">
+            <a:pPr marL="0" indent="0" algn="ctr">
               <a:buNone/>
             </a:pPr>
             <a:r>
@@ -11331,7 +11173,7 @@
           <a:bodyPr wrap="square" lIns="0" tIns="0" rIns="0" bIns="0" rtlCol="0" anchor="ctr"/>
           <a:lstStyle/>
           <a:p>
-            <a:pPr indent="0" marL="0">
+            <a:pPr marL="0" indent="0">
               <a:buNone/>
             </a:pPr>
             <a:r>
@@ -11348,7 +11190,7 @@
             <a:endParaRPr lang="en-US" sz="1150" dirty="0"/>
           </a:p>
           <a:p>
-            <a:pPr indent="0" marL="0">
+            <a:pPr marL="0" indent="0">
               <a:buNone/>
             </a:pPr>
             <a:r>
@@ -11365,13 +11207,13 @@
             <a:endParaRPr lang="en-US" sz="1150" dirty="0"/>
           </a:p>
           <a:p>
-            <a:pPr indent="0" marL="0">
+            <a:pPr marL="0" indent="0">
               <a:buNone/>
             </a:pPr>
             <a:endParaRPr lang="en-US" sz="1150" dirty="0"/>
           </a:p>
           <a:p>
-            <a:pPr indent="0" marL="0">
+            <a:pPr marL="0" indent="0">
               <a:buNone/>
             </a:pPr>
             <a:r>
@@ -11388,7 +11230,7 @@
             <a:endParaRPr lang="en-US" sz="1150" dirty="0"/>
           </a:p>
           <a:p>
-            <a:pPr indent="0" marL="0">
+            <a:pPr marL="0" indent="0">
               <a:buNone/>
             </a:pPr>
             <a:r>
@@ -11405,7 +11247,7 @@
             <a:endParaRPr lang="en-US" sz="1150" dirty="0"/>
           </a:p>
           <a:p>
-            <a:pPr indent="0" marL="0">
+            <a:pPr marL="0" indent="0">
               <a:buNone/>
             </a:pPr>
             <a:r>
@@ -11471,7 +11313,7 @@
           <a:bodyPr wrap="square" lIns="0" tIns="0" rIns="0" bIns="0" rtlCol="0" anchor="ctr"/>
           <a:lstStyle/>
           <a:p>
-            <a:pPr algn="ctr" indent="0" marL="0">
+            <a:pPr marL="0" indent="0" algn="ctr">
               <a:buNone/>
             </a:pPr>
             <a:r>
@@ -11510,7 +11352,7 @@
           <a:bodyPr wrap="square" lIns="0" tIns="0" rIns="0" bIns="0" rtlCol="0" anchor="ctr"/>
           <a:lstStyle/>
           <a:p>
-            <a:pPr indent="0" marL="0">
+            <a:pPr marL="0" indent="0">
               <a:buNone/>
             </a:pPr>
             <a:r>
@@ -11527,7 +11369,7 @@
             <a:endParaRPr lang="en-US" sz="1150" dirty="0"/>
           </a:p>
           <a:p>
-            <a:pPr indent="0" marL="0">
+            <a:pPr marL="0" indent="0">
               <a:buNone/>
             </a:pPr>
             <a:r>
@@ -11544,7 +11386,7 @@
             <a:endParaRPr lang="en-US" sz="1150" dirty="0"/>
           </a:p>
           <a:p>
-            <a:pPr indent="0" marL="0">
+            <a:pPr marL="0" indent="0">
               <a:buNone/>
             </a:pPr>
             <a:r>
@@ -11561,13 +11403,13 @@
             <a:endParaRPr lang="en-US" sz="1150" dirty="0"/>
           </a:p>
           <a:p>
-            <a:pPr indent="0" marL="0">
+            <a:pPr marL="0" indent="0">
               <a:buNone/>
             </a:pPr>
             <a:endParaRPr lang="en-US" sz="1150" dirty="0"/>
           </a:p>
           <a:p>
-            <a:pPr indent="0" marL="0">
+            <a:pPr marL="0" indent="0">
               <a:buNone/>
             </a:pPr>
             <a:r>
@@ -11584,7 +11426,7 @@
             <a:endParaRPr lang="en-US" sz="1150" dirty="0"/>
           </a:p>
           <a:p>
-            <a:pPr indent="0" marL="0">
+            <a:pPr marL="0" indent="0">
               <a:buNone/>
             </a:pPr>
             <a:r>
@@ -11616,13 +11458,9 @@
           <a:prstGeom prst="rect">
             <a:avLst/>
           </a:prstGeom>
-          <a:solidFill>
-            <a:srgbClr val="64748B"/>
-          </a:solidFill>
+          <a:noFill/>
           <a:ln w="12700">
-            <a:solidFill>
-              <a:srgbClr val="64748B"/>
-            </a:solidFill>
+            <a:noFill/>
             <a:prstDash val="solid"/>
           </a:ln>
         </p:spPr>
@@ -11635,7 +11473,7 @@
         </p:nvSpPr>
         <p:spPr>
           <a:xfrm>
-            <a:off x="4224528" y="1810512"/>
+            <a:off x="4274820" y="1804750"/>
             <a:ext cx="685800" cy="457200"/>
           </a:xfrm>
           <a:prstGeom prst="rect">
@@ -11648,14 +11486,11 @@
           <a:bodyPr wrap="square" lIns="0" tIns="0" rIns="0" bIns="0" rtlCol="0" anchor="ctr"/>
           <a:lstStyle/>
           <a:p>
-            <a:pPr algn="ctr" indent="0" marL="0">
+            <a:pPr marL="0" indent="0" algn="ctr">
               <a:buNone/>
             </a:pPr>
             <a:r>
               <a:rPr lang="en-US" sz="2200" dirty="0">
-                <a:solidFill>
-                  <a:srgbClr val="64748B"/>
-                </a:solidFill>
                 <a:latin typeface="Calibri" pitchFamily="34" charset="0"/>
                 <a:ea typeface="Calibri" pitchFamily="34" charset="-122"/>
                 <a:cs typeface="Calibri" pitchFamily="34" charset="-120"/>
@@ -11687,7 +11522,7 @@
           <a:bodyPr wrap="square" lIns="0" tIns="0" rIns="0" bIns="0" rtlCol="0" anchor="ctr"/>
           <a:lstStyle/>
           <a:p>
-            <a:pPr indent="0" marL="0">
+            <a:pPr marL="0" indent="0">
               <a:buNone/>
             </a:pPr>
             <a:r>
@@ -11726,7 +11561,7 @@
           <a:bodyPr wrap="square" lIns="0" tIns="0" rIns="0" bIns="0" rtlCol="0" anchor="ctr"/>
           <a:lstStyle/>
           <a:p>
-            <a:pPr indent="0" marL="0">
+            <a:pPr marL="0" indent="0">
               <a:buNone/>
             </a:pPr>
             <a:r>
@@ -11740,9 +11575,6 @@
               </a:rPr>
               <a:t>Pillar: </a:t>
             </a:r>
-            <a:pPr indent="0" marL="0">
-              <a:buNone/>
-            </a:pPr>
             <a:r>
               <a:rPr lang="en-US" sz="1200" b="1" dirty="0">
                 <a:solidFill>
@@ -11779,7 +11611,7 @@
           <a:bodyPr wrap="square" lIns="0" tIns="0" rIns="0" bIns="0" rtlCol="0" anchor="ctr"/>
           <a:lstStyle/>
           <a:p>
-            <a:pPr indent="0" marL="0">
+            <a:pPr marL="0" indent="0">
               <a:buNone/>
             </a:pPr>
             <a:r>
@@ -11793,9 +11625,6 @@
               </a:rPr>
               <a:t>Pattern: </a:t>
             </a:r>
-            <a:pPr indent="0" marL="0">
-              <a:buNone/>
-            </a:pPr>
             <a:r>
               <a:rPr lang="en-US" sz="1100" dirty="0">
                 <a:solidFill>
@@ -11827,6 +11656,7 @@
         <a:solidFill>
           <a:srgbClr val="F4F7F4"/>
         </a:solidFill>
+        <a:effectLst/>
       </p:bgPr>
     </p:bg>
     <p:spTree>
@@ -11864,7 +11694,7 @@
           <a:bodyPr wrap="square" lIns="0" tIns="0" rIns="0" bIns="0" rtlCol="0" anchor="ctr"/>
           <a:lstStyle/>
           <a:p>
-            <a:pPr indent="0" marL="0">
+            <a:pPr marL="0" indent="0">
               <a:buNone/>
             </a:pPr>
             <a:r>
@@ -11890,8 +11720,8 @@
         </p:nvSpPr>
         <p:spPr>
           <a:xfrm>
-            <a:off x="365760" y="914400"/>
-            <a:ext cx="8412480" cy="1097280"/>
+            <a:off x="365760" y="1052186"/>
+            <a:ext cx="8412480" cy="864296"/>
           </a:xfrm>
           <a:prstGeom prst="roundRect">
             <a:avLst>
@@ -11908,7 +11738,7 @@
             <a:prstDash val="solid"/>
           </a:ln>
           <a:effectLst>
-            <a:outerShdw sx="100000" sy="100000" kx="0" ky="0" algn="bl" rotWithShape="0" blurRad="101600" dist="38100" dir="8100000">
+            <a:outerShdw blurRad="101600" dist="38100" dir="8100000" algn="bl" rotWithShape="0">
               <a:srgbClr val="000000">
                 <a:alpha val="8000"/>
               </a:srgbClr>
@@ -11924,7 +11754,7 @@
         </p:nvSpPr>
         <p:spPr>
           <a:xfrm>
-            <a:off x="548640" y="960120"/>
+            <a:off x="548640" y="1035276"/>
             <a:ext cx="1371600" cy="320040"/>
           </a:xfrm>
           <a:prstGeom prst="rect">
@@ -11937,7 +11767,7 @@
           <a:bodyPr wrap="square" lIns="0" tIns="0" rIns="0" bIns="0" rtlCol="0" anchor="ctr"/>
           <a:lstStyle/>
           <a:p>
-            <a:pPr indent="0" marL="0">
+            <a:pPr marL="0" indent="0">
               <a:buNone/>
             </a:pPr>
             <a:r>
@@ -11976,7 +11806,7 @@
           <a:bodyPr wrap="square" lIns="0" tIns="0" rIns="0" bIns="0" rtlCol="0" anchor="ctr"/>
           <a:lstStyle/>
           <a:p>
-            <a:pPr indent="0" marL="0">
+            <a:pPr marL="0" indent="0">
               <a:buNone/>
             </a:pPr>
             <a:r>
@@ -12023,7 +11853,7 @@
       </p:sp>
       <p:sp>
         <p:nvSpPr>
-          <p:cNvPr id="7" name="Shape 5"/>
+          <p:cNvPr id="8" name="Text 6"/>
           <p:cNvSpPr/>
           <p:nvPr/>
         </p:nvSpPr>
@@ -12032,31 +11862,6 @@
             <a:off x="1371600" y="2176272"/>
             <a:ext cx="566928" cy="566928"/>
           </a:xfrm>
-          <a:prstGeom prst="oval">
-            <a:avLst/>
-          </a:prstGeom>
-          <a:solidFill>
-            <a:srgbClr val="2C5F2D"/>
-          </a:solidFill>
-          <a:ln w="12700">
-            <a:solidFill>
-              <a:srgbClr val="2C5F2D"/>
-            </a:solidFill>
-            <a:prstDash val="solid"/>
-          </a:ln>
-        </p:spPr>
-      </p:sp>
-      <p:sp>
-        <p:nvSpPr>
-          <p:cNvPr id="8" name="Text 6"/>
-          <p:cNvSpPr/>
-          <p:nvPr/>
-        </p:nvSpPr>
-        <p:spPr>
-          <a:xfrm>
-            <a:off x="1371600" y="2176272"/>
-            <a:ext cx="566928" cy="566928"/>
-          </a:xfrm>
           <a:prstGeom prst="rect">
             <a:avLst/>
           </a:prstGeom>
@@ -12067,13 +11872,13 @@
           <a:bodyPr wrap="square" lIns="0" tIns="0" rIns="0" bIns="0" rtlCol="0" anchor="ctr"/>
           <a:lstStyle/>
           <a:p>
-            <a:pPr algn="ctr" indent="0" marL="0">
+            <a:pPr marL="0" indent="0" algn="ctr">
               <a:buNone/>
             </a:pPr>
             <a:r>
               <a:rPr lang="en-US" sz="1800" b="1" dirty="0">
                 <a:solidFill>
-                  <a:srgbClr val="FFFFFF"/>
+                  <a:srgbClr val="00B050"/>
                 </a:solidFill>
                 <a:latin typeface="Calibri" pitchFamily="34" charset="0"/>
                 <a:ea typeface="Calibri" pitchFamily="34" charset="-122"/>
@@ -12081,7 +11886,11 @@
               </a:rPr>
               <a:t>1</a:t>
             </a:r>
-            <a:endParaRPr lang="en-US" sz="1800" dirty="0"/>
+            <a:endParaRPr lang="en-US" sz="1800" dirty="0">
+              <a:solidFill>
+                <a:srgbClr val="00B050"/>
+              </a:solidFill>
+            </a:endParaRPr>
           </a:p>
         </p:txBody>
       </p:sp>
@@ -12106,7 +11915,7 @@
           <a:bodyPr wrap="square" lIns="0" tIns="0" rIns="0" bIns="0" rtlCol="0" anchor="ctr"/>
           <a:lstStyle/>
           <a:p>
-            <a:pPr algn="ctr" indent="0" marL="0">
+            <a:pPr marL="0" indent="0" algn="ctr">
               <a:buNone/>
             </a:pPr>
             <a:r>
@@ -12145,7 +11954,7 @@
           <a:bodyPr wrap="square" lIns="0" tIns="0" rIns="0" bIns="0" rtlCol="0" anchor="ctr"/>
           <a:lstStyle/>
           <a:p>
-            <a:pPr algn="ctr" indent="0" marL="0">
+            <a:pPr marL="0" indent="0" algn="ctr">
               <a:buNone/>
             </a:pPr>
             <a:r>
@@ -12192,7 +12001,7 @@
       </p:sp>
       <p:sp>
         <p:nvSpPr>
-          <p:cNvPr id="12" name="Shape 10"/>
+          <p:cNvPr id="13" name="Text 11"/>
           <p:cNvSpPr/>
           <p:nvPr/>
         </p:nvSpPr>
@@ -12201,31 +12010,6 @@
             <a:off x="4251960" y="2176272"/>
             <a:ext cx="566928" cy="566928"/>
           </a:xfrm>
-          <a:prstGeom prst="oval">
-            <a:avLst/>
-          </a:prstGeom>
-          <a:solidFill>
-            <a:srgbClr val="2C5F2D"/>
-          </a:solidFill>
-          <a:ln w="12700">
-            <a:solidFill>
-              <a:srgbClr val="2C5F2D"/>
-            </a:solidFill>
-            <a:prstDash val="solid"/>
-          </a:ln>
-        </p:spPr>
-      </p:sp>
-      <p:sp>
-        <p:nvSpPr>
-          <p:cNvPr id="13" name="Text 11"/>
-          <p:cNvSpPr/>
-          <p:nvPr/>
-        </p:nvSpPr>
-        <p:spPr>
-          <a:xfrm>
-            <a:off x="4251960" y="2176272"/>
-            <a:ext cx="566928" cy="566928"/>
-          </a:xfrm>
           <a:prstGeom prst="rect">
             <a:avLst/>
           </a:prstGeom>
@@ -12236,13 +12020,13 @@
           <a:bodyPr wrap="square" lIns="0" tIns="0" rIns="0" bIns="0" rtlCol="0" anchor="ctr"/>
           <a:lstStyle/>
           <a:p>
-            <a:pPr algn="ctr" indent="0" marL="0">
+            <a:pPr marL="0" indent="0" algn="ctr">
               <a:buNone/>
             </a:pPr>
             <a:r>
               <a:rPr lang="en-US" sz="1800" b="1" dirty="0">
                 <a:solidFill>
-                  <a:srgbClr val="FFFFFF"/>
+                  <a:srgbClr val="00B050"/>
                 </a:solidFill>
                 <a:latin typeface="Calibri" pitchFamily="34" charset="0"/>
                 <a:ea typeface="Calibri" pitchFamily="34" charset="-122"/>
@@ -12250,7 +12034,11 @@
               </a:rPr>
               <a:t>2</a:t>
             </a:r>
-            <a:endParaRPr lang="en-US" sz="1800" dirty="0"/>
+            <a:endParaRPr lang="en-US" sz="1800" dirty="0">
+              <a:solidFill>
+                <a:srgbClr val="00B050"/>
+              </a:solidFill>
+            </a:endParaRPr>
           </a:p>
         </p:txBody>
       </p:sp>
@@ -12275,7 +12063,7 @@
           <a:bodyPr wrap="square" lIns="0" tIns="0" rIns="0" bIns="0" rtlCol="0" anchor="ctr"/>
           <a:lstStyle/>
           <a:p>
-            <a:pPr algn="ctr" indent="0" marL="0">
+            <a:pPr marL="0" indent="0" algn="ctr">
               <a:buNone/>
             </a:pPr>
             <a:r>
@@ -12314,7 +12102,7 @@
           <a:bodyPr wrap="square" lIns="0" tIns="0" rIns="0" bIns="0" rtlCol="0" anchor="ctr"/>
           <a:lstStyle/>
           <a:p>
-            <a:pPr algn="ctr" indent="0" marL="0">
+            <a:pPr marL="0" indent="0" algn="ctr">
               <a:buNone/>
             </a:pPr>
             <a:r>
@@ -12361,7 +12149,7 @@
       </p:sp>
       <p:sp>
         <p:nvSpPr>
-          <p:cNvPr id="17" name="Shape 15"/>
+          <p:cNvPr id="18" name="Text 16"/>
           <p:cNvSpPr/>
           <p:nvPr/>
         </p:nvSpPr>
@@ -12370,31 +12158,6 @@
             <a:off x="7132320" y="2176272"/>
             <a:ext cx="566928" cy="566928"/>
           </a:xfrm>
-          <a:prstGeom prst="oval">
-            <a:avLst/>
-          </a:prstGeom>
-          <a:solidFill>
-            <a:srgbClr val="2C5F2D"/>
-          </a:solidFill>
-          <a:ln w="12700">
-            <a:solidFill>
-              <a:srgbClr val="2C5F2D"/>
-            </a:solidFill>
-            <a:prstDash val="solid"/>
-          </a:ln>
-        </p:spPr>
-      </p:sp>
-      <p:sp>
-        <p:nvSpPr>
-          <p:cNvPr id="18" name="Text 16"/>
-          <p:cNvSpPr/>
-          <p:nvPr/>
-        </p:nvSpPr>
-        <p:spPr>
-          <a:xfrm>
-            <a:off x="7132320" y="2176272"/>
-            <a:ext cx="566928" cy="566928"/>
-          </a:xfrm>
           <a:prstGeom prst="rect">
             <a:avLst/>
           </a:prstGeom>
@@ -12405,13 +12168,13 @@
           <a:bodyPr wrap="square" lIns="0" tIns="0" rIns="0" bIns="0" rtlCol="0" anchor="ctr"/>
           <a:lstStyle/>
           <a:p>
-            <a:pPr algn="ctr" indent="0" marL="0">
+            <a:pPr marL="0" indent="0" algn="ctr">
               <a:buNone/>
             </a:pPr>
             <a:r>
               <a:rPr lang="en-US" sz="1800" b="1" dirty="0">
                 <a:solidFill>
-                  <a:srgbClr val="FFFFFF"/>
+                  <a:srgbClr val="00B050"/>
                 </a:solidFill>
                 <a:latin typeface="Calibri" pitchFamily="34" charset="0"/>
                 <a:ea typeface="Calibri" pitchFamily="34" charset="-122"/>
@@ -12419,7 +12182,11 @@
               </a:rPr>
               <a:t>3</a:t>
             </a:r>
-            <a:endParaRPr lang="en-US" sz="1800" dirty="0"/>
+            <a:endParaRPr lang="en-US" sz="1800" dirty="0">
+              <a:solidFill>
+                <a:srgbClr val="00B050"/>
+              </a:solidFill>
+            </a:endParaRPr>
           </a:p>
         </p:txBody>
       </p:sp>
@@ -12444,7 +12211,7 @@
           <a:bodyPr wrap="square" lIns="0" tIns="0" rIns="0" bIns="0" rtlCol="0" anchor="ctr"/>
           <a:lstStyle/>
           <a:p>
-            <a:pPr algn="ctr" indent="0" marL="0">
+            <a:pPr marL="0" indent="0" algn="ctr">
               <a:buNone/>
             </a:pPr>
             <a:r>
@@ -12483,7 +12250,7 @@
           <a:bodyPr wrap="square" lIns="0" tIns="0" rIns="0" bIns="0" rtlCol="0" anchor="ctr"/>
           <a:lstStyle/>
           <a:p>
-            <a:pPr algn="ctr" indent="0" marL="0">
+            <a:pPr marL="0" indent="0" algn="ctr">
               <a:buNone/>
             </a:pPr>
             <a:r>
@@ -12522,7 +12289,7 @@
           <a:bodyPr wrap="square" lIns="0" tIns="0" rIns="0" bIns="0" rtlCol="0" anchor="ctr"/>
           <a:lstStyle/>
           <a:p>
-            <a:pPr indent="0" marL="0">
+            <a:pPr marL="0" indent="0">
               <a:buNone/>
             </a:pPr>
             <a:r>
@@ -12561,7 +12328,7 @@
           <a:bodyPr wrap="square" lIns="0" tIns="0" rIns="0" bIns="0" rtlCol="0" anchor="ctr"/>
           <a:lstStyle/>
           <a:p>
-            <a:pPr indent="0" marL="0">
+            <a:pPr marL="0" indent="0">
               <a:buNone/>
             </a:pPr>
             <a:r>
@@ -12575,9 +12342,6 @@
               </a:rPr>
               <a:t>Pillar: </a:t>
             </a:r>
-            <a:pPr indent="0" marL="0">
-              <a:buNone/>
-            </a:pPr>
             <a:r>
               <a:rPr lang="en-US" sz="1100" b="1" dirty="0">
                 <a:solidFill>
@@ -12589,9 +12353,6 @@
               </a:rPr>
               <a:t>Energy  ·  Hardware  </a:t>
             </a:r>
-            <a:pPr indent="0" marL="0">
-              <a:buNone/>
-            </a:pPr>
             <a:r>
               <a:rPr lang="en-US" sz="1100" b="1" dirty="0">
                 <a:solidFill>
@@ -12603,9 +12364,6 @@
               </a:rPr>
               <a:t>  Pattern: </a:t>
             </a:r>
-            <a:pPr indent="0" marL="0">
-              <a:buNone/>
-            </a:pPr>
             <a:r>
               <a:rPr lang="en-US" sz="1100" dirty="0">
                 <a:solidFill>
@@ -12637,6 +12395,7 @@
         <a:solidFill>
           <a:srgbClr val="F4F7F4"/>
         </a:solidFill>
+        <a:effectLst/>
       </p:bgPr>
     </p:bg>
     <p:spTree>
@@ -12674,7 +12433,7 @@
           <a:bodyPr wrap="square" lIns="0" tIns="0" rIns="0" bIns="0" rtlCol="0" anchor="ctr"/>
           <a:lstStyle/>
           <a:p>
-            <a:pPr indent="0" marL="0">
+            <a:pPr marL="0" indent="0">
               <a:buNone/>
             </a:pPr>
             <a:r>
@@ -12700,7 +12459,7 @@
         </p:nvSpPr>
         <p:spPr>
           <a:xfrm>
-            <a:off x="320040" y="914400"/>
+            <a:off x="320040" y="989556"/>
             <a:ext cx="4160520" cy="3749040"/>
           </a:xfrm>
           <a:prstGeom prst="roundRect">
@@ -12721,21 +12480,21 @@
       </p:sp>
       <p:pic>
         <p:nvPicPr>
-          <p:cNvPr id="4" name="Image 0" descr="preencoded.png">    </p:cNvPr>
+          <p:cNvPr id="4" name="Image 0" descr="preencoded.png"/>
           <p:cNvPicPr>
             <a:picLocks noChangeAspect="1"/>
           </p:cNvPicPr>
           <p:nvPr/>
         </p:nvPicPr>
         <p:blipFill>
-          <a:blip r:embed="rId1"/>
+          <a:blip r:embed="rId3"/>
           <a:stretch>
             <a:fillRect/>
           </a:stretch>
         </p:blipFill>
         <p:spPr>
           <a:xfrm>
-            <a:off x="457200" y="1005840"/>
+            <a:off x="457200" y="1037155"/>
             <a:ext cx="411480" cy="411480"/>
           </a:xfrm>
           <a:prstGeom prst="rect">
@@ -12751,7 +12510,7 @@
         </p:nvSpPr>
         <p:spPr>
           <a:xfrm>
-            <a:off x="960120" y="1005840"/>
+            <a:off x="960120" y="1037155"/>
             <a:ext cx="3383280" cy="411480"/>
           </a:xfrm>
           <a:prstGeom prst="rect">
@@ -12764,7 +12523,7 @@
           <a:bodyPr wrap="square" lIns="0" tIns="0" rIns="0" bIns="0" rtlCol="0" anchor="ctr"/>
           <a:lstStyle/>
           <a:p>
-            <a:pPr indent="0" marL="0">
+            <a:pPr marL="0" indent="0">
               <a:buNone/>
             </a:pPr>
             <a:r>
@@ -12803,7 +12562,7 @@
           <a:bodyPr wrap="square" lIns="0" tIns="0" rIns="0" bIns="0" rtlCol="0" anchor="ctr"/>
           <a:lstStyle/>
           <a:p>
-            <a:pPr indent="0" marL="0">
+            <a:pPr marL="0" indent="0">
               <a:buNone/>
             </a:pPr>
             <a:r>
@@ -12842,7 +12601,7 @@
           <a:bodyPr wrap="square" lIns="0" tIns="0" rIns="0" bIns="0" rtlCol="0" anchor="ctr"/>
           <a:lstStyle/>
           <a:p>
-            <a:pPr indent="0" marL="0">
+            <a:pPr marL="0" indent="0">
               <a:buNone/>
             </a:pPr>
             <a:r>
@@ -12859,7 +12618,7 @@
             <a:endParaRPr lang="en-US" sz="1000" dirty="0"/>
           </a:p>
           <a:p>
-            <a:pPr indent="0" marL="0">
+            <a:pPr marL="0" indent="0">
               <a:buNone/>
             </a:pPr>
             <a:r>
@@ -12898,7 +12657,7 @@
           <a:bodyPr wrap="square" lIns="0" tIns="0" rIns="0" bIns="0" rtlCol="0" anchor="ctr"/>
           <a:lstStyle/>
           <a:p>
-            <a:pPr indent="0" marL="0">
+            <a:pPr marL="0" indent="0">
               <a:buNone/>
             </a:pPr>
             <a:r>
@@ -12937,7 +12696,7 @@
           <a:bodyPr wrap="square" lIns="0" tIns="0" rIns="0" bIns="0" rtlCol="0" anchor="ctr"/>
           <a:lstStyle/>
           <a:p>
-            <a:pPr indent="0" marL="0">
+            <a:pPr marL="0" indent="0">
               <a:buNone/>
             </a:pPr>
             <a:r>
@@ -12954,7 +12713,7 @@
             <a:endParaRPr lang="en-US" sz="1000" dirty="0"/>
           </a:p>
           <a:p>
-            <a:pPr indent="0" marL="0">
+            <a:pPr marL="0" indent="0">
               <a:buNone/>
             </a:pPr>
             <a:r>
@@ -12993,7 +12752,7 @@
           <a:bodyPr wrap="square" lIns="0" tIns="0" rIns="0" bIns="0" rtlCol="0" anchor="ctr"/>
           <a:lstStyle/>
           <a:p>
-            <a:pPr indent="0" marL="0">
+            <a:pPr marL="0" indent="0">
               <a:buNone/>
             </a:pPr>
             <a:r>
@@ -13032,7 +12791,7 @@
           <a:bodyPr wrap="square" lIns="0" tIns="0" rIns="0" bIns="0" rtlCol="0" anchor="ctr"/>
           <a:lstStyle/>
           <a:p>
-            <a:pPr indent="0" marL="0">
+            <a:pPr marL="0" indent="0">
               <a:buNone/>
             </a:pPr>
             <a:r>
@@ -13049,7 +12808,7 @@
             <a:endParaRPr lang="en-US" sz="1000" dirty="0"/>
           </a:p>
           <a:p>
-            <a:pPr indent="0" marL="0">
+            <a:pPr marL="0" indent="0">
               <a:buNone/>
             </a:pPr>
             <a:r>
@@ -13115,7 +12874,7 @@
           <a:bodyPr wrap="square" lIns="0" tIns="0" rIns="0" bIns="0" rtlCol="0" anchor="ctr"/>
           <a:lstStyle/>
           <a:p>
-            <a:pPr algn="ctr" indent="0" marL="0">
+            <a:pPr marL="0" indent="0" algn="ctr">
               <a:buNone/>
             </a:pPr>
             <a:r>
@@ -13141,7 +12900,7 @@
         </p:nvSpPr>
         <p:spPr>
           <a:xfrm>
-            <a:off x="4754880" y="914400"/>
+            <a:off x="4754880" y="989556"/>
             <a:ext cx="4160520" cy="3749040"/>
           </a:xfrm>
           <a:prstGeom prst="roundRect">
@@ -13162,21 +12921,21 @@
       </p:sp>
       <p:pic>
         <p:nvPicPr>
-          <p:cNvPr id="15" name="Image 1" descr="preencoded.png">    </p:cNvPr>
+          <p:cNvPr id="15" name="Image 1" descr="preencoded.png"/>
           <p:cNvPicPr>
             <a:picLocks noChangeAspect="1"/>
           </p:cNvPicPr>
           <p:nvPr/>
         </p:nvPicPr>
         <p:blipFill>
-          <a:blip r:embed="rId2"/>
+          <a:blip r:embed="rId4"/>
           <a:stretch>
             <a:fillRect/>
           </a:stretch>
         </p:blipFill>
         <p:spPr>
           <a:xfrm>
-            <a:off x="4892040" y="1005840"/>
+            <a:off x="4892040" y="1037155"/>
             <a:ext cx="411480" cy="411480"/>
           </a:xfrm>
           <a:prstGeom prst="rect">
@@ -13192,7 +12951,7 @@
         </p:nvSpPr>
         <p:spPr>
           <a:xfrm>
-            <a:off x="5394960" y="1005840"/>
+            <a:off x="5394960" y="1037155"/>
             <a:ext cx="3383280" cy="411480"/>
           </a:xfrm>
           <a:prstGeom prst="rect">
@@ -13205,7 +12964,7 @@
           <a:bodyPr wrap="square" lIns="0" tIns="0" rIns="0" bIns="0" rtlCol="0" anchor="ctr"/>
           <a:lstStyle/>
           <a:p>
-            <a:pPr indent="0" marL="0">
+            <a:pPr marL="0" indent="0">
               <a:buNone/>
             </a:pPr>
             <a:r>
@@ -13244,7 +13003,7 @@
           <a:bodyPr wrap="square" lIns="0" tIns="0" rIns="0" bIns="0" rtlCol="0" anchor="ctr"/>
           <a:lstStyle/>
           <a:p>
-            <a:pPr indent="0" marL="0">
+            <a:pPr marL="0" indent="0">
               <a:buNone/>
             </a:pPr>
             <a:r>
@@ -13283,7 +13042,7 @@
           <a:bodyPr wrap="square" lIns="0" tIns="0" rIns="0" bIns="0" rtlCol="0" anchor="ctr"/>
           <a:lstStyle/>
           <a:p>
-            <a:pPr indent="0" marL="0">
+            <a:pPr marL="0" indent="0">
               <a:buNone/>
             </a:pPr>
             <a:r>
@@ -13322,7 +13081,7 @@
           <a:bodyPr wrap="square" lIns="0" tIns="0" rIns="0" bIns="0" rtlCol="0" anchor="ctr"/>
           <a:lstStyle/>
           <a:p>
-            <a:pPr indent="0" marL="0">
+            <a:pPr marL="0" indent="0">
               <a:buNone/>
             </a:pPr>
             <a:r>
@@ -13361,7 +13120,7 @@
           <a:bodyPr wrap="square" lIns="0" tIns="0" rIns="0" bIns="0" rtlCol="0" anchor="ctr"/>
           <a:lstStyle/>
           <a:p>
-            <a:pPr indent="0" marL="0">
+            <a:pPr marL="0" indent="0">
               <a:buNone/>
             </a:pPr>
             <a:r>
@@ -13378,7 +13137,7 @@
             <a:endParaRPr lang="en-US" sz="1000" dirty="0"/>
           </a:p>
           <a:p>
-            <a:pPr indent="0" marL="0">
+            <a:pPr marL="0" indent="0">
               <a:buNone/>
             </a:pPr>
             <a:r>
@@ -13417,7 +13176,7 @@
           <a:bodyPr wrap="square" lIns="0" tIns="0" rIns="0" bIns="0" rtlCol="0" anchor="ctr"/>
           <a:lstStyle/>
           <a:p>
-            <a:pPr indent="0" marL="0">
+            <a:pPr marL="0" indent="0">
               <a:buNone/>
             </a:pPr>
             <a:r>
@@ -13456,7 +13215,7 @@
           <a:bodyPr wrap="square" lIns="0" tIns="0" rIns="0" bIns="0" rtlCol="0" anchor="ctr"/>
           <a:lstStyle/>
           <a:p>
-            <a:pPr indent="0" marL="0">
+            <a:pPr marL="0" indent="0">
               <a:buNone/>
             </a:pPr>
             <a:r>
@@ -13473,7 +13232,7 @@
             <a:endParaRPr lang="en-US" sz="1000" dirty="0"/>
           </a:p>
           <a:p>
-            <a:pPr indent="0" marL="0">
+            <a:pPr marL="0" indent="0">
               <a:buNone/>
             </a:pPr>
             <a:r>
@@ -13539,7 +13298,7 @@
           <a:bodyPr wrap="square" lIns="0" tIns="0" rIns="0" bIns="0" rtlCol="0" anchor="ctr"/>
           <a:lstStyle/>
           <a:p>
-            <a:pPr algn="ctr" indent="0" marL="0">
+            <a:pPr marL="0" indent="0" algn="ctr">
               <a:buNone/>
             </a:pPr>
             <a:r>
@@ -13858,4 +13617,299 @@
     </a:ext>
   </a:extLst>
 </a:theme>
+</file>
+
+<file path=ppt/theme/theme2.xml><?xml version="1.0" encoding="utf-8"?>
+<a:theme xmlns:a="http://schemas.openxmlformats.org/drawingml/2006/main" name="Office Theme">
+  <a:themeElements>
+    <a:clrScheme name="Office">
+      <a:dk1>
+        <a:sysClr val="windowText" lastClr="000000"/>
+      </a:dk1>
+      <a:lt1>
+        <a:sysClr val="window" lastClr="FFFFFF"/>
+      </a:lt1>
+      <a:dk2>
+        <a:srgbClr val="44546A"/>
+      </a:dk2>
+      <a:lt2>
+        <a:srgbClr val="E7E6E6"/>
+      </a:lt2>
+      <a:accent1>
+        <a:srgbClr val="4472C4"/>
+      </a:accent1>
+      <a:accent2>
+        <a:srgbClr val="ED7D31"/>
+      </a:accent2>
+      <a:accent3>
+        <a:srgbClr val="A5A5A5"/>
+      </a:accent3>
+      <a:accent4>
+        <a:srgbClr val="FFC000"/>
+      </a:accent4>
+      <a:accent5>
+        <a:srgbClr val="5B9BD5"/>
+      </a:accent5>
+      <a:accent6>
+        <a:srgbClr val="70AD47"/>
+      </a:accent6>
+      <a:hlink>
+        <a:srgbClr val="0563C1"/>
+      </a:hlink>
+      <a:folHlink>
+        <a:srgbClr val="954F72"/>
+      </a:folHlink>
+    </a:clrScheme>
+    <a:fontScheme name="Office">
+      <a:majorFont>
+        <a:latin typeface="Calibri Light" panose="020F0302020204030204"/>
+        <a:ea typeface=""/>
+        <a:cs typeface=""/>
+        <a:font script="Jpan" typeface="游ゴシック Light"/>
+        <a:font script="Hang" typeface="맑은 고딕"/>
+        <a:font script="Hans" typeface="等线 Light"/>
+        <a:font script="Hant" typeface="新細明體"/>
+        <a:font script="Arab" typeface="Times New Roman"/>
+        <a:font script="Hebr" typeface="Times New Roman"/>
+        <a:font script="Thai" typeface="Angsana New"/>
+        <a:font script="Ethi" typeface="Nyala"/>
+        <a:font script="Beng" typeface="Vrinda"/>
+        <a:font script="Gujr" typeface="Shruti"/>
+        <a:font script="Khmr" typeface="MoolBoran"/>
+        <a:font script="Knda" typeface="Tunga"/>
+        <a:font script="Guru" typeface="Raavi"/>
+        <a:font script="Cans" typeface="Euphemia"/>
+        <a:font script="Cher" typeface="Plantagenet Cherokee"/>
+        <a:font script="Yiii" typeface="Microsoft Yi Baiti"/>
+        <a:font script="Tibt" typeface="Microsoft Himalaya"/>
+        <a:font script="Thaa" typeface="MV Boli"/>
+        <a:font script="Deva" typeface="Mangal"/>
+        <a:font script="Telu" typeface="Gautami"/>
+        <a:font script="Taml" typeface="Latha"/>
+        <a:font script="Syrc" typeface="Estrangelo Edessa"/>
+        <a:font script="Orya" typeface="Kalinga"/>
+        <a:font script="Mlym" typeface="Kartika"/>
+        <a:font script="Laoo" typeface="DokChampa"/>
+        <a:font script="Sinh" typeface="Iskoola Pota"/>
+        <a:font script="Mong" typeface="Mongolian Baiti"/>
+        <a:font script="Viet" typeface="Times New Roman"/>
+        <a:font script="Uigh" typeface="Microsoft Uighur"/>
+        <a:font script="Geor" typeface="Sylfaen"/>
+        <a:font script="Armn" typeface="Arial"/>
+        <a:font script="Bugi" typeface="Leelawadee UI"/>
+        <a:font script="Bopo" typeface="Microsoft JhengHei"/>
+        <a:font script="Java" typeface="Javanese Text"/>
+        <a:font script="Lisu" typeface="Segoe UI"/>
+        <a:font script="Mymr" typeface="Myanmar Text"/>
+        <a:font script="Nkoo" typeface="Ebrima"/>
+        <a:font script="Olck" typeface="Nirmala UI"/>
+        <a:font script="Osma" typeface="Ebrima"/>
+        <a:font script="Phag" typeface="Phagspa"/>
+        <a:font script="Syrn" typeface="Estrangelo Edessa"/>
+        <a:font script="Syrj" typeface="Estrangelo Edessa"/>
+        <a:font script="Syre" typeface="Estrangelo Edessa"/>
+        <a:font script="Sora" typeface="Nirmala UI"/>
+        <a:font script="Tale" typeface="Microsoft Tai Le"/>
+        <a:font script="Talu" typeface="Microsoft New Tai Lue"/>
+        <a:font script="Tfng" typeface="Ebrima"/>
+      </a:majorFont>
+      <a:minorFont>
+        <a:latin typeface="Calibri" panose="020F0502020204030204"/>
+        <a:ea typeface=""/>
+        <a:cs typeface=""/>
+        <a:font script="Jpan" typeface="游ゴシック"/>
+        <a:font script="Hang" typeface="맑은 고딕"/>
+        <a:font script="Hans" typeface="等线"/>
+        <a:font script="Hant" typeface="新細明體"/>
+        <a:font script="Arab" typeface="Arial"/>
+        <a:font script="Hebr" typeface="Arial"/>
+        <a:font script="Thai" typeface="Cordia New"/>
+        <a:font script="Ethi" typeface="Nyala"/>
+        <a:font script="Beng" typeface="Vrinda"/>
+        <a:font script="Gujr" typeface="Shruti"/>
+        <a:font script="Khmr" typeface="DaunPenh"/>
+        <a:font script="Knda" typeface="Tunga"/>
+        <a:font script="Guru" typeface="Raavi"/>
+        <a:font script="Cans" typeface="Euphemia"/>
+        <a:font script="Cher" typeface="Plantagenet Cherokee"/>
+        <a:font script="Yiii" typeface="Microsoft Yi Baiti"/>
+        <a:font script="Tibt" typeface="Microsoft Himalaya"/>
+        <a:font script="Thaa" typeface="MV Boli"/>
+        <a:font script="Deva" typeface="Mangal"/>
+        <a:font script="Telu" typeface="Gautami"/>
+        <a:font script="Taml" typeface="Latha"/>
+        <a:font script="Syrc" typeface="Estrangelo Edessa"/>
+        <a:font script="Orya" typeface="Kalinga"/>
+        <a:font script="Mlym" typeface="Kartika"/>
+        <a:font script="Laoo" typeface="DokChampa"/>
+        <a:font script="Sinh" typeface="Iskoola Pota"/>
+        <a:font script="Mong" typeface="Mongolian Baiti"/>
+        <a:font script="Viet" typeface="Arial"/>
+        <a:font script="Uigh" typeface="Microsoft Uighur"/>
+        <a:font script="Geor" typeface="Sylfaen"/>
+        <a:font script="Armn" typeface="Arial"/>
+        <a:font script="Bugi" typeface="Leelawadee UI"/>
+        <a:font script="Bopo" typeface="Microsoft JhengHei"/>
+        <a:font script="Java" typeface="Javanese Text"/>
+        <a:font script="Lisu" typeface="Segoe UI"/>
+        <a:font script="Mymr" typeface="Myanmar Text"/>
+        <a:font script="Nkoo" typeface="Ebrima"/>
+        <a:font script="Olck" typeface="Nirmala UI"/>
+        <a:font script="Osma" typeface="Ebrima"/>
+        <a:font script="Phag" typeface="Phagspa"/>
+        <a:font script="Syrn" typeface="Estrangelo Edessa"/>
+        <a:font script="Syrj" typeface="Estrangelo Edessa"/>
+        <a:font script="Syre" typeface="Estrangelo Edessa"/>
+        <a:font script="Sora" typeface="Nirmala UI"/>
+        <a:font script="Tale" typeface="Microsoft Tai Le"/>
+        <a:font script="Talu" typeface="Microsoft New Tai Lue"/>
+        <a:font script="Tfng" typeface="Ebrima"/>
+      </a:minorFont>
+    </a:fontScheme>
+    <a:fmtScheme name="Office">
+      <a:fillStyleLst>
+        <a:solidFill>
+          <a:schemeClr val="phClr"/>
+        </a:solidFill>
+        <a:gradFill rotWithShape="1">
+          <a:gsLst>
+            <a:gs pos="0">
+              <a:schemeClr val="phClr">
+                <a:lumMod val="110000"/>
+                <a:satMod val="105000"/>
+                <a:tint val="67000"/>
+              </a:schemeClr>
+            </a:gs>
+            <a:gs pos="50000">
+              <a:schemeClr val="phClr">
+                <a:lumMod val="105000"/>
+                <a:satMod val="103000"/>
+                <a:tint val="73000"/>
+              </a:schemeClr>
+            </a:gs>
+            <a:gs pos="100000">
+              <a:schemeClr val="phClr">
+                <a:lumMod val="105000"/>
+                <a:satMod val="109000"/>
+                <a:tint val="81000"/>
+              </a:schemeClr>
+            </a:gs>
+          </a:gsLst>
+          <a:lin ang="5400000" scaled="0"/>
+        </a:gradFill>
+        <a:gradFill rotWithShape="1">
+          <a:gsLst>
+            <a:gs pos="0">
+              <a:schemeClr val="phClr">
+                <a:satMod val="103000"/>
+                <a:lumMod val="102000"/>
+                <a:tint val="94000"/>
+              </a:schemeClr>
+            </a:gs>
+            <a:gs pos="50000">
+              <a:schemeClr val="phClr">
+                <a:satMod val="110000"/>
+                <a:lumMod val="100000"/>
+                <a:shade val="100000"/>
+              </a:schemeClr>
+            </a:gs>
+            <a:gs pos="100000">
+              <a:schemeClr val="phClr">
+                <a:lumMod val="99000"/>
+                <a:satMod val="120000"/>
+                <a:shade val="78000"/>
+              </a:schemeClr>
+            </a:gs>
+          </a:gsLst>
+          <a:lin ang="5400000" scaled="0"/>
+        </a:gradFill>
+      </a:fillStyleLst>
+      <a:lnStyleLst>
+        <a:ln w="6350" cap="flat" cmpd="sng" algn="ctr">
+          <a:solidFill>
+            <a:schemeClr val="phClr"/>
+          </a:solidFill>
+          <a:prstDash val="solid"/>
+          <a:miter lim="800000"/>
+        </a:ln>
+        <a:ln w="12700" cap="flat" cmpd="sng" algn="ctr">
+          <a:solidFill>
+            <a:schemeClr val="phClr"/>
+          </a:solidFill>
+          <a:prstDash val="solid"/>
+          <a:miter lim="800000"/>
+        </a:ln>
+        <a:ln w="19050" cap="flat" cmpd="sng" algn="ctr">
+          <a:solidFill>
+            <a:schemeClr val="phClr"/>
+          </a:solidFill>
+          <a:prstDash val="solid"/>
+          <a:miter lim="800000"/>
+        </a:ln>
+      </a:lnStyleLst>
+      <a:effectStyleLst>
+        <a:effectStyle>
+          <a:effectLst/>
+        </a:effectStyle>
+        <a:effectStyle>
+          <a:effectLst/>
+        </a:effectStyle>
+        <a:effectStyle>
+          <a:effectLst>
+            <a:outerShdw blurRad="57150" dist="19050" dir="5400000" algn="ctr" rotWithShape="0">
+              <a:srgbClr val="000000">
+                <a:alpha val="63000"/>
+              </a:srgbClr>
+            </a:outerShdw>
+          </a:effectLst>
+        </a:effectStyle>
+      </a:effectStyleLst>
+      <a:bgFillStyleLst>
+        <a:solidFill>
+          <a:schemeClr val="phClr"/>
+        </a:solidFill>
+        <a:solidFill>
+          <a:schemeClr val="phClr">
+            <a:tint val="95000"/>
+            <a:satMod val="170000"/>
+          </a:schemeClr>
+        </a:solidFill>
+        <a:gradFill rotWithShape="1">
+          <a:gsLst>
+            <a:gs pos="0">
+              <a:schemeClr val="phClr">
+                <a:tint val="93000"/>
+                <a:satMod val="150000"/>
+                <a:shade val="98000"/>
+                <a:lumMod val="102000"/>
+              </a:schemeClr>
+            </a:gs>
+            <a:gs pos="50000">
+              <a:schemeClr val="phClr">
+                <a:tint val="98000"/>
+                <a:satMod val="130000"/>
+                <a:shade val="90000"/>
+                <a:lumMod val="103000"/>
+              </a:schemeClr>
+            </a:gs>
+            <a:gs pos="100000">
+              <a:schemeClr val="phClr">
+                <a:shade val="63000"/>
+                <a:satMod val="120000"/>
+              </a:schemeClr>
+            </a:gs>
+          </a:gsLst>
+          <a:lin ang="5400000" scaled="0"/>
+        </a:gradFill>
+      </a:bgFillStyleLst>
+    </a:fmtScheme>
+  </a:themeElements>
+  <a:objectDefaults/>
+  <a:extraClrSchemeLst/>
+  <a:extLst>
+    <a:ext uri="{05A4C25C-085E-4340-85A3-A5531E510DB2}">
+      <thm15:themeFamily xmlns:thm15="http://schemas.microsoft.com/office/thememl/2012/main" name="Office Theme" id="{62F939B6-93AF-4DB8-9C6B-D6C7DFDC589F}" vid="{4A3C46E8-61CC-4603-A589-7422A47A8E4A}"/>
+    </a:ext>
+  </a:extLst>
+</a:theme>
 </file>
--- a/ClearCart_GreenTech_Assessment.pptx
+++ b/ClearCart_GreenTech_Assessment.pptx
@@ -5,22 +5,23 @@
     <p:sldMasterId id="2147483648" r:id="rId1"/>
   </p:sldMasterIdLst>
   <p:notesMasterIdLst>
-    <p:notesMasterId r:id="rId15"/>
+    <p:notesMasterId r:id="rId16"/>
   </p:notesMasterIdLst>
   <p:sldIdLst>
     <p:sldId id="256" r:id="rId2"/>
     <p:sldId id="257" r:id="rId3"/>
     <p:sldId id="258" r:id="rId4"/>
-    <p:sldId id="259" r:id="rId5"/>
-    <p:sldId id="260" r:id="rId6"/>
-    <p:sldId id="261" r:id="rId7"/>
-    <p:sldId id="262" r:id="rId8"/>
-    <p:sldId id="263" r:id="rId9"/>
-    <p:sldId id="264" r:id="rId10"/>
-    <p:sldId id="265" r:id="rId11"/>
-    <p:sldId id="266" r:id="rId12"/>
-    <p:sldId id="267" r:id="rId13"/>
-    <p:sldId id="268" r:id="rId14"/>
+    <p:sldId id="269" r:id="rId5"/>
+    <p:sldId id="259" r:id="rId6"/>
+    <p:sldId id="260" r:id="rId7"/>
+    <p:sldId id="261" r:id="rId8"/>
+    <p:sldId id="262" r:id="rId9"/>
+    <p:sldId id="263" r:id="rId10"/>
+    <p:sldId id="264" r:id="rId11"/>
+    <p:sldId id="265" r:id="rId12"/>
+    <p:sldId id="266" r:id="rId13"/>
+    <p:sldId id="267" r:id="rId14"/>
+    <p:sldId id="268" r:id="rId15"/>
   </p:sldIdLst>
   <p:sldSz cx="9144000" cy="5143500" type="screen16x9"/>
   <p:notesSz cx="5143500" cy="9144000"/>
@@ -406,7 +407,7 @@
           <a:p>
             <a:fld id="{F7021451-1387-4CA6-816F-3879F97B5CBC}" type="slidenum">
               <a:rPr lang="en-US"/>
-              <a:t>10</a:t>
+              <a:t>11</a:t>
             </a:fld>
             <a:endParaRPr lang="en-US"/>
           </a:p>
@@ -498,7 +499,7 @@
           <a:p>
             <a:fld id="{F7021451-1387-4CA6-816F-3879F97B5CBC}" type="slidenum">
               <a:rPr lang="en-US"/>
-              <a:t>11</a:t>
+              <a:t>12</a:t>
             </a:fld>
             <a:endParaRPr lang="en-US"/>
           </a:p>
@@ -587,7 +588,7 @@
           <a:p>
             <a:fld id="{F7021451-1387-4CA6-816F-3879F97B5CBC}" type="slidenum">
               <a:rPr lang="en-US"/>
-              <a:t>12</a:t>
+              <a:t>13</a:t>
             </a:fld>
             <a:endParaRPr lang="en-US"/>
           </a:p>
@@ -677,7 +678,7 @@
           <a:p>
             <a:fld id="{F7021451-1387-4CA6-816F-3879F97B5CBC}" type="slidenum">
               <a:rPr lang="en-US"/>
-              <a:t>13</a:t>
+              <a:t>14</a:t>
             </a:fld>
             <a:endParaRPr lang="en-US"/>
           </a:p>
@@ -952,7 +953,7 @@
           <a:p>
             <a:fld id="{F7021451-1387-4CA6-816F-3879F97B5CBC}" type="slidenum">
               <a:rPr lang="en-US"/>
-              <a:t>4</a:t>
+              <a:t>5</a:t>
             </a:fld>
             <a:endParaRPr lang="en-US"/>
           </a:p>
@@ -1042,7 +1043,7 @@
           <a:p>
             <a:fld id="{F7021451-1387-4CA6-816F-3879F97B5CBC}" type="slidenum">
               <a:rPr lang="en-US"/>
-              <a:t>5</a:t>
+              <a:t>6</a:t>
             </a:fld>
             <a:endParaRPr lang="en-US"/>
           </a:p>
@@ -1133,7 +1134,7 @@
           <a:p>
             <a:fld id="{F7021451-1387-4CA6-816F-3879F97B5CBC}" type="slidenum">
               <a:rPr lang="en-US"/>
-              <a:t>6</a:t>
+              <a:t>7</a:t>
             </a:fld>
             <a:endParaRPr lang="en-US"/>
           </a:p>
@@ -1226,7 +1227,7 @@
           <a:p>
             <a:fld id="{F7021451-1387-4CA6-816F-3879F97B5CBC}" type="slidenum">
               <a:rPr lang="en-US"/>
-              <a:t>7</a:t>
+              <a:t>8</a:t>
             </a:fld>
             <a:endParaRPr lang="en-US"/>
           </a:p>
@@ -1316,7 +1317,7 @@
           <a:p>
             <a:fld id="{F7021451-1387-4CA6-816F-3879F97B5CBC}" type="slidenum">
               <a:rPr lang="en-US"/>
-              <a:t>8</a:t>
+              <a:t>9</a:t>
             </a:fld>
             <a:endParaRPr lang="en-US"/>
           </a:p>
@@ -1409,7 +1410,7 @@
           <a:p>
             <a:fld id="{F7021451-1387-4CA6-816F-3879F97B5CBC}" type="slidenum">
               <a:rPr lang="en-US"/>
-              <a:t>9</a:t>
+              <a:t>10</a:t>
             </a:fld>
             <a:endParaRPr lang="en-US"/>
           </a:p>
@@ -2034,6 +2035,943 @@
 
 <file path=ppt/slides/slide10.xml><?xml version="1.0" encoding="utf-8"?>
 <p:sld xmlns:a="http://schemas.openxmlformats.org/drawingml/2006/main" xmlns:r="http://schemas.openxmlformats.org/officeDocument/2006/relationships" xmlns:p="http://schemas.openxmlformats.org/presentationml/2006/main">
+  <p:cSld name="Slide 9">
+    <p:bg>
+      <p:bgPr>
+        <a:solidFill>
+          <a:srgbClr val="F4F7F4"/>
+        </a:solidFill>
+        <a:effectLst/>
+      </p:bgPr>
+    </p:bg>
+    <p:spTree>
+      <p:nvGrpSpPr>
+        <p:cNvPr id="1" name=""/>
+        <p:cNvGrpSpPr/>
+        <p:nvPr/>
+      </p:nvGrpSpPr>
+      <p:grpSpPr>
+        <a:xfrm>
+          <a:off x="0" y="0"/>
+          <a:ext cx="0" cy="0"/>
+          <a:chOff x="0" y="0"/>
+          <a:chExt cx="0" cy="0"/>
+        </a:xfrm>
+      </p:grpSpPr>
+      <p:sp>
+        <p:nvSpPr>
+          <p:cNvPr id="2" name="Text 0"/>
+          <p:cNvSpPr/>
+          <p:nvPr/>
+        </p:nvSpPr>
+        <p:spPr>
+          <a:xfrm>
+            <a:off x="457200" y="256032"/>
+            <a:ext cx="8229600" cy="502920"/>
+          </a:xfrm>
+          <a:prstGeom prst="rect">
+            <a:avLst/>
+          </a:prstGeom>
+          <a:noFill/>
+          <a:ln/>
+        </p:spPr>
+        <p:txBody>
+          <a:bodyPr wrap="square" lIns="0" tIns="0" rIns="0" bIns="0" rtlCol="0" anchor="ctr"/>
+          <a:lstStyle/>
+          <a:p>
+            <a:pPr marL="0" indent="0">
+              <a:buNone/>
+            </a:pPr>
+            <a:r>
+              <a:rPr lang="en-US" sz="3000" b="1" dirty="0">
+                <a:solidFill>
+                  <a:srgbClr val="1A2E2A"/>
+                </a:solidFill>
+                <a:latin typeface="Calibri" pitchFamily="34" charset="0"/>
+                <a:ea typeface="Calibri" pitchFamily="34" charset="-122"/>
+                <a:cs typeface="Calibri" pitchFamily="34" charset="-120"/>
+              </a:rPr>
+              <a:t>Slide 8 — Solution 3: EU Region Routing + Off-Peak Batching</a:t>
+            </a:r>
+            <a:endParaRPr lang="en-US" sz="3000" dirty="0"/>
+          </a:p>
+        </p:txBody>
+      </p:sp>
+      <p:sp>
+        <p:nvSpPr>
+          <p:cNvPr id="3" name="Shape 1"/>
+          <p:cNvSpPr/>
+          <p:nvPr/>
+        </p:nvSpPr>
+        <p:spPr>
+          <a:xfrm>
+            <a:off x="320040" y="1065756"/>
+            <a:ext cx="4160520" cy="3749040"/>
+          </a:xfrm>
+          <a:prstGeom prst="roundRect">
+            <a:avLst>
+              <a:gd name="adj" fmla="val 3659"/>
+            </a:avLst>
+          </a:prstGeom>
+          <a:solidFill>
+            <a:srgbClr val="EBF5EB"/>
+          </a:solidFill>
+          <a:ln w="12700">
+            <a:solidFill>
+              <a:srgbClr val="97BC62"/>
+            </a:solidFill>
+            <a:prstDash val="solid"/>
+          </a:ln>
+        </p:spPr>
+      </p:sp>
+      <p:pic>
+        <p:nvPicPr>
+          <p:cNvPr id="4" name="Image 0" descr="preencoded.png"/>
+          <p:cNvPicPr>
+            <a:picLocks noChangeAspect="1"/>
+          </p:cNvPicPr>
+          <p:nvPr/>
+        </p:nvPicPr>
+        <p:blipFill>
+          <a:blip r:embed="rId3"/>
+          <a:stretch>
+            <a:fillRect/>
+          </a:stretch>
+        </p:blipFill>
+        <p:spPr>
+          <a:xfrm>
+            <a:off x="457200" y="1113355"/>
+            <a:ext cx="411480" cy="411480"/>
+          </a:xfrm>
+          <a:prstGeom prst="rect">
+            <a:avLst/>
+          </a:prstGeom>
+        </p:spPr>
+      </p:pic>
+      <p:sp>
+        <p:nvSpPr>
+          <p:cNvPr id="5" name="Text 2"/>
+          <p:cNvSpPr/>
+          <p:nvPr/>
+        </p:nvSpPr>
+        <p:spPr>
+          <a:xfrm>
+            <a:off x="960120" y="1113355"/>
+            <a:ext cx="3383280" cy="411480"/>
+          </a:xfrm>
+          <a:prstGeom prst="rect">
+            <a:avLst/>
+          </a:prstGeom>
+          <a:noFill/>
+          <a:ln/>
+        </p:spPr>
+        <p:txBody>
+          <a:bodyPr wrap="square" lIns="0" tIns="0" rIns="0" bIns="0" rtlCol="0" anchor="ctr"/>
+          <a:lstStyle/>
+          <a:p>
+            <a:pPr marL="0" indent="0">
+              <a:buNone/>
+            </a:pPr>
+            <a:r>
+              <a:rPr lang="en-US" sz="1400" b="1" dirty="0">
+                <a:solidFill>
+                  <a:srgbClr val="1A2E2A"/>
+                </a:solidFill>
+                <a:latin typeface="Calibri" pitchFamily="34" charset="0"/>
+                <a:ea typeface="Calibri" pitchFamily="34" charset="-122"/>
+                <a:cs typeface="Calibri" pitchFamily="34" charset="-120"/>
+              </a:rPr>
+              <a:t>Switch to EU-West Region</a:t>
+            </a:r>
+            <a:endParaRPr lang="en-US" sz="1400" dirty="0"/>
+          </a:p>
+        </p:txBody>
+      </p:sp>
+      <p:sp>
+        <p:nvSpPr>
+          <p:cNvPr id="6" name="Text 3"/>
+          <p:cNvSpPr/>
+          <p:nvPr/>
+        </p:nvSpPr>
+        <p:spPr>
+          <a:xfrm>
+            <a:off x="457200" y="1584960"/>
+            <a:ext cx="1005840" cy="256032"/>
+          </a:xfrm>
+          <a:prstGeom prst="rect">
+            <a:avLst/>
+          </a:prstGeom>
+          <a:noFill/>
+          <a:ln/>
+        </p:spPr>
+        <p:txBody>
+          <a:bodyPr wrap="square" lIns="0" tIns="0" rIns="0" bIns="0" rtlCol="0" anchor="ctr"/>
+          <a:lstStyle/>
+          <a:p>
+            <a:pPr marL="0" indent="0">
+              <a:buNone/>
+            </a:pPr>
+            <a:r>
+              <a:rPr lang="en-US" sz="1000" b="1" dirty="0">
+                <a:solidFill>
+                  <a:srgbClr val="B91C1C"/>
+                </a:solidFill>
+                <a:latin typeface="Calibri" pitchFamily="34" charset="0"/>
+                <a:ea typeface="Calibri" pitchFamily="34" charset="-122"/>
+                <a:cs typeface="Calibri" pitchFamily="34" charset="-120"/>
+              </a:rPr>
+              <a:t>Problem</a:t>
+            </a:r>
+            <a:endParaRPr lang="en-US" sz="1000" dirty="0"/>
+          </a:p>
+        </p:txBody>
+      </p:sp>
+      <p:sp>
+        <p:nvSpPr>
+          <p:cNvPr id="7" name="Text 4"/>
+          <p:cNvSpPr/>
+          <p:nvPr/>
+        </p:nvSpPr>
+        <p:spPr>
+          <a:xfrm>
+            <a:off x="457200" y="1840992"/>
+            <a:ext cx="3886200" cy="548640"/>
+          </a:xfrm>
+          <a:prstGeom prst="rect">
+            <a:avLst/>
+          </a:prstGeom>
+          <a:noFill/>
+          <a:ln/>
+        </p:spPr>
+        <p:txBody>
+          <a:bodyPr wrap="square" lIns="0" tIns="0" rIns="0" bIns="0" rtlCol="0" anchor="ctr"/>
+          <a:lstStyle/>
+          <a:p>
+            <a:pPr marL="0" indent="0">
+              <a:buNone/>
+            </a:pPr>
+            <a:r>
+              <a:rPr lang="en-US" sz="1000" dirty="0">
+                <a:solidFill>
+                  <a:srgbClr val="64748B"/>
+                </a:solidFill>
+                <a:latin typeface="Calibri" pitchFamily="34" charset="0"/>
+                <a:ea typeface="Calibri" pitchFamily="34" charset="-122"/>
+                <a:cs typeface="Calibri" pitchFamily="34" charset="-120"/>
+              </a:rPr>
+              <a:t>US-East grid: ~400 gCO₂/kWh</a:t>
+            </a:r>
+            <a:endParaRPr lang="en-US" sz="1000" dirty="0"/>
+          </a:p>
+          <a:p>
+            <a:pPr marL="0" indent="0">
+              <a:buNone/>
+            </a:pPr>
+            <a:r>
+              <a:rPr lang="en-US" sz="1000" dirty="0">
+                <a:solidFill>
+                  <a:srgbClr val="64748B"/>
+                </a:solidFill>
+                <a:latin typeface="Calibri" pitchFamily="34" charset="0"/>
+                <a:ea typeface="Calibri" pitchFamily="34" charset="-122"/>
+                <a:cs typeface="Calibri" pitchFamily="34" charset="-120"/>
+              </a:rPr>
+              <a:t>Added latency to EU sellers (~90 ms)</a:t>
+            </a:r>
+            <a:endParaRPr lang="en-US" sz="1000" dirty="0"/>
+          </a:p>
+        </p:txBody>
+      </p:sp>
+      <p:sp>
+        <p:nvSpPr>
+          <p:cNvPr id="8" name="Text 5"/>
+          <p:cNvSpPr/>
+          <p:nvPr/>
+        </p:nvSpPr>
+        <p:spPr>
+          <a:xfrm>
+            <a:off x="457200" y="2453640"/>
+            <a:ext cx="1005840" cy="256032"/>
+          </a:xfrm>
+          <a:prstGeom prst="rect">
+            <a:avLst/>
+          </a:prstGeom>
+          <a:noFill/>
+          <a:ln/>
+        </p:spPr>
+        <p:txBody>
+          <a:bodyPr wrap="square" lIns="0" tIns="0" rIns="0" bIns="0" rtlCol="0" anchor="ctr"/>
+          <a:lstStyle/>
+          <a:p>
+            <a:pPr marL="0" indent="0">
+              <a:buNone/>
+            </a:pPr>
+            <a:r>
+              <a:rPr lang="en-US" sz="1000" b="1" dirty="0">
+                <a:solidFill>
+                  <a:srgbClr val="2C5F2D"/>
+                </a:solidFill>
+                <a:latin typeface="Calibri" pitchFamily="34" charset="0"/>
+                <a:ea typeface="Calibri" pitchFamily="34" charset="-122"/>
+                <a:cs typeface="Calibri" pitchFamily="34" charset="-120"/>
+              </a:rPr>
+              <a:t>Change</a:t>
+            </a:r>
+            <a:endParaRPr lang="en-US" sz="1000" dirty="0"/>
+          </a:p>
+        </p:txBody>
+      </p:sp>
+      <p:sp>
+        <p:nvSpPr>
+          <p:cNvPr id="9" name="Text 6"/>
+          <p:cNvSpPr/>
+          <p:nvPr/>
+        </p:nvSpPr>
+        <p:spPr>
+          <a:xfrm>
+            <a:off x="457200" y="2709672"/>
+            <a:ext cx="3886200" cy="548640"/>
+          </a:xfrm>
+          <a:prstGeom prst="rect">
+            <a:avLst/>
+          </a:prstGeom>
+          <a:noFill/>
+          <a:ln/>
+        </p:spPr>
+        <p:txBody>
+          <a:bodyPr wrap="square" lIns="0" tIns="0" rIns="0" bIns="0" rtlCol="0" anchor="ctr"/>
+          <a:lstStyle/>
+          <a:p>
+            <a:pPr marL="0" indent="0">
+              <a:buNone/>
+            </a:pPr>
+            <a:r>
+              <a:rPr lang="en-US" sz="1000" dirty="0">
+                <a:solidFill>
+                  <a:srgbClr val="64748B"/>
+                </a:solidFill>
+                <a:latin typeface="Calibri" pitchFamily="34" charset="0"/>
+                <a:ea typeface="Calibri" pitchFamily="34" charset="-122"/>
+                <a:cs typeface="Calibri" pitchFamily="34" charset="-120"/>
+              </a:rPr>
+              <a:t>Route to EU-West (Ireland/Frankfurt)</a:t>
+            </a:r>
+            <a:endParaRPr lang="en-US" sz="1000" dirty="0"/>
+          </a:p>
+          <a:p>
+            <a:pPr marL="0" indent="0">
+              <a:buNone/>
+            </a:pPr>
+            <a:r>
+              <a:rPr lang="en-US" sz="1000" dirty="0">
+                <a:solidFill>
+                  <a:srgbClr val="64748B"/>
+                </a:solidFill>
+                <a:latin typeface="Calibri" pitchFamily="34" charset="0"/>
+                <a:ea typeface="Calibri" pitchFamily="34" charset="-122"/>
+                <a:cs typeface="Calibri" pitchFamily="34" charset="-120"/>
+              </a:rPr>
+              <a:t>Grid: ~180–220 gCO₂/kWh</a:t>
+            </a:r>
+            <a:endParaRPr lang="en-US" sz="1000" dirty="0"/>
+          </a:p>
+        </p:txBody>
+      </p:sp>
+      <p:sp>
+        <p:nvSpPr>
+          <p:cNvPr id="10" name="Text 7"/>
+          <p:cNvSpPr/>
+          <p:nvPr/>
+        </p:nvSpPr>
+        <p:spPr>
+          <a:xfrm>
+            <a:off x="457200" y="3322320"/>
+            <a:ext cx="1005840" cy="256032"/>
+          </a:xfrm>
+          <a:prstGeom prst="rect">
+            <a:avLst/>
+          </a:prstGeom>
+          <a:noFill/>
+          <a:ln/>
+        </p:spPr>
+        <p:txBody>
+          <a:bodyPr wrap="square" lIns="0" tIns="0" rIns="0" bIns="0" rtlCol="0" anchor="ctr"/>
+          <a:lstStyle/>
+          <a:p>
+            <a:pPr marL="0" indent="0">
+              <a:buNone/>
+            </a:pPr>
+            <a:r>
+              <a:rPr lang="en-US" sz="1000" b="1" dirty="0">
+                <a:solidFill>
+                  <a:srgbClr val="0D9488"/>
+                </a:solidFill>
+                <a:latin typeface="Calibri" pitchFamily="34" charset="0"/>
+                <a:ea typeface="Calibri" pitchFamily="34" charset="-122"/>
+                <a:cs typeface="Calibri" pitchFamily="34" charset="-120"/>
+              </a:rPr>
+              <a:t>Outcome</a:t>
+            </a:r>
+            <a:endParaRPr lang="en-US" sz="1000" dirty="0"/>
+          </a:p>
+        </p:txBody>
+      </p:sp>
+      <p:sp>
+        <p:nvSpPr>
+          <p:cNvPr id="11" name="Text 8"/>
+          <p:cNvSpPr/>
+          <p:nvPr/>
+        </p:nvSpPr>
+        <p:spPr>
+          <a:xfrm>
+            <a:off x="457200" y="3578352"/>
+            <a:ext cx="3886200" cy="548640"/>
+          </a:xfrm>
+          <a:prstGeom prst="rect">
+            <a:avLst/>
+          </a:prstGeom>
+          <a:noFill/>
+          <a:ln/>
+        </p:spPr>
+        <p:txBody>
+          <a:bodyPr wrap="square" lIns="0" tIns="0" rIns="0" bIns="0" rtlCol="0" anchor="ctr"/>
+          <a:lstStyle/>
+          <a:p>
+            <a:pPr marL="0" indent="0">
+              <a:buNone/>
+            </a:pPr>
+            <a:r>
+              <a:rPr lang="en-US" sz="1000" dirty="0">
+                <a:solidFill>
+                  <a:srgbClr val="64748B"/>
+                </a:solidFill>
+                <a:latin typeface="Calibri" pitchFamily="34" charset="0"/>
+                <a:ea typeface="Calibri" pitchFamily="34" charset="-122"/>
+                <a:cs typeface="Calibri" pitchFamily="34" charset="-120"/>
+              </a:rPr>
+              <a:t>~50% carbon reduction per call</a:t>
+            </a:r>
+            <a:endParaRPr lang="en-US" sz="1000" dirty="0"/>
+          </a:p>
+          <a:p>
+            <a:pPr marL="0" indent="0">
+              <a:buNone/>
+            </a:pPr>
+            <a:r>
+              <a:rPr lang="en-US" sz="1000" dirty="0">
+                <a:solidFill>
+                  <a:srgbClr val="64748B"/>
+                </a:solidFill>
+                <a:latin typeface="Calibri" pitchFamily="34" charset="0"/>
+                <a:ea typeface="Calibri" pitchFamily="34" charset="-122"/>
+                <a:cs typeface="Calibri" pitchFamily="34" charset="-120"/>
+              </a:rPr>
+              <a:t>Latency improvement for EU sellers</a:t>
+            </a:r>
+            <a:endParaRPr lang="en-US" sz="1000" dirty="0"/>
+          </a:p>
+        </p:txBody>
+      </p:sp>
+      <p:sp>
+        <p:nvSpPr>
+          <p:cNvPr id="12" name="Shape 9"/>
+          <p:cNvSpPr/>
+          <p:nvPr/>
+        </p:nvSpPr>
+        <p:spPr>
+          <a:xfrm>
+            <a:off x="457200" y="4328160"/>
+            <a:ext cx="2377440" cy="292608"/>
+          </a:xfrm>
+          <a:prstGeom prst="roundRect">
+            <a:avLst>
+              <a:gd name="adj" fmla="val 31250"/>
+            </a:avLst>
+          </a:prstGeom>
+          <a:solidFill>
+            <a:srgbClr val="2C5F2D"/>
+          </a:solidFill>
+          <a:ln w="12700">
+            <a:solidFill>
+              <a:srgbClr val="2C5F2D"/>
+            </a:solidFill>
+            <a:prstDash val="solid"/>
+          </a:ln>
+        </p:spPr>
+      </p:sp>
+      <p:sp>
+        <p:nvSpPr>
+          <p:cNvPr id="13" name="Text 10"/>
+          <p:cNvSpPr/>
+          <p:nvPr/>
+        </p:nvSpPr>
+        <p:spPr>
+          <a:xfrm>
+            <a:off x="457200" y="4333748"/>
+            <a:ext cx="2377440" cy="274320"/>
+          </a:xfrm>
+          <a:prstGeom prst="rect">
+            <a:avLst/>
+          </a:prstGeom>
+          <a:noFill/>
+          <a:ln/>
+        </p:spPr>
+        <p:txBody>
+          <a:bodyPr wrap="square" lIns="0" tIns="0" rIns="0" bIns="0" rtlCol="0" anchor="ctr"/>
+          <a:lstStyle/>
+          <a:p>
+            <a:pPr marL="0" indent="0" algn="ctr">
+              <a:buNone/>
+            </a:pPr>
+            <a:r>
+              <a:rPr lang="en-US" sz="1000" b="1" dirty="0">
+                <a:solidFill>
+                  <a:srgbClr val="FFFFFF"/>
+                </a:solidFill>
+                <a:latin typeface="Calibri" pitchFamily="34" charset="0"/>
+                <a:ea typeface="Calibri" pitchFamily="34" charset="-122"/>
+                <a:cs typeface="Calibri" pitchFamily="34" charset="-120"/>
+              </a:rPr>
+              <a:t>Pillar: Carbon</a:t>
+            </a:r>
+            <a:endParaRPr lang="en-US" sz="1000" dirty="0"/>
+          </a:p>
+        </p:txBody>
+      </p:sp>
+      <p:sp>
+        <p:nvSpPr>
+          <p:cNvPr id="14" name="Shape 11"/>
+          <p:cNvSpPr/>
+          <p:nvPr/>
+        </p:nvSpPr>
+        <p:spPr>
+          <a:xfrm>
+            <a:off x="4754880" y="1065756"/>
+            <a:ext cx="4160520" cy="3749040"/>
+          </a:xfrm>
+          <a:prstGeom prst="roundRect">
+            <a:avLst>
+              <a:gd name="adj" fmla="val 3659"/>
+            </a:avLst>
+          </a:prstGeom>
+          <a:solidFill>
+            <a:srgbClr val="EBF5EB"/>
+          </a:solidFill>
+          <a:ln w="12700">
+            <a:solidFill>
+              <a:srgbClr val="97BC62"/>
+            </a:solidFill>
+            <a:prstDash val="solid"/>
+          </a:ln>
+        </p:spPr>
+      </p:sp>
+      <p:pic>
+        <p:nvPicPr>
+          <p:cNvPr id="15" name="Image 1" descr="preencoded.png"/>
+          <p:cNvPicPr>
+            <a:picLocks noChangeAspect="1"/>
+          </p:cNvPicPr>
+          <p:nvPr/>
+        </p:nvPicPr>
+        <p:blipFill>
+          <a:blip r:embed="rId4"/>
+          <a:stretch>
+            <a:fillRect/>
+          </a:stretch>
+        </p:blipFill>
+        <p:spPr>
+          <a:xfrm>
+            <a:off x="4892040" y="1113355"/>
+            <a:ext cx="411480" cy="411480"/>
+          </a:xfrm>
+          <a:prstGeom prst="rect">
+            <a:avLst/>
+          </a:prstGeom>
+        </p:spPr>
+      </p:pic>
+      <p:sp>
+        <p:nvSpPr>
+          <p:cNvPr id="16" name="Text 12"/>
+          <p:cNvSpPr/>
+          <p:nvPr/>
+        </p:nvSpPr>
+        <p:spPr>
+          <a:xfrm>
+            <a:off x="5394960" y="1113355"/>
+            <a:ext cx="3383280" cy="411480"/>
+          </a:xfrm>
+          <a:prstGeom prst="rect">
+            <a:avLst/>
+          </a:prstGeom>
+          <a:noFill/>
+          <a:ln/>
+        </p:spPr>
+        <p:txBody>
+          <a:bodyPr wrap="square" lIns="0" tIns="0" rIns="0" bIns="0" rtlCol="0" anchor="ctr"/>
+          <a:lstStyle/>
+          <a:p>
+            <a:pPr marL="0" indent="0">
+              <a:buNone/>
+            </a:pPr>
+            <a:r>
+              <a:rPr lang="en-US" sz="1400" b="1" dirty="0">
+                <a:solidFill>
+                  <a:srgbClr val="1A2E2A"/>
+                </a:solidFill>
+                <a:latin typeface="Calibri" pitchFamily="34" charset="0"/>
+                <a:ea typeface="Calibri" pitchFamily="34" charset="-122"/>
+                <a:cs typeface="Calibri" pitchFamily="34" charset="-120"/>
+              </a:rPr>
+              <a:t>Off-Peak Batch Queue</a:t>
+            </a:r>
+            <a:endParaRPr lang="en-US" sz="1400" dirty="0"/>
+          </a:p>
+        </p:txBody>
+      </p:sp>
+      <p:sp>
+        <p:nvSpPr>
+          <p:cNvPr id="17" name="Text 13"/>
+          <p:cNvSpPr/>
+          <p:nvPr/>
+        </p:nvSpPr>
+        <p:spPr>
+          <a:xfrm>
+            <a:off x="4892040" y="1584960"/>
+            <a:ext cx="1005840" cy="256032"/>
+          </a:xfrm>
+          <a:prstGeom prst="rect">
+            <a:avLst/>
+          </a:prstGeom>
+          <a:noFill/>
+          <a:ln/>
+        </p:spPr>
+        <p:txBody>
+          <a:bodyPr wrap="square" lIns="0" tIns="0" rIns="0" bIns="0" rtlCol="0" anchor="ctr"/>
+          <a:lstStyle/>
+          <a:p>
+            <a:pPr marL="0" indent="0">
+              <a:buNone/>
+            </a:pPr>
+            <a:r>
+              <a:rPr lang="en-US" sz="1000" b="1" dirty="0">
+                <a:solidFill>
+                  <a:srgbClr val="B91C1C"/>
+                </a:solidFill>
+                <a:latin typeface="Calibri" pitchFamily="34" charset="0"/>
+                <a:ea typeface="Calibri" pitchFamily="34" charset="-122"/>
+                <a:cs typeface="Calibri" pitchFamily="34" charset="-120"/>
+              </a:rPr>
+              <a:t>Problem</a:t>
+            </a:r>
+            <a:endParaRPr lang="en-US" sz="1000" dirty="0"/>
+          </a:p>
+        </p:txBody>
+      </p:sp>
+      <p:sp>
+        <p:nvSpPr>
+          <p:cNvPr id="18" name="Text 14"/>
+          <p:cNvSpPr/>
+          <p:nvPr/>
+        </p:nvSpPr>
+        <p:spPr>
+          <a:xfrm>
+            <a:off x="4892040" y="1840992"/>
+            <a:ext cx="3886200" cy="548640"/>
+          </a:xfrm>
+          <a:prstGeom prst="rect">
+            <a:avLst/>
+          </a:prstGeom>
+          <a:noFill/>
+          <a:ln/>
+        </p:spPr>
+        <p:txBody>
+          <a:bodyPr wrap="square" lIns="0" tIns="0" rIns="0" bIns="0" rtlCol="0" anchor="ctr"/>
+          <a:lstStyle/>
+          <a:p>
+            <a:pPr marL="0" indent="0">
+              <a:buNone/>
+            </a:pPr>
+            <a:r>
+              <a:rPr lang="en-US" sz="1000" dirty="0">
+                <a:solidFill>
+                  <a:srgbClr val="64748B"/>
+                </a:solidFill>
+                <a:latin typeface="Calibri" pitchFamily="34" charset="0"/>
+                <a:ea typeface="Calibri" pitchFamily="34" charset="-122"/>
+                <a:cs typeface="Calibri" pitchFamily="34" charset="-120"/>
+              </a:rPr>
+              <a:t>Synchronous call even for non-urgent uploads (draft listings, scheduled items)</a:t>
+            </a:r>
+            <a:endParaRPr lang="en-US" sz="1000" dirty="0"/>
+          </a:p>
+        </p:txBody>
+      </p:sp>
+      <p:sp>
+        <p:nvSpPr>
+          <p:cNvPr id="19" name="Text 15"/>
+          <p:cNvSpPr/>
+          <p:nvPr/>
+        </p:nvSpPr>
+        <p:spPr>
+          <a:xfrm>
+            <a:off x="4892040" y="2453640"/>
+            <a:ext cx="1005840" cy="256032"/>
+          </a:xfrm>
+          <a:prstGeom prst="rect">
+            <a:avLst/>
+          </a:prstGeom>
+          <a:noFill/>
+          <a:ln/>
+        </p:spPr>
+        <p:txBody>
+          <a:bodyPr wrap="square" lIns="0" tIns="0" rIns="0" bIns="0" rtlCol="0" anchor="ctr"/>
+          <a:lstStyle/>
+          <a:p>
+            <a:pPr marL="0" indent="0">
+              <a:buNone/>
+            </a:pPr>
+            <a:r>
+              <a:rPr lang="en-US" sz="1000" b="1" dirty="0">
+                <a:solidFill>
+                  <a:srgbClr val="2C5F2D"/>
+                </a:solidFill>
+                <a:latin typeface="Calibri" pitchFamily="34" charset="0"/>
+                <a:ea typeface="Calibri" pitchFamily="34" charset="-122"/>
+                <a:cs typeface="Calibri" pitchFamily="34" charset="-120"/>
+              </a:rPr>
+              <a:t>Change</a:t>
+            </a:r>
+            <a:endParaRPr lang="en-US" sz="1000" dirty="0"/>
+          </a:p>
+        </p:txBody>
+      </p:sp>
+      <p:sp>
+        <p:nvSpPr>
+          <p:cNvPr id="20" name="Text 16"/>
+          <p:cNvSpPr/>
+          <p:nvPr/>
+        </p:nvSpPr>
+        <p:spPr>
+          <a:xfrm>
+            <a:off x="4892040" y="2709672"/>
+            <a:ext cx="3886200" cy="548640"/>
+          </a:xfrm>
+          <a:prstGeom prst="rect">
+            <a:avLst/>
+          </a:prstGeom>
+          <a:noFill/>
+          <a:ln/>
+        </p:spPr>
+        <p:txBody>
+          <a:bodyPr wrap="square" lIns="0" tIns="0" rIns="0" bIns="0" rtlCol="0" anchor="ctr"/>
+          <a:lstStyle/>
+          <a:p>
+            <a:pPr marL="0" indent="0">
+              <a:buNone/>
+            </a:pPr>
+            <a:r>
+              <a:rPr lang="en-US" sz="1000" dirty="0">
+                <a:solidFill>
+                  <a:srgbClr val="64748B"/>
+                </a:solidFill>
+                <a:latin typeface="Calibri" pitchFamily="34" charset="0"/>
+                <a:ea typeface="Calibri" pitchFamily="34" charset="-122"/>
+                <a:cs typeface="Calibri" pitchFamily="34" charset="-120"/>
+              </a:rPr>
+              <a:t>Identify non-time-critical uploads → defer to batch window (2–6 am local)</a:t>
+            </a:r>
+            <a:endParaRPr lang="en-US" sz="1000" dirty="0"/>
+          </a:p>
+          <a:p>
+            <a:pPr marL="0" indent="0">
+              <a:buNone/>
+            </a:pPr>
+            <a:r>
+              <a:rPr lang="en-US" sz="1000" dirty="0">
+                <a:solidFill>
+                  <a:srgbClr val="64748B"/>
+                </a:solidFill>
+                <a:latin typeface="Calibri" pitchFamily="34" charset="0"/>
+                <a:ea typeface="Calibri" pitchFamily="34" charset="-122"/>
+                <a:cs typeface="Calibri" pitchFamily="34" charset="-120"/>
+              </a:rPr>
+              <a:t>Group into 50-image batches</a:t>
+            </a:r>
+            <a:endParaRPr lang="en-US" sz="1000" dirty="0"/>
+          </a:p>
+        </p:txBody>
+      </p:sp>
+      <p:sp>
+        <p:nvSpPr>
+          <p:cNvPr id="21" name="Text 17"/>
+          <p:cNvSpPr/>
+          <p:nvPr/>
+        </p:nvSpPr>
+        <p:spPr>
+          <a:xfrm>
+            <a:off x="4892040" y="3322320"/>
+            <a:ext cx="1005840" cy="256032"/>
+          </a:xfrm>
+          <a:prstGeom prst="rect">
+            <a:avLst/>
+          </a:prstGeom>
+          <a:noFill/>
+          <a:ln/>
+        </p:spPr>
+        <p:txBody>
+          <a:bodyPr wrap="square" lIns="0" tIns="0" rIns="0" bIns="0" rtlCol="0" anchor="ctr"/>
+          <a:lstStyle/>
+          <a:p>
+            <a:pPr marL="0" indent="0">
+              <a:buNone/>
+            </a:pPr>
+            <a:r>
+              <a:rPr lang="en-US" sz="1000" b="1" dirty="0">
+                <a:solidFill>
+                  <a:srgbClr val="0D9488"/>
+                </a:solidFill>
+                <a:latin typeface="Calibri" pitchFamily="34" charset="0"/>
+                <a:ea typeface="Calibri" pitchFamily="34" charset="-122"/>
+                <a:cs typeface="Calibri" pitchFamily="34" charset="-120"/>
+              </a:rPr>
+              <a:t>Outcome</a:t>
+            </a:r>
+            <a:endParaRPr lang="en-US" sz="1000" dirty="0"/>
+          </a:p>
+        </p:txBody>
+      </p:sp>
+      <p:sp>
+        <p:nvSpPr>
+          <p:cNvPr id="22" name="Text 18"/>
+          <p:cNvSpPr/>
+          <p:nvPr/>
+        </p:nvSpPr>
+        <p:spPr>
+          <a:xfrm>
+            <a:off x="4892040" y="3578352"/>
+            <a:ext cx="3886200" cy="548640"/>
+          </a:xfrm>
+          <a:prstGeom prst="rect">
+            <a:avLst/>
+          </a:prstGeom>
+          <a:noFill/>
+          <a:ln/>
+        </p:spPr>
+        <p:txBody>
+          <a:bodyPr wrap="square" lIns="0" tIns="0" rIns="0" bIns="0" rtlCol="0" anchor="ctr"/>
+          <a:lstStyle/>
+          <a:p>
+            <a:pPr marL="0" indent="0">
+              <a:buNone/>
+            </a:pPr>
+            <a:r>
+              <a:rPr lang="en-US" sz="1000" dirty="0">
+                <a:solidFill>
+                  <a:srgbClr val="64748B"/>
+                </a:solidFill>
+                <a:latin typeface="Calibri" pitchFamily="34" charset="0"/>
+                <a:ea typeface="Calibri" pitchFamily="34" charset="-122"/>
+                <a:cs typeface="Calibri" pitchFamily="34" charset="-120"/>
+              </a:rPr>
+              <a:t>Better HW utilisation at provider side</a:t>
+            </a:r>
+            <a:endParaRPr lang="en-US" sz="1000" dirty="0"/>
+          </a:p>
+          <a:p>
+            <a:pPr marL="0" indent="0">
+              <a:buNone/>
+            </a:pPr>
+            <a:r>
+              <a:rPr lang="en-US" sz="1000" dirty="0">
+                <a:solidFill>
+                  <a:srgbClr val="64748B"/>
+                </a:solidFill>
+                <a:latin typeface="Calibri" pitchFamily="34" charset="0"/>
+                <a:ea typeface="Calibri" pitchFamily="34" charset="-122"/>
+                <a:cs typeface="Calibri" pitchFamily="34" charset="-120"/>
+              </a:rPr>
+              <a:t>Potential batch pricing discount (30%+ on some providers)</a:t>
+            </a:r>
+            <a:endParaRPr lang="en-US" sz="1000" dirty="0"/>
+          </a:p>
+        </p:txBody>
+      </p:sp>
+      <p:sp>
+        <p:nvSpPr>
+          <p:cNvPr id="23" name="Shape 19"/>
+          <p:cNvSpPr/>
+          <p:nvPr/>
+        </p:nvSpPr>
+        <p:spPr>
+          <a:xfrm>
+            <a:off x="4892040" y="4251960"/>
+            <a:ext cx="2377440" cy="292608"/>
+          </a:xfrm>
+          <a:prstGeom prst="roundRect">
+            <a:avLst>
+              <a:gd name="adj" fmla="val 31250"/>
+            </a:avLst>
+          </a:prstGeom>
+          <a:solidFill>
+            <a:srgbClr val="2C5F2D"/>
+          </a:solidFill>
+          <a:ln w="12700">
+            <a:solidFill>
+              <a:srgbClr val="2C5F2D"/>
+            </a:solidFill>
+            <a:prstDash val="solid"/>
+          </a:ln>
+        </p:spPr>
+      </p:sp>
+      <p:sp>
+        <p:nvSpPr>
+          <p:cNvPr id="24" name="Text 20"/>
+          <p:cNvSpPr/>
+          <p:nvPr/>
+        </p:nvSpPr>
+        <p:spPr>
+          <a:xfrm>
+            <a:off x="4892040" y="4276598"/>
+            <a:ext cx="2377440" cy="274320"/>
+          </a:xfrm>
+          <a:prstGeom prst="rect">
+            <a:avLst/>
+          </a:prstGeom>
+          <a:noFill/>
+          <a:ln/>
+        </p:spPr>
+        <p:txBody>
+          <a:bodyPr wrap="square" lIns="0" tIns="0" rIns="0" bIns="0" rtlCol="0" anchor="ctr"/>
+          <a:lstStyle/>
+          <a:p>
+            <a:pPr marL="0" indent="0" algn="ctr">
+              <a:buNone/>
+            </a:pPr>
+            <a:r>
+              <a:rPr lang="en-US" sz="1000" b="1" dirty="0">
+                <a:solidFill>
+                  <a:srgbClr val="FFFFFF"/>
+                </a:solidFill>
+                <a:latin typeface="Calibri" pitchFamily="34" charset="0"/>
+                <a:ea typeface="Calibri" pitchFamily="34" charset="-122"/>
+                <a:cs typeface="Calibri" pitchFamily="34" charset="-120"/>
+              </a:rPr>
+              <a:t>Pillar: Energy · Hardware</a:t>
+            </a:r>
+            <a:endParaRPr lang="en-US" sz="1000" dirty="0"/>
+          </a:p>
+        </p:txBody>
+      </p:sp>
+    </p:spTree>
+  </p:cSld>
+  <p:clrMapOvr>
+    <a:masterClrMapping/>
+  </p:clrMapOvr>
+</p:sld>
+</file>
+
+<file path=ppt/slides/slide11.xml><?xml version="1.0" encoding="utf-8"?>
+<p:sld xmlns:a="http://schemas.openxmlformats.org/drawingml/2006/main" xmlns:r="http://schemas.openxmlformats.org/officeDocument/2006/relationships" xmlns:p="http://schemas.openxmlformats.org/presentationml/2006/main">
   <p:cSld name="Slide 10">
     <p:bg>
       <p:bgPr>
@@ -3542,7 +4480,7 @@
 </p:sld>
 </file>
 
-<file path=ppt/slides/slide11.xml><?xml version="1.0" encoding="utf-8"?>
+<file path=ppt/slides/slide12.xml><?xml version="1.0" encoding="utf-8"?>
 <p:sld xmlns:a="http://schemas.openxmlformats.org/drawingml/2006/main" xmlns:r="http://schemas.openxmlformats.org/officeDocument/2006/relationships" xmlns:p="http://schemas.openxmlformats.org/presentationml/2006/main">
   <p:cSld name="Slide 11">
     <p:bg>
@@ -4434,7 +5372,7 @@
 </p:sld>
 </file>
 
-<file path=ppt/slides/slide12.xml><?xml version="1.0" encoding="utf-8"?>
+<file path=ppt/slides/slide13.xml><?xml version="1.0" encoding="utf-8"?>
 <p:sld xmlns:a="http://schemas.openxmlformats.org/drawingml/2006/main" xmlns:r="http://schemas.openxmlformats.org/officeDocument/2006/relationships" xmlns:p="http://schemas.openxmlformats.org/presentationml/2006/main">
   <p:cSld name="Slide 12">
     <p:bg>
@@ -5061,7 +5999,7 @@
 </p:sld>
 </file>
 
-<file path=ppt/slides/slide13.xml><?xml version="1.0" encoding="utf-8"?>
+<file path=ppt/slides/slide14.xml><?xml version="1.0" encoding="utf-8"?>
 <p:sld xmlns:a="http://schemas.openxmlformats.org/drawingml/2006/main" xmlns:r="http://schemas.openxmlformats.org/officeDocument/2006/relationships" xmlns:p="http://schemas.openxmlformats.org/presentationml/2006/main">
   <p:cSld name="Slide 13">
     <p:bg>
@@ -8259,6 +9197,408 @@
 
 <file path=ppt/slides/slide4.xml><?xml version="1.0" encoding="utf-8"?>
 <p:sld xmlns:a="http://schemas.openxmlformats.org/drawingml/2006/main" xmlns:r="http://schemas.openxmlformats.org/officeDocument/2006/relationships" xmlns:p="http://schemas.openxmlformats.org/presentationml/2006/main">
+  <p:cSld name="Slide — Why Believe This">
+    <p:bg>
+      <p:bgPr>
+        <a:solidFill>
+          <a:srgbClr val="1C2B1E"/>
+        </a:solidFill>
+        <a:effectLst/>
+      </p:bgPr>
+    </p:bg>
+    <p:spTree>
+      <p:nvGrpSpPr>
+        <p:cNvPr id="1" name=""/>
+        <p:cNvGrpSpPr/>
+        <p:nvPr/>
+      </p:nvGrpSpPr>
+      <p:grpSpPr>
+        <a:xfrm>
+          <a:off x="0" y="0"/>
+          <a:ext cx="0" cy="0"/>
+          <a:chOff x="0" y="0"/>
+          <a:chExt cx="0" cy="0"/>
+        </a:xfrm>
+      </p:grpSpPr>
+      <p:sp>
+        <p:nvSpPr>
+          <p:cNvPr id="2" name="Title"/>
+          <p:cNvSpPr/>
+          <p:nvPr/>
+        </p:nvSpPr>
+        <p:spPr>
+          <a:xfrm>
+            <a:off x="457200" y="320040"/>
+            <a:ext cx="8229600" cy="685800"/>
+          </a:xfrm>
+          <a:prstGeom prst="rect">
+            <a:avLst/>
+          </a:prstGeom>
+          <a:noFill/>
+          <a:ln/>
+        </p:spPr>
+        <p:txBody>
+          <a:bodyPr wrap="square" lIns="0" tIns="0" rIns="0" bIns="0" rtlCol="0" anchor="ctr"/>
+          <a:lstStyle/>
+          <a:p>
+            <a:pPr marL="0" indent="0">
+              <a:buNone/>
+            </a:pPr>
+            <a:r>
+              <a:rPr lang="en-US" sz="3600" b="1" dirty="0">
+                <a:solidFill>
+                  <a:srgbClr val="FFFFFF"/>
+                </a:solidFill>
+                <a:latin typeface="Calibri" pitchFamily="34" charset="0"/>
+              </a:rPr>
+              <a:t>“Why should we believe this?”</a:t>
+            </a:r>
+          </a:p>
+        </p:txBody>
+      </p:sp>
+      <p:sp>
+        <p:nvSpPr>
+          <p:cNvPr id="3" name="Subtitle"/>
+          <p:cNvSpPr/>
+          <p:nvPr/>
+        </p:nvSpPr>
+        <p:spPr>
+          <a:xfrm>
+            <a:off x="457200" y="1050000"/>
+            <a:ext cx="8229600" cy="320040"/>
+          </a:xfrm>
+          <a:prstGeom prst="rect">
+            <a:avLst/>
+          </a:prstGeom>
+          <a:noFill/>
+          <a:ln/>
+        </p:spPr>
+        <p:txBody>
+          <a:bodyPr wrap="square" lIns="0" tIns="0" rIns="0" bIns="0" rtlCol="0" anchor="ctr"/>
+          <a:lstStyle/>
+          <a:p>
+            <a:pPr marL="0" indent="0">
+              <a:buNone/>
+            </a:pPr>
+            <a:r>
+              <a:rPr lang="en-US" sz="1600" i="1" dirty="0">
+                <a:solidFill>
+                  <a:srgbClr val="86EFAC"/>
+                </a:solidFill>
+                <a:latin typeface="Calibri" pitchFamily="34" charset="0"/>
+              </a:rPr>
+              <a:t>A fair challenge. Here is what we know, what we estimated, and how we will verify it.</a:t>
+            </a:r>
+          </a:p>
+        </p:txBody>
+      </p:sp>
+      <p:sp>
+        <p:nvSpPr>
+          <p:cNvPr id="4" name="Card1"/>
+          <p:cNvSpPr/>
+          <p:nvPr/>
+        </p:nvSpPr>
+        <p:spPr>
+          <a:xfrm>
+            <a:off x="457200" y="1500000"/>
+            <a:ext cx="2590800" cy="1280160"/>
+          </a:xfrm>
+          <a:prstGeom prst="rect">
+            <a:avLst/>
+          </a:prstGeom>
+          <a:solidFill>
+            <a:srgbClr val="14532D"/>
+          </a:solidFill>
+          <a:ln w="12700">
+            <a:solidFill>
+              <a:srgbClr val="22C55E"/>
+            </a:solidFill>
+          </a:ln>
+        </p:spPr>
+        <p:txBody>
+          <a:bodyPr wrap="square" lIns="91440" tIns="91440" rIns="91440" bIns="91440" rtlCol="0" anchor="t"/>
+          <a:lstStyle/>
+          <a:p>
+            <a:pPr marL="0" indent="0">
+              <a:buNone/>
+            </a:pPr>
+            <a:r>
+              <a:rPr lang="en-US" sz="1300" b="1" dirty="0">
+                <a:solidFill>
+                  <a:srgbClr val="22C55E"/>
+                </a:solidFill>
+                <a:latin typeface="Calibri" pitchFamily="34" charset="0"/>
+              </a:rPr>
+              <a:t>✅ Verifiable today</a:t>
+            </a:r>
+          </a:p>
+          <a:p>
+            <a:pPr marL="0" indent="0">
+              <a:buNone/>
+            </a:pPr>
+            <a:r>
+              <a:rPr lang="en-US" sz="1200" dirty="0">
+                <a:solidFill>
+                  <a:srgbClr val="DCFCE7"/>
+                </a:solidFill>
+                <a:latin typeface="Calibri" pitchFamily="34" charset="0"/>
+              </a:rPr>
+              <a:t>US-East routing</a:t>
+            </a:r>
+          </a:p>
+          <a:p>
+            <a:pPr marL="0" indent="0">
+              <a:buNone/>
+            </a:pPr>
+            <a:r>
+              <a:rPr lang="en-US" sz="1100" dirty="0">
+                <a:solidFill>
+                  <a:srgbClr val="86EFAC"/>
+                </a:solidFill>
+                <a:latin typeface="Calibri" pitchFamily="34" charset="0"/>
+              </a:rPr>
+              <a:t>Confirm from API provider dashboard or network trace in &lt;1 hour.</a:t>
+            </a:r>
+          </a:p>
+        </p:txBody>
+      </p:sp>
+      <p:sp>
+        <p:nvSpPr>
+          <p:cNvPr id="5" name="Card2"/>
+          <p:cNvSpPr/>
+          <p:nvPr/>
+        </p:nvSpPr>
+        <p:spPr>
+          <a:xfrm>
+            <a:off x="3200400" y="1500000"/>
+            <a:ext cx="2590800" cy="1280160"/>
+          </a:xfrm>
+          <a:prstGeom prst="rect">
+            <a:avLst/>
+          </a:prstGeom>
+          <a:solidFill>
+            <a:srgbClr val="1C3A5E"/>
+          </a:solidFill>
+          <a:ln w="12700">
+            <a:solidFill>
+              <a:srgbClr val="60A5FA"/>
+            </a:solidFill>
+          </a:ln>
+        </p:spPr>
+        <p:txBody>
+          <a:bodyPr wrap="square" lIns="91440" tIns="91440" rIns="91440" bIns="91440" rtlCol="0" anchor="t"/>
+          <a:lstStyle/>
+          <a:p>
+            <a:pPr marL="0" indent="0">
+              <a:buNone/>
+            </a:pPr>
+            <a:r>
+              <a:rPr lang="en-US" sz="1300" b="1" dirty="0">
+                <a:solidFill>
+                  <a:srgbClr val="60A5FA"/>
+                </a:solidFill>
+                <a:latin typeface="Calibri" pitchFamily="34" charset="0"/>
+              </a:rPr>
+              <a:t>📊 Industry benchmark</a:t>
+            </a:r>
+          </a:p>
+          <a:p>
+            <a:pPr marL="0" indent="0">
+              <a:buNone/>
+            </a:pPr>
+            <a:r>
+              <a:rPr lang="en-US" sz="1200" dirty="0">
+                <a:solidFill>
+                  <a:srgbClr val="DBEAFE"/>
+                </a:solidFill>
+                <a:latin typeface="Calibri" pitchFamily="34" charset="0"/>
+              </a:rPr>
+              <a:t>15–20% duplicate images</a:t>
+            </a:r>
+          </a:p>
+          <a:p>
+            <a:pPr marL="0" indent="0">
+              <a:buNone/>
+            </a:pPr>
+            <a:r>
+              <a:rPr lang="en-US" sz="1100" dirty="0">
+                <a:solidFill>
+                  <a:srgbClr val="93C5FD"/>
+                </a:solidFill>
+                <a:latin typeface="Calibri" pitchFamily="34" charset="0"/>
+              </a:rPr>
+              <a:t>Common in e-commerce re-listing. Unconfirmed for ClearCart — Week 1 pHash run will tell us.</a:t>
+            </a:r>
+          </a:p>
+        </p:txBody>
+      </p:sp>
+      <p:sp>
+        <p:nvSpPr>
+          <p:cNvPr id="6" name="Card3"/>
+          <p:cNvSpPr/>
+          <p:nvPr/>
+        </p:nvSpPr>
+        <p:spPr>
+          <a:xfrm>
+            <a:off x="5943600" y="1500000"/>
+            <a:ext cx="2743200" cy="1280160"/>
+          </a:xfrm>
+          <a:prstGeom prst="rect">
+            <a:avLst/>
+          </a:prstGeom>
+          <a:solidFill>
+            <a:srgbClr val="3B1F00"/>
+          </a:solidFill>
+          <a:ln w="12700">
+            <a:solidFill>
+              <a:srgbClr val="F59E0B"/>
+            </a:solidFill>
+          </a:ln>
+        </p:spPr>
+        <p:txBody>
+          <a:bodyPr wrap="square" lIns="91440" tIns="91440" rIns="91440" bIns="91440" rtlCol="0" anchor="t"/>
+          <a:lstStyle/>
+          <a:p>
+            <a:pPr marL="0" indent="0">
+              <a:buNone/>
+            </a:pPr>
+            <a:r>
+              <a:rPr lang="en-US" sz="1300" b="1" dirty="0">
+                <a:solidFill>
+                  <a:srgbClr val="F59E0B"/>
+                </a:solidFill>
+                <a:latin typeface="Calibri" pitchFamily="34" charset="0"/>
+              </a:rPr>
+              <a:t>⚠ Assumed, needs export</a:t>
+            </a:r>
+          </a:p>
+          <a:p>
+            <a:pPr marL="0" indent="0">
+              <a:buNone/>
+            </a:pPr>
+            <a:r>
+              <a:rPr lang="en-US" sz="1200" dirty="0">
+                <a:solidFill>
+                  <a:srgbClr val="FEF3C7"/>
+                </a:solidFill>
+                <a:latin typeface="Calibri" pitchFamily="34" charset="0"/>
+              </a:rPr>
+              <a:t>Model ID and API cost per call</a:t>
+            </a:r>
+          </a:p>
+          <a:p>
+            <a:pPr marL="0" indent="0">
+              <a:buNone/>
+            </a:pPr>
+            <a:r>
+              <a:rPr lang="en-US" sz="1100" dirty="0">
+                <a:solidFill>
+                  <a:srgbClr val="FCD34D"/>
+                </a:solidFill>
+                <a:latin typeface="Calibri" pitchFamily="34" charset="0"/>
+              </a:rPr>
+              <a:t>GPT-4o-class assumed. Actual cost requires API billing export — first action in Week 1.</a:t>
+            </a:r>
+          </a:p>
+        </p:txBody>
+      </p:sp>
+      <p:sp>
+        <p:nvSpPr>
+          <p:cNvPr id="7" name="Commitment"/>
+          <p:cNvSpPr/>
+          <p:nvPr/>
+        </p:nvSpPr>
+        <p:spPr>
+          <a:xfrm>
+            <a:off x="457200" y="2960000"/>
+            <a:ext cx="8229600" cy="820000"/>
+          </a:xfrm>
+          <a:prstGeom prst="rect">
+            <a:avLst/>
+          </a:prstGeom>
+          <a:solidFill>
+            <a:srgbClr val="14532D"/>
+          </a:solidFill>
+          <a:ln w="12700">
+            <a:solidFill>
+              <a:srgbClr val="22C55E"/>
+            </a:solidFill>
+          </a:ln>
+        </p:spPr>
+        <p:txBody>
+          <a:bodyPr wrap="square" lIns="114300" tIns="91440" rIns="114300" bIns="91440" rtlCol="0" anchor="ctr"/>
+          <a:lstStyle/>
+          <a:p>
+            <a:pPr marL="0" indent="0">
+              <a:buNone/>
+            </a:pPr>
+            <a:r>
+              <a:rPr lang="en-US" sz="1400" b="1" dirty="0">
+                <a:solidFill>
+                  <a:srgbClr val="22C55E"/>
+                </a:solidFill>
+                <a:latin typeface="Calibri" pitchFamily="34" charset="0"/>
+              </a:rPr>
+              <a:t>Our commitment: </a:t>
+            </a:r>
+            <a:r>
+              <a:rPr lang="en-US" sz="1400" dirty="0">
+                <a:solidFill>
+                  <a:srgbClr val="DCFCE7"/>
+                </a:solidFill>
+                <a:latin typeface="Calibri" pitchFamily="34" charset="0"/>
+              </a:rPr>
+              <a:t>No recommendation goes live until Week 1 data either confirms or revises the assumption behind it. Every figure here is falsifiable.</a:t>
+            </a:r>
+          </a:p>
+        </p:txBody>
+      </p:sp>
+      <p:sp>
+        <p:nvSpPr>
+          <p:cNvPr id="8" name="NextStep"/>
+          <p:cNvSpPr/>
+          <p:nvPr/>
+        </p:nvSpPr>
+        <p:spPr>
+          <a:xfrm>
+            <a:off x="457200" y="3890000"/>
+            <a:ext cx="8229600" cy="280000"/>
+          </a:xfrm>
+          <a:prstGeom prst="rect">
+            <a:avLst/>
+          </a:prstGeom>
+          <a:noFill/>
+          <a:ln/>
+        </p:spPr>
+        <p:txBody>
+          <a:bodyPr wrap="square" lIns="0" tIns="0" rIns="0" bIns="0" rtlCol="0" anchor="ctr"/>
+          <a:lstStyle/>
+          <a:p>
+            <a:pPr marL="0" indent="0" algn="ctr">
+              <a:buNone/>
+            </a:pPr>
+            <a:r>
+              <a:rPr lang="en-US" sz="1200" i="1" dirty="0">
+                <a:solidFill>
+                  <a:srgbClr val="6B7280"/>
+                </a:solidFill>
+                <a:latin typeface="Calibri" pitchFamily="34" charset="0"/>
+              </a:rPr>
+              <a:t>Next slide: Assessment — where the compute concentrates and why each problem matters.</a:t>
+            </a:r>
+          </a:p>
+        </p:txBody>
+      </p:sp>
+    </p:spTree>
+  </p:cSld>
+  <p:clrMapOvr>
+    <a:masterClrMapping/>
+  </p:clrMapOvr>
+</p:sld>
+</file>
+
+<file path=ppt/slides/slide5.xml><?xml version="1.0" encoding="utf-8"?>
+<p:sld xmlns:a="http://schemas.openxmlformats.org/drawingml/2006/main" xmlns:r="http://schemas.openxmlformats.org/officeDocument/2006/relationships" xmlns:p="http://schemas.openxmlformats.org/presentationml/2006/main">
   <p:cSld name="Slide 4">
     <p:bg>
       <p:bgPr>
@@ -8329,7 +9669,7 @@
         </p:nvSpPr>
         <p:spPr>
           <a:xfrm>
-            <a:off x="320040" y="914400"/>
+            <a:off x="320040" y="1016000"/>
             <a:ext cx="4206240" cy="1828800"/>
           </a:xfrm>
           <a:prstGeom prst="roundRect">
@@ -8364,7 +9704,7 @@
         </p:blipFill>
         <p:spPr>
           <a:xfrm>
-            <a:off x="457200" y="1051560"/>
+            <a:off x="457200" y="1153160"/>
             <a:ext cx="384048" cy="384048"/>
           </a:xfrm>
           <a:prstGeom prst="rect">
@@ -8380,7 +9720,7 @@
         </p:nvSpPr>
         <p:spPr>
           <a:xfrm>
-            <a:off x="914400" y="1005840"/>
+            <a:off x="914400" y="1107440"/>
             <a:ext cx="3474720" cy="411480"/>
           </a:xfrm>
           <a:prstGeom prst="rect">
@@ -8419,7 +9759,7 @@
         </p:nvSpPr>
         <p:spPr>
           <a:xfrm>
-            <a:off x="411480" y="1463040"/>
+            <a:off x="411480" y="1564640"/>
             <a:ext cx="3977640" cy="868680"/>
           </a:xfrm>
           <a:prstGeom prst="rect">
@@ -8475,7 +9815,7 @@
         </p:nvSpPr>
         <p:spPr>
           <a:xfrm>
-            <a:off x="411480" y="2377440"/>
+            <a:off x="411480" y="2479040"/>
             <a:ext cx="2377440" cy="292608"/>
           </a:xfrm>
           <a:prstGeom prst="roundRect">
@@ -8502,7 +9842,7 @@
         </p:nvSpPr>
         <p:spPr>
           <a:xfrm>
-            <a:off x="411480" y="2395728"/>
+            <a:off x="411480" y="2497328"/>
             <a:ext cx="2377440" cy="274320"/>
           </a:xfrm>
           <a:prstGeom prst="rect">
@@ -8541,7 +9881,7 @@
         </p:nvSpPr>
         <p:spPr>
           <a:xfrm>
-            <a:off x="4754880" y="914400"/>
+            <a:off x="4754880" y="1016000"/>
             <a:ext cx="4206240" cy="1828800"/>
           </a:xfrm>
           <a:prstGeom prst="roundRect">
@@ -8576,7 +9916,7 @@
         </p:blipFill>
         <p:spPr>
           <a:xfrm>
-            <a:off x="4892040" y="1051560"/>
+            <a:off x="4892040" y="1153160"/>
             <a:ext cx="384048" cy="384048"/>
           </a:xfrm>
           <a:prstGeom prst="rect">
@@ -8592,7 +9932,7 @@
         </p:nvSpPr>
         <p:spPr>
           <a:xfrm>
-            <a:off x="5349240" y="1005840"/>
+            <a:off x="5349240" y="1107440"/>
             <a:ext cx="3474720" cy="411480"/>
           </a:xfrm>
           <a:prstGeom prst="rect">
@@ -8631,7 +9971,7 @@
         </p:nvSpPr>
         <p:spPr>
           <a:xfrm>
-            <a:off x="4846320" y="1463040"/>
+            <a:off x="4846320" y="1564640"/>
             <a:ext cx="3977640" cy="868680"/>
           </a:xfrm>
           <a:prstGeom prst="rect">
@@ -8687,7 +10027,7 @@
         </p:nvSpPr>
         <p:spPr>
           <a:xfrm>
-            <a:off x="4846320" y="2377440"/>
+            <a:off x="4846320" y="2479040"/>
             <a:ext cx="2377440" cy="292608"/>
           </a:xfrm>
           <a:prstGeom prst="roundRect">
@@ -8753,7 +10093,7 @@
         </p:nvSpPr>
         <p:spPr>
           <a:xfrm>
-            <a:off x="320040" y="2880360"/>
+            <a:off x="320040" y="2981960"/>
             <a:ext cx="4206240" cy="1828800"/>
           </a:xfrm>
           <a:prstGeom prst="roundRect">
@@ -8788,7 +10128,7 @@
         </p:blipFill>
         <p:spPr>
           <a:xfrm>
-            <a:off x="457200" y="3017520"/>
+            <a:off x="457200" y="3119120"/>
             <a:ext cx="384048" cy="384048"/>
           </a:xfrm>
           <a:prstGeom prst="rect">
@@ -8804,7 +10144,7 @@
         </p:nvSpPr>
         <p:spPr>
           <a:xfrm>
-            <a:off x="914400" y="2971800"/>
+            <a:off x="914400" y="3073400"/>
             <a:ext cx="3474720" cy="411480"/>
           </a:xfrm>
           <a:prstGeom prst="rect">
@@ -8843,7 +10183,7 @@
         </p:nvSpPr>
         <p:spPr>
           <a:xfrm>
-            <a:off x="411480" y="3429000"/>
+            <a:off x="411480" y="3530600"/>
             <a:ext cx="3977640" cy="868680"/>
           </a:xfrm>
           <a:prstGeom prst="rect">
@@ -8899,7 +10239,7 @@
         </p:nvSpPr>
         <p:spPr>
           <a:xfrm>
-            <a:off x="411480" y="4343400"/>
+            <a:off x="411480" y="4445000"/>
             <a:ext cx="2377440" cy="292608"/>
           </a:xfrm>
           <a:prstGeom prst="roundRect">
@@ -8965,7 +10305,7 @@
         </p:nvSpPr>
         <p:spPr>
           <a:xfrm>
-            <a:off x="4754880" y="2880360"/>
+            <a:off x="4754880" y="2981960"/>
             <a:ext cx="4206240" cy="1828800"/>
           </a:xfrm>
           <a:prstGeom prst="roundRect">
@@ -9000,7 +10340,7 @@
         </p:blipFill>
         <p:spPr>
           <a:xfrm>
-            <a:off x="4892040" y="3017520"/>
+            <a:off x="4892040" y="3119120"/>
             <a:ext cx="384048" cy="384048"/>
           </a:xfrm>
           <a:prstGeom prst="rect">
@@ -9016,7 +10356,7 @@
         </p:nvSpPr>
         <p:spPr>
           <a:xfrm>
-            <a:off x="5349240" y="2971800"/>
+            <a:off x="5349240" y="3073400"/>
             <a:ext cx="3474720" cy="411480"/>
           </a:xfrm>
           <a:prstGeom prst="rect">
@@ -9055,7 +10395,7 @@
         </p:nvSpPr>
         <p:spPr>
           <a:xfrm>
-            <a:off x="4846320" y="3429000"/>
+            <a:off x="4846320" y="3530600"/>
             <a:ext cx="3977640" cy="868680"/>
           </a:xfrm>
           <a:prstGeom prst="rect">
@@ -9138,7 +10478,7 @@
         </p:nvSpPr>
         <p:spPr>
           <a:xfrm>
-            <a:off x="4846320" y="4361688"/>
+            <a:off x="4846320" y="4463288"/>
             <a:ext cx="2377440" cy="274320"/>
           </a:xfrm>
           <a:prstGeom prst="rect">
@@ -9166,45 +10506,6 @@
               <a:t>Pillar: Energy · Hardware</a:t>
             </a:r>
             <a:endParaRPr lang="en-US" sz="1000" dirty="0"/>
-          </a:p>
-        </p:txBody>
-      </p:sp>
-      <p:sp>
-        <p:nvSpPr>
-          <p:cNvPr id="27" name="Text 21"/>
-          <p:cNvSpPr/>
-          <p:nvPr/>
-        </p:nvSpPr>
-        <p:spPr>
-          <a:xfrm>
-            <a:off x="320040" y="4663440"/>
-            <a:ext cx="8503920" cy="274320"/>
-          </a:xfrm>
-          <a:prstGeom prst="rect">
-            <a:avLst/>
-          </a:prstGeom>
-          <a:noFill/>
-          <a:ln/>
-        </p:spPr>
-        <p:txBody>
-          <a:bodyPr wrap="square" lIns="0" tIns="0" rIns="0" bIns="0" rtlCol="0" anchor="ctr"/>
-          <a:lstStyle/>
-          <a:p>
-            <a:pPr marL="0" indent="0">
-              <a:buNone/>
-            </a:pPr>
-            <a:r>
-              <a:rPr lang="en-US" sz="950" i="1" dirty="0">
-                <a:solidFill>
-                  <a:srgbClr val="D97706"/>
-                </a:solidFill>
-                <a:latin typeface="Calibri" pitchFamily="34" charset="0"/>
-                <a:ea typeface="Calibri" pitchFamily="34" charset="-122"/>
-                <a:cs typeface="Calibri" pitchFamily="34" charset="-120"/>
-              </a:rPr>
-              <a:t>Skeptical stakeholder: "How do you know duplicates are common?" → We don't yet. Measurement step will validate.</a:t>
-            </a:r>
-            <a:endParaRPr lang="en-US" sz="950" dirty="0"/>
           </a:p>
         </p:txBody>
       </p:sp>
@@ -9216,7 +10517,7 @@
 </p:sld>
 </file>
 
-<file path=ppt/slides/slide5.xml><?xml version="1.0" encoding="utf-8"?>
+<file path=ppt/slides/slide6.xml><?xml version="1.0" encoding="utf-8"?>
 <p:sld xmlns:a="http://schemas.openxmlformats.org/drawingml/2006/main" xmlns:r="http://schemas.openxmlformats.org/officeDocument/2006/relationships" xmlns:p="http://schemas.openxmlformats.org/presentationml/2006/main">
   <p:cSld name="Slide 5">
     <p:bg>
@@ -10298,7 +11599,7 @@
 </p:sld>
 </file>
 
-<file path=ppt/slides/slide6.xml><?xml version="1.0" encoding="utf-8"?>
+<file path=ppt/slides/slide7.xml><?xml version="1.0" encoding="utf-8"?>
 <p:sld xmlns:a="http://schemas.openxmlformats.org/drawingml/2006/main" xmlns:r="http://schemas.openxmlformats.org/officeDocument/2006/relationships" xmlns:p="http://schemas.openxmlformats.org/presentationml/2006/main">
   <p:cSld name="Slide 6">
     <p:bg>
@@ -11022,7 +12323,7 @@
 </p:sld>
 </file>
 
-<file path=ppt/slides/slide7.xml><?xml version="1.0" encoding="utf-8"?>
+<file path=ppt/slides/slide8.xml><?xml version="1.0" encoding="utf-8"?>
 <p:sld xmlns:a="http://schemas.openxmlformats.org/drawingml/2006/main" xmlns:r="http://schemas.openxmlformats.org/officeDocument/2006/relationships" xmlns:p="http://schemas.openxmlformats.org/presentationml/2006/main">
   <p:cSld name="Slide 7">
     <p:bg>
@@ -11094,7 +12395,7 @@
         </p:nvSpPr>
         <p:spPr>
           <a:xfrm>
-            <a:off x="365760" y="960120"/>
+            <a:off x="365760" y="1080770"/>
             <a:ext cx="4114800" cy="2286000"/>
           </a:xfrm>
           <a:prstGeom prst="roundRect">
@@ -11121,7 +12422,7 @@
         </p:nvSpPr>
         <p:spPr>
           <a:xfrm>
-            <a:off x="411480" y="1005840"/>
+            <a:off x="411480" y="1082040"/>
             <a:ext cx="4023360" cy="347472"/>
           </a:xfrm>
           <a:prstGeom prst="rect">
@@ -11160,7 +12461,7 @@
         </p:nvSpPr>
         <p:spPr>
           <a:xfrm>
-            <a:off x="548640" y="1417320"/>
+            <a:off x="548640" y="1537970"/>
             <a:ext cx="3794760" cy="1691640"/>
           </a:xfrm>
           <a:prstGeom prst="rect">
@@ -11273,7 +12574,7 @@
         </p:nvSpPr>
         <p:spPr>
           <a:xfrm>
-            <a:off x="4800600" y="960120"/>
+            <a:off x="4800600" y="1080770"/>
             <a:ext cx="4114800" cy="2286000"/>
           </a:xfrm>
           <a:prstGeom prst="roundRect">
@@ -11300,7 +12601,7 @@
         </p:nvSpPr>
         <p:spPr>
           <a:xfrm>
-            <a:off x="4846320" y="1005840"/>
+            <a:off x="4846320" y="1126490"/>
             <a:ext cx="4023360" cy="347472"/>
           </a:xfrm>
           <a:prstGeom prst="rect">
@@ -11339,7 +12640,7 @@
         </p:nvSpPr>
         <p:spPr>
           <a:xfrm>
-            <a:off x="4983480" y="1417320"/>
+            <a:off x="4983480" y="1537970"/>
             <a:ext cx="3794760" cy="1691640"/>
           </a:xfrm>
           <a:prstGeom prst="rect">
@@ -11473,7 +12774,7 @@
         </p:nvSpPr>
         <p:spPr>
           <a:xfrm>
-            <a:off x="4274820" y="1804750"/>
+            <a:off x="4274820" y="1925400"/>
             <a:ext cx="685800" cy="457200"/>
           </a:xfrm>
           <a:prstGeom prst="rect">
@@ -11634,7 +12935,7 @@
                 <a:ea typeface="Calibri" pitchFamily="34" charset="-122"/>
                 <a:cs typeface="Calibri" pitchFamily="34" charset="-120"/>
               </a:rPr>
-              <a:t>Demand Shaping (GSF Patterns catalog)</a:t>
+              <a:t>Architecture — Optimize AI/ML model size + Queue non-urgent requests (patterns.greensoftware.foundation)</a:t>
             </a:r>
             <a:endParaRPr lang="en-US" sz="1100" dirty="0"/>
           </a:p>
@@ -11648,7 +12949,7 @@
 </p:sld>
 </file>
 
-<file path=ppt/slides/slide8.xml><?xml version="1.0" encoding="utf-8"?>
+<file path=ppt/slides/slide9.xml><?xml version="1.0" encoding="utf-8"?>
 <p:sld xmlns:a="http://schemas.openxmlformats.org/drawingml/2006/main" xmlns:r="http://schemas.openxmlformats.org/officeDocument/2006/relationships" xmlns:p="http://schemas.openxmlformats.org/presentationml/2006/main">
   <p:cSld name="Slide 8">
     <p:bg>
@@ -12373,946 +13674,9 @@
                 <a:ea typeface="Calibri" pitchFamily="34" charset="-122"/>
                 <a:cs typeface="Calibri" pitchFamily="34" charset="-120"/>
               </a:rPr>
-              <a:t>Cache-Aside (GSF Patterns)</a:t>
+              <a:t>Development — Cache static data (patterns.greensoftware.foundation)</a:t>
             </a:r>
             <a:endParaRPr lang="en-US" sz="1100" dirty="0"/>
-          </a:p>
-        </p:txBody>
-      </p:sp>
-    </p:spTree>
-  </p:cSld>
-  <p:clrMapOvr>
-    <a:masterClrMapping/>
-  </p:clrMapOvr>
-</p:sld>
-</file>
-
-<file path=ppt/slides/slide9.xml><?xml version="1.0" encoding="utf-8"?>
-<p:sld xmlns:a="http://schemas.openxmlformats.org/drawingml/2006/main" xmlns:r="http://schemas.openxmlformats.org/officeDocument/2006/relationships" xmlns:p="http://schemas.openxmlformats.org/presentationml/2006/main">
-  <p:cSld name="Slide 9">
-    <p:bg>
-      <p:bgPr>
-        <a:solidFill>
-          <a:srgbClr val="F4F7F4"/>
-        </a:solidFill>
-        <a:effectLst/>
-      </p:bgPr>
-    </p:bg>
-    <p:spTree>
-      <p:nvGrpSpPr>
-        <p:cNvPr id="1" name=""/>
-        <p:cNvGrpSpPr/>
-        <p:nvPr/>
-      </p:nvGrpSpPr>
-      <p:grpSpPr>
-        <a:xfrm>
-          <a:off x="0" y="0"/>
-          <a:ext cx="0" cy="0"/>
-          <a:chOff x="0" y="0"/>
-          <a:chExt cx="0" cy="0"/>
-        </a:xfrm>
-      </p:grpSpPr>
-      <p:sp>
-        <p:nvSpPr>
-          <p:cNvPr id="2" name="Text 0"/>
-          <p:cNvSpPr/>
-          <p:nvPr/>
-        </p:nvSpPr>
-        <p:spPr>
-          <a:xfrm>
-            <a:off x="457200" y="256032"/>
-            <a:ext cx="8229600" cy="502920"/>
-          </a:xfrm>
-          <a:prstGeom prst="rect">
-            <a:avLst/>
-          </a:prstGeom>
-          <a:noFill/>
-          <a:ln/>
-        </p:spPr>
-        <p:txBody>
-          <a:bodyPr wrap="square" lIns="0" tIns="0" rIns="0" bIns="0" rtlCol="0" anchor="ctr"/>
-          <a:lstStyle/>
-          <a:p>
-            <a:pPr marL="0" indent="0">
-              <a:buNone/>
-            </a:pPr>
-            <a:r>
-              <a:rPr lang="en-US" sz="3000" b="1" dirty="0">
-                <a:solidFill>
-                  <a:srgbClr val="1A2E2A"/>
-                </a:solidFill>
-                <a:latin typeface="Calibri" pitchFamily="34" charset="0"/>
-                <a:ea typeface="Calibri" pitchFamily="34" charset="-122"/>
-                <a:cs typeface="Calibri" pitchFamily="34" charset="-120"/>
-              </a:rPr>
-              <a:t>Slide 8 — Solution 3: EU Region Routing + Off-Peak Batching</a:t>
-            </a:r>
-            <a:endParaRPr lang="en-US" sz="3000" dirty="0"/>
-          </a:p>
-        </p:txBody>
-      </p:sp>
-      <p:sp>
-        <p:nvSpPr>
-          <p:cNvPr id="3" name="Shape 1"/>
-          <p:cNvSpPr/>
-          <p:nvPr/>
-        </p:nvSpPr>
-        <p:spPr>
-          <a:xfrm>
-            <a:off x="320040" y="989556"/>
-            <a:ext cx="4160520" cy="3749040"/>
-          </a:xfrm>
-          <a:prstGeom prst="roundRect">
-            <a:avLst>
-              <a:gd name="adj" fmla="val 3659"/>
-            </a:avLst>
-          </a:prstGeom>
-          <a:solidFill>
-            <a:srgbClr val="EBF5EB"/>
-          </a:solidFill>
-          <a:ln w="12700">
-            <a:solidFill>
-              <a:srgbClr val="97BC62"/>
-            </a:solidFill>
-            <a:prstDash val="solid"/>
-          </a:ln>
-        </p:spPr>
-      </p:sp>
-      <p:pic>
-        <p:nvPicPr>
-          <p:cNvPr id="4" name="Image 0" descr="preencoded.png"/>
-          <p:cNvPicPr>
-            <a:picLocks noChangeAspect="1"/>
-          </p:cNvPicPr>
-          <p:nvPr/>
-        </p:nvPicPr>
-        <p:blipFill>
-          <a:blip r:embed="rId3"/>
-          <a:stretch>
-            <a:fillRect/>
-          </a:stretch>
-        </p:blipFill>
-        <p:spPr>
-          <a:xfrm>
-            <a:off x="457200" y="1037155"/>
-            <a:ext cx="411480" cy="411480"/>
-          </a:xfrm>
-          <a:prstGeom prst="rect">
-            <a:avLst/>
-          </a:prstGeom>
-        </p:spPr>
-      </p:pic>
-      <p:sp>
-        <p:nvSpPr>
-          <p:cNvPr id="5" name="Text 2"/>
-          <p:cNvSpPr/>
-          <p:nvPr/>
-        </p:nvSpPr>
-        <p:spPr>
-          <a:xfrm>
-            <a:off x="960120" y="1037155"/>
-            <a:ext cx="3383280" cy="411480"/>
-          </a:xfrm>
-          <a:prstGeom prst="rect">
-            <a:avLst/>
-          </a:prstGeom>
-          <a:noFill/>
-          <a:ln/>
-        </p:spPr>
-        <p:txBody>
-          <a:bodyPr wrap="square" lIns="0" tIns="0" rIns="0" bIns="0" rtlCol="0" anchor="ctr"/>
-          <a:lstStyle/>
-          <a:p>
-            <a:pPr marL="0" indent="0">
-              <a:buNone/>
-            </a:pPr>
-            <a:r>
-              <a:rPr lang="en-US" sz="1400" b="1" dirty="0">
-                <a:solidFill>
-                  <a:srgbClr val="1A2E2A"/>
-                </a:solidFill>
-                <a:latin typeface="Calibri" pitchFamily="34" charset="0"/>
-                <a:ea typeface="Calibri" pitchFamily="34" charset="-122"/>
-                <a:cs typeface="Calibri" pitchFamily="34" charset="-120"/>
-              </a:rPr>
-              <a:t>Switch to EU-West Region</a:t>
-            </a:r>
-            <a:endParaRPr lang="en-US" sz="1400" dirty="0"/>
-          </a:p>
-        </p:txBody>
-      </p:sp>
-      <p:sp>
-        <p:nvSpPr>
-          <p:cNvPr id="6" name="Text 3"/>
-          <p:cNvSpPr/>
-          <p:nvPr/>
-        </p:nvSpPr>
-        <p:spPr>
-          <a:xfrm>
-            <a:off x="457200" y="1508760"/>
-            <a:ext cx="1005840" cy="256032"/>
-          </a:xfrm>
-          <a:prstGeom prst="rect">
-            <a:avLst/>
-          </a:prstGeom>
-          <a:noFill/>
-          <a:ln/>
-        </p:spPr>
-        <p:txBody>
-          <a:bodyPr wrap="square" lIns="0" tIns="0" rIns="0" bIns="0" rtlCol="0" anchor="ctr"/>
-          <a:lstStyle/>
-          <a:p>
-            <a:pPr marL="0" indent="0">
-              <a:buNone/>
-            </a:pPr>
-            <a:r>
-              <a:rPr lang="en-US" sz="1000" b="1" dirty="0">
-                <a:solidFill>
-                  <a:srgbClr val="B91C1C"/>
-                </a:solidFill>
-                <a:latin typeface="Calibri" pitchFamily="34" charset="0"/>
-                <a:ea typeface="Calibri" pitchFamily="34" charset="-122"/>
-                <a:cs typeface="Calibri" pitchFamily="34" charset="-120"/>
-              </a:rPr>
-              <a:t>Problem</a:t>
-            </a:r>
-            <a:endParaRPr lang="en-US" sz="1000" dirty="0"/>
-          </a:p>
-        </p:txBody>
-      </p:sp>
-      <p:sp>
-        <p:nvSpPr>
-          <p:cNvPr id="7" name="Text 4"/>
-          <p:cNvSpPr/>
-          <p:nvPr/>
-        </p:nvSpPr>
-        <p:spPr>
-          <a:xfrm>
-            <a:off x="457200" y="1764792"/>
-            <a:ext cx="3886200" cy="548640"/>
-          </a:xfrm>
-          <a:prstGeom prst="rect">
-            <a:avLst/>
-          </a:prstGeom>
-          <a:noFill/>
-          <a:ln/>
-        </p:spPr>
-        <p:txBody>
-          <a:bodyPr wrap="square" lIns="0" tIns="0" rIns="0" bIns="0" rtlCol="0" anchor="ctr"/>
-          <a:lstStyle/>
-          <a:p>
-            <a:pPr marL="0" indent="0">
-              <a:buNone/>
-            </a:pPr>
-            <a:r>
-              <a:rPr lang="en-US" sz="1000" dirty="0">
-                <a:solidFill>
-                  <a:srgbClr val="64748B"/>
-                </a:solidFill>
-                <a:latin typeface="Calibri" pitchFamily="34" charset="0"/>
-                <a:ea typeface="Calibri" pitchFamily="34" charset="-122"/>
-                <a:cs typeface="Calibri" pitchFamily="34" charset="-120"/>
-              </a:rPr>
-              <a:t>US-East grid: ~400 gCO₂/kWh</a:t>
-            </a:r>
-            <a:endParaRPr lang="en-US" sz="1000" dirty="0"/>
-          </a:p>
-          <a:p>
-            <a:pPr marL="0" indent="0">
-              <a:buNone/>
-            </a:pPr>
-            <a:r>
-              <a:rPr lang="en-US" sz="1000" dirty="0">
-                <a:solidFill>
-                  <a:srgbClr val="64748B"/>
-                </a:solidFill>
-                <a:latin typeface="Calibri" pitchFamily="34" charset="0"/>
-                <a:ea typeface="Calibri" pitchFamily="34" charset="-122"/>
-                <a:cs typeface="Calibri" pitchFamily="34" charset="-120"/>
-              </a:rPr>
-              <a:t>Added latency to EU sellers (~90 ms)</a:t>
-            </a:r>
-            <a:endParaRPr lang="en-US" sz="1000" dirty="0"/>
-          </a:p>
-        </p:txBody>
-      </p:sp>
-      <p:sp>
-        <p:nvSpPr>
-          <p:cNvPr id="8" name="Text 5"/>
-          <p:cNvSpPr/>
-          <p:nvPr/>
-        </p:nvSpPr>
-        <p:spPr>
-          <a:xfrm>
-            <a:off x="457200" y="2377440"/>
-            <a:ext cx="1005840" cy="256032"/>
-          </a:xfrm>
-          <a:prstGeom prst="rect">
-            <a:avLst/>
-          </a:prstGeom>
-          <a:noFill/>
-          <a:ln/>
-        </p:spPr>
-        <p:txBody>
-          <a:bodyPr wrap="square" lIns="0" tIns="0" rIns="0" bIns="0" rtlCol="0" anchor="ctr"/>
-          <a:lstStyle/>
-          <a:p>
-            <a:pPr marL="0" indent="0">
-              <a:buNone/>
-            </a:pPr>
-            <a:r>
-              <a:rPr lang="en-US" sz="1000" b="1" dirty="0">
-                <a:solidFill>
-                  <a:srgbClr val="2C5F2D"/>
-                </a:solidFill>
-                <a:latin typeface="Calibri" pitchFamily="34" charset="0"/>
-                <a:ea typeface="Calibri" pitchFamily="34" charset="-122"/>
-                <a:cs typeface="Calibri" pitchFamily="34" charset="-120"/>
-              </a:rPr>
-              <a:t>Change</a:t>
-            </a:r>
-            <a:endParaRPr lang="en-US" sz="1000" dirty="0"/>
-          </a:p>
-        </p:txBody>
-      </p:sp>
-      <p:sp>
-        <p:nvSpPr>
-          <p:cNvPr id="9" name="Text 6"/>
-          <p:cNvSpPr/>
-          <p:nvPr/>
-        </p:nvSpPr>
-        <p:spPr>
-          <a:xfrm>
-            <a:off x="457200" y="2633472"/>
-            <a:ext cx="3886200" cy="548640"/>
-          </a:xfrm>
-          <a:prstGeom prst="rect">
-            <a:avLst/>
-          </a:prstGeom>
-          <a:noFill/>
-          <a:ln/>
-        </p:spPr>
-        <p:txBody>
-          <a:bodyPr wrap="square" lIns="0" tIns="0" rIns="0" bIns="0" rtlCol="0" anchor="ctr"/>
-          <a:lstStyle/>
-          <a:p>
-            <a:pPr marL="0" indent="0">
-              <a:buNone/>
-            </a:pPr>
-            <a:r>
-              <a:rPr lang="en-US" sz="1000" dirty="0">
-                <a:solidFill>
-                  <a:srgbClr val="64748B"/>
-                </a:solidFill>
-                <a:latin typeface="Calibri" pitchFamily="34" charset="0"/>
-                <a:ea typeface="Calibri" pitchFamily="34" charset="-122"/>
-                <a:cs typeface="Calibri" pitchFamily="34" charset="-120"/>
-              </a:rPr>
-              <a:t>Route to EU-West (Ireland/Frankfurt)</a:t>
-            </a:r>
-            <a:endParaRPr lang="en-US" sz="1000" dirty="0"/>
-          </a:p>
-          <a:p>
-            <a:pPr marL="0" indent="0">
-              <a:buNone/>
-            </a:pPr>
-            <a:r>
-              <a:rPr lang="en-US" sz="1000" dirty="0">
-                <a:solidFill>
-                  <a:srgbClr val="64748B"/>
-                </a:solidFill>
-                <a:latin typeface="Calibri" pitchFamily="34" charset="0"/>
-                <a:ea typeface="Calibri" pitchFamily="34" charset="-122"/>
-                <a:cs typeface="Calibri" pitchFamily="34" charset="-120"/>
-              </a:rPr>
-              <a:t>Grid: ~180–220 gCO₂/kWh</a:t>
-            </a:r>
-            <a:endParaRPr lang="en-US" sz="1000" dirty="0"/>
-          </a:p>
-        </p:txBody>
-      </p:sp>
-      <p:sp>
-        <p:nvSpPr>
-          <p:cNvPr id="10" name="Text 7"/>
-          <p:cNvSpPr/>
-          <p:nvPr/>
-        </p:nvSpPr>
-        <p:spPr>
-          <a:xfrm>
-            <a:off x="457200" y="3246120"/>
-            <a:ext cx="1005840" cy="256032"/>
-          </a:xfrm>
-          <a:prstGeom prst="rect">
-            <a:avLst/>
-          </a:prstGeom>
-          <a:noFill/>
-          <a:ln/>
-        </p:spPr>
-        <p:txBody>
-          <a:bodyPr wrap="square" lIns="0" tIns="0" rIns="0" bIns="0" rtlCol="0" anchor="ctr"/>
-          <a:lstStyle/>
-          <a:p>
-            <a:pPr marL="0" indent="0">
-              <a:buNone/>
-            </a:pPr>
-            <a:r>
-              <a:rPr lang="en-US" sz="1000" b="1" dirty="0">
-                <a:solidFill>
-                  <a:srgbClr val="0D9488"/>
-                </a:solidFill>
-                <a:latin typeface="Calibri" pitchFamily="34" charset="0"/>
-                <a:ea typeface="Calibri" pitchFamily="34" charset="-122"/>
-                <a:cs typeface="Calibri" pitchFamily="34" charset="-120"/>
-              </a:rPr>
-              <a:t>Outcome</a:t>
-            </a:r>
-            <a:endParaRPr lang="en-US" sz="1000" dirty="0"/>
-          </a:p>
-        </p:txBody>
-      </p:sp>
-      <p:sp>
-        <p:nvSpPr>
-          <p:cNvPr id="11" name="Text 8"/>
-          <p:cNvSpPr/>
-          <p:nvPr/>
-        </p:nvSpPr>
-        <p:spPr>
-          <a:xfrm>
-            <a:off x="457200" y="3502152"/>
-            <a:ext cx="3886200" cy="548640"/>
-          </a:xfrm>
-          <a:prstGeom prst="rect">
-            <a:avLst/>
-          </a:prstGeom>
-          <a:noFill/>
-          <a:ln/>
-        </p:spPr>
-        <p:txBody>
-          <a:bodyPr wrap="square" lIns="0" tIns="0" rIns="0" bIns="0" rtlCol="0" anchor="ctr"/>
-          <a:lstStyle/>
-          <a:p>
-            <a:pPr marL="0" indent="0">
-              <a:buNone/>
-            </a:pPr>
-            <a:r>
-              <a:rPr lang="en-US" sz="1000" dirty="0">
-                <a:solidFill>
-                  <a:srgbClr val="64748B"/>
-                </a:solidFill>
-                <a:latin typeface="Calibri" pitchFamily="34" charset="0"/>
-                <a:ea typeface="Calibri" pitchFamily="34" charset="-122"/>
-                <a:cs typeface="Calibri" pitchFamily="34" charset="-120"/>
-              </a:rPr>
-              <a:t>~50% carbon reduction per call</a:t>
-            </a:r>
-            <a:endParaRPr lang="en-US" sz="1000" dirty="0"/>
-          </a:p>
-          <a:p>
-            <a:pPr marL="0" indent="0">
-              <a:buNone/>
-            </a:pPr>
-            <a:r>
-              <a:rPr lang="en-US" sz="1000" dirty="0">
-                <a:solidFill>
-                  <a:srgbClr val="64748B"/>
-                </a:solidFill>
-                <a:latin typeface="Calibri" pitchFamily="34" charset="0"/>
-                <a:ea typeface="Calibri" pitchFamily="34" charset="-122"/>
-                <a:cs typeface="Calibri" pitchFamily="34" charset="-120"/>
-              </a:rPr>
-              <a:t>Latency improvement for EU sellers</a:t>
-            </a:r>
-            <a:endParaRPr lang="en-US" sz="1000" dirty="0"/>
-          </a:p>
-        </p:txBody>
-      </p:sp>
-      <p:sp>
-        <p:nvSpPr>
-          <p:cNvPr id="12" name="Shape 9"/>
-          <p:cNvSpPr/>
-          <p:nvPr/>
-        </p:nvSpPr>
-        <p:spPr>
-          <a:xfrm>
-            <a:off x="457200" y="4251960"/>
-            <a:ext cx="2377440" cy="292608"/>
-          </a:xfrm>
-          <a:prstGeom prst="roundRect">
-            <a:avLst>
-              <a:gd name="adj" fmla="val 31250"/>
-            </a:avLst>
-          </a:prstGeom>
-          <a:solidFill>
-            <a:srgbClr val="2C5F2D"/>
-          </a:solidFill>
-          <a:ln w="12700">
-            <a:solidFill>
-              <a:srgbClr val="2C5F2D"/>
-            </a:solidFill>
-            <a:prstDash val="solid"/>
-          </a:ln>
-        </p:spPr>
-      </p:sp>
-      <p:sp>
-        <p:nvSpPr>
-          <p:cNvPr id="13" name="Text 10"/>
-          <p:cNvSpPr/>
-          <p:nvPr/>
-        </p:nvSpPr>
-        <p:spPr>
-          <a:xfrm>
-            <a:off x="457200" y="4270248"/>
-            <a:ext cx="2377440" cy="274320"/>
-          </a:xfrm>
-          <a:prstGeom prst="rect">
-            <a:avLst/>
-          </a:prstGeom>
-          <a:noFill/>
-          <a:ln/>
-        </p:spPr>
-        <p:txBody>
-          <a:bodyPr wrap="square" lIns="0" tIns="0" rIns="0" bIns="0" rtlCol="0" anchor="ctr"/>
-          <a:lstStyle/>
-          <a:p>
-            <a:pPr marL="0" indent="0" algn="ctr">
-              <a:buNone/>
-            </a:pPr>
-            <a:r>
-              <a:rPr lang="en-US" sz="1000" b="1" dirty="0">
-                <a:solidFill>
-                  <a:srgbClr val="FFFFFF"/>
-                </a:solidFill>
-                <a:latin typeface="Calibri" pitchFamily="34" charset="0"/>
-                <a:ea typeface="Calibri" pitchFamily="34" charset="-122"/>
-                <a:cs typeface="Calibri" pitchFamily="34" charset="-120"/>
-              </a:rPr>
-              <a:t>Pillar: Carbon</a:t>
-            </a:r>
-            <a:endParaRPr lang="en-US" sz="1000" dirty="0"/>
-          </a:p>
-        </p:txBody>
-      </p:sp>
-      <p:sp>
-        <p:nvSpPr>
-          <p:cNvPr id="14" name="Shape 11"/>
-          <p:cNvSpPr/>
-          <p:nvPr/>
-        </p:nvSpPr>
-        <p:spPr>
-          <a:xfrm>
-            <a:off x="4754880" y="989556"/>
-            <a:ext cx="4160520" cy="3749040"/>
-          </a:xfrm>
-          <a:prstGeom prst="roundRect">
-            <a:avLst>
-              <a:gd name="adj" fmla="val 3659"/>
-            </a:avLst>
-          </a:prstGeom>
-          <a:solidFill>
-            <a:srgbClr val="EBF5EB"/>
-          </a:solidFill>
-          <a:ln w="12700">
-            <a:solidFill>
-              <a:srgbClr val="97BC62"/>
-            </a:solidFill>
-            <a:prstDash val="solid"/>
-          </a:ln>
-        </p:spPr>
-      </p:sp>
-      <p:pic>
-        <p:nvPicPr>
-          <p:cNvPr id="15" name="Image 1" descr="preencoded.png"/>
-          <p:cNvPicPr>
-            <a:picLocks noChangeAspect="1"/>
-          </p:cNvPicPr>
-          <p:nvPr/>
-        </p:nvPicPr>
-        <p:blipFill>
-          <a:blip r:embed="rId4"/>
-          <a:stretch>
-            <a:fillRect/>
-          </a:stretch>
-        </p:blipFill>
-        <p:spPr>
-          <a:xfrm>
-            <a:off x="4892040" y="1037155"/>
-            <a:ext cx="411480" cy="411480"/>
-          </a:xfrm>
-          <a:prstGeom prst="rect">
-            <a:avLst/>
-          </a:prstGeom>
-        </p:spPr>
-      </p:pic>
-      <p:sp>
-        <p:nvSpPr>
-          <p:cNvPr id="16" name="Text 12"/>
-          <p:cNvSpPr/>
-          <p:nvPr/>
-        </p:nvSpPr>
-        <p:spPr>
-          <a:xfrm>
-            <a:off x="5394960" y="1037155"/>
-            <a:ext cx="3383280" cy="411480"/>
-          </a:xfrm>
-          <a:prstGeom prst="rect">
-            <a:avLst/>
-          </a:prstGeom>
-          <a:noFill/>
-          <a:ln/>
-        </p:spPr>
-        <p:txBody>
-          <a:bodyPr wrap="square" lIns="0" tIns="0" rIns="0" bIns="0" rtlCol="0" anchor="ctr"/>
-          <a:lstStyle/>
-          <a:p>
-            <a:pPr marL="0" indent="0">
-              <a:buNone/>
-            </a:pPr>
-            <a:r>
-              <a:rPr lang="en-US" sz="1400" b="1" dirty="0">
-                <a:solidFill>
-                  <a:srgbClr val="1A2E2A"/>
-                </a:solidFill>
-                <a:latin typeface="Calibri" pitchFamily="34" charset="0"/>
-                <a:ea typeface="Calibri" pitchFamily="34" charset="-122"/>
-                <a:cs typeface="Calibri" pitchFamily="34" charset="-120"/>
-              </a:rPr>
-              <a:t>Off-Peak Batch Queue</a:t>
-            </a:r>
-            <a:endParaRPr lang="en-US" sz="1400" dirty="0"/>
-          </a:p>
-        </p:txBody>
-      </p:sp>
-      <p:sp>
-        <p:nvSpPr>
-          <p:cNvPr id="17" name="Text 13"/>
-          <p:cNvSpPr/>
-          <p:nvPr/>
-        </p:nvSpPr>
-        <p:spPr>
-          <a:xfrm>
-            <a:off x="4892040" y="1508760"/>
-            <a:ext cx="1005840" cy="256032"/>
-          </a:xfrm>
-          <a:prstGeom prst="rect">
-            <a:avLst/>
-          </a:prstGeom>
-          <a:noFill/>
-          <a:ln/>
-        </p:spPr>
-        <p:txBody>
-          <a:bodyPr wrap="square" lIns="0" tIns="0" rIns="0" bIns="0" rtlCol="0" anchor="ctr"/>
-          <a:lstStyle/>
-          <a:p>
-            <a:pPr marL="0" indent="0">
-              <a:buNone/>
-            </a:pPr>
-            <a:r>
-              <a:rPr lang="en-US" sz="1000" b="1" dirty="0">
-                <a:solidFill>
-                  <a:srgbClr val="B91C1C"/>
-                </a:solidFill>
-                <a:latin typeface="Calibri" pitchFamily="34" charset="0"/>
-                <a:ea typeface="Calibri" pitchFamily="34" charset="-122"/>
-                <a:cs typeface="Calibri" pitchFamily="34" charset="-120"/>
-              </a:rPr>
-              <a:t>Problem</a:t>
-            </a:r>
-            <a:endParaRPr lang="en-US" sz="1000" dirty="0"/>
-          </a:p>
-        </p:txBody>
-      </p:sp>
-      <p:sp>
-        <p:nvSpPr>
-          <p:cNvPr id="18" name="Text 14"/>
-          <p:cNvSpPr/>
-          <p:nvPr/>
-        </p:nvSpPr>
-        <p:spPr>
-          <a:xfrm>
-            <a:off x="4892040" y="1764792"/>
-            <a:ext cx="3886200" cy="548640"/>
-          </a:xfrm>
-          <a:prstGeom prst="rect">
-            <a:avLst/>
-          </a:prstGeom>
-          <a:noFill/>
-          <a:ln/>
-        </p:spPr>
-        <p:txBody>
-          <a:bodyPr wrap="square" lIns="0" tIns="0" rIns="0" bIns="0" rtlCol="0" anchor="ctr"/>
-          <a:lstStyle/>
-          <a:p>
-            <a:pPr marL="0" indent="0">
-              <a:buNone/>
-            </a:pPr>
-            <a:r>
-              <a:rPr lang="en-US" sz="1000" dirty="0">
-                <a:solidFill>
-                  <a:srgbClr val="64748B"/>
-                </a:solidFill>
-                <a:latin typeface="Calibri" pitchFamily="34" charset="0"/>
-                <a:ea typeface="Calibri" pitchFamily="34" charset="-122"/>
-                <a:cs typeface="Calibri" pitchFamily="34" charset="-120"/>
-              </a:rPr>
-              <a:t>Synchronous call even for non-urgent uploads (draft listings, scheduled items)</a:t>
-            </a:r>
-            <a:endParaRPr lang="en-US" sz="1000" dirty="0"/>
-          </a:p>
-        </p:txBody>
-      </p:sp>
-      <p:sp>
-        <p:nvSpPr>
-          <p:cNvPr id="19" name="Text 15"/>
-          <p:cNvSpPr/>
-          <p:nvPr/>
-        </p:nvSpPr>
-        <p:spPr>
-          <a:xfrm>
-            <a:off x="4892040" y="2377440"/>
-            <a:ext cx="1005840" cy="256032"/>
-          </a:xfrm>
-          <a:prstGeom prst="rect">
-            <a:avLst/>
-          </a:prstGeom>
-          <a:noFill/>
-          <a:ln/>
-        </p:spPr>
-        <p:txBody>
-          <a:bodyPr wrap="square" lIns="0" tIns="0" rIns="0" bIns="0" rtlCol="0" anchor="ctr"/>
-          <a:lstStyle/>
-          <a:p>
-            <a:pPr marL="0" indent="0">
-              <a:buNone/>
-            </a:pPr>
-            <a:r>
-              <a:rPr lang="en-US" sz="1000" b="1" dirty="0">
-                <a:solidFill>
-                  <a:srgbClr val="2C5F2D"/>
-                </a:solidFill>
-                <a:latin typeface="Calibri" pitchFamily="34" charset="0"/>
-                <a:ea typeface="Calibri" pitchFamily="34" charset="-122"/>
-                <a:cs typeface="Calibri" pitchFamily="34" charset="-120"/>
-              </a:rPr>
-              <a:t>Change</a:t>
-            </a:r>
-            <a:endParaRPr lang="en-US" sz="1000" dirty="0"/>
-          </a:p>
-        </p:txBody>
-      </p:sp>
-      <p:sp>
-        <p:nvSpPr>
-          <p:cNvPr id="20" name="Text 16"/>
-          <p:cNvSpPr/>
-          <p:nvPr/>
-        </p:nvSpPr>
-        <p:spPr>
-          <a:xfrm>
-            <a:off x="4892040" y="2633472"/>
-            <a:ext cx="3886200" cy="548640"/>
-          </a:xfrm>
-          <a:prstGeom prst="rect">
-            <a:avLst/>
-          </a:prstGeom>
-          <a:noFill/>
-          <a:ln/>
-        </p:spPr>
-        <p:txBody>
-          <a:bodyPr wrap="square" lIns="0" tIns="0" rIns="0" bIns="0" rtlCol="0" anchor="ctr"/>
-          <a:lstStyle/>
-          <a:p>
-            <a:pPr marL="0" indent="0">
-              <a:buNone/>
-            </a:pPr>
-            <a:r>
-              <a:rPr lang="en-US" sz="1000" dirty="0">
-                <a:solidFill>
-                  <a:srgbClr val="64748B"/>
-                </a:solidFill>
-                <a:latin typeface="Calibri" pitchFamily="34" charset="0"/>
-                <a:ea typeface="Calibri" pitchFamily="34" charset="-122"/>
-                <a:cs typeface="Calibri" pitchFamily="34" charset="-120"/>
-              </a:rPr>
-              <a:t>Identify non-time-critical uploads → defer to batch window (2–6 am local)</a:t>
-            </a:r>
-            <a:endParaRPr lang="en-US" sz="1000" dirty="0"/>
-          </a:p>
-          <a:p>
-            <a:pPr marL="0" indent="0">
-              <a:buNone/>
-            </a:pPr>
-            <a:r>
-              <a:rPr lang="en-US" sz="1000" dirty="0">
-                <a:solidFill>
-                  <a:srgbClr val="64748B"/>
-                </a:solidFill>
-                <a:latin typeface="Calibri" pitchFamily="34" charset="0"/>
-                <a:ea typeface="Calibri" pitchFamily="34" charset="-122"/>
-                <a:cs typeface="Calibri" pitchFamily="34" charset="-120"/>
-              </a:rPr>
-              <a:t>Group into 50-image batches</a:t>
-            </a:r>
-            <a:endParaRPr lang="en-US" sz="1000" dirty="0"/>
-          </a:p>
-        </p:txBody>
-      </p:sp>
-      <p:sp>
-        <p:nvSpPr>
-          <p:cNvPr id="21" name="Text 17"/>
-          <p:cNvSpPr/>
-          <p:nvPr/>
-        </p:nvSpPr>
-        <p:spPr>
-          <a:xfrm>
-            <a:off x="4892040" y="3246120"/>
-            <a:ext cx="1005840" cy="256032"/>
-          </a:xfrm>
-          <a:prstGeom prst="rect">
-            <a:avLst/>
-          </a:prstGeom>
-          <a:noFill/>
-          <a:ln/>
-        </p:spPr>
-        <p:txBody>
-          <a:bodyPr wrap="square" lIns="0" tIns="0" rIns="0" bIns="0" rtlCol="0" anchor="ctr"/>
-          <a:lstStyle/>
-          <a:p>
-            <a:pPr marL="0" indent="0">
-              <a:buNone/>
-            </a:pPr>
-            <a:r>
-              <a:rPr lang="en-US" sz="1000" b="1" dirty="0">
-                <a:solidFill>
-                  <a:srgbClr val="0D9488"/>
-                </a:solidFill>
-                <a:latin typeface="Calibri" pitchFamily="34" charset="0"/>
-                <a:ea typeface="Calibri" pitchFamily="34" charset="-122"/>
-                <a:cs typeface="Calibri" pitchFamily="34" charset="-120"/>
-              </a:rPr>
-              <a:t>Outcome</a:t>
-            </a:r>
-            <a:endParaRPr lang="en-US" sz="1000" dirty="0"/>
-          </a:p>
-        </p:txBody>
-      </p:sp>
-      <p:sp>
-        <p:nvSpPr>
-          <p:cNvPr id="22" name="Text 18"/>
-          <p:cNvSpPr/>
-          <p:nvPr/>
-        </p:nvSpPr>
-        <p:spPr>
-          <a:xfrm>
-            <a:off x="4892040" y="3502152"/>
-            <a:ext cx="3886200" cy="548640"/>
-          </a:xfrm>
-          <a:prstGeom prst="rect">
-            <a:avLst/>
-          </a:prstGeom>
-          <a:noFill/>
-          <a:ln/>
-        </p:spPr>
-        <p:txBody>
-          <a:bodyPr wrap="square" lIns="0" tIns="0" rIns="0" bIns="0" rtlCol="0" anchor="ctr"/>
-          <a:lstStyle/>
-          <a:p>
-            <a:pPr marL="0" indent="0">
-              <a:buNone/>
-            </a:pPr>
-            <a:r>
-              <a:rPr lang="en-US" sz="1000" dirty="0">
-                <a:solidFill>
-                  <a:srgbClr val="64748B"/>
-                </a:solidFill>
-                <a:latin typeface="Calibri" pitchFamily="34" charset="0"/>
-                <a:ea typeface="Calibri" pitchFamily="34" charset="-122"/>
-                <a:cs typeface="Calibri" pitchFamily="34" charset="-120"/>
-              </a:rPr>
-              <a:t>Better HW utilisation at provider side</a:t>
-            </a:r>
-            <a:endParaRPr lang="en-US" sz="1000" dirty="0"/>
-          </a:p>
-          <a:p>
-            <a:pPr marL="0" indent="0">
-              <a:buNone/>
-            </a:pPr>
-            <a:r>
-              <a:rPr lang="en-US" sz="1000" dirty="0">
-                <a:solidFill>
-                  <a:srgbClr val="64748B"/>
-                </a:solidFill>
-                <a:latin typeface="Calibri" pitchFamily="34" charset="0"/>
-                <a:ea typeface="Calibri" pitchFamily="34" charset="-122"/>
-                <a:cs typeface="Calibri" pitchFamily="34" charset="-120"/>
-              </a:rPr>
-              <a:t>Potential batch pricing discount (30%+ on some providers)</a:t>
-            </a:r>
-            <a:endParaRPr lang="en-US" sz="1000" dirty="0"/>
-          </a:p>
-        </p:txBody>
-      </p:sp>
-      <p:sp>
-        <p:nvSpPr>
-          <p:cNvPr id="23" name="Shape 19"/>
-          <p:cNvSpPr/>
-          <p:nvPr/>
-        </p:nvSpPr>
-        <p:spPr>
-          <a:xfrm>
-            <a:off x="4892040" y="4251960"/>
-            <a:ext cx="2377440" cy="292608"/>
-          </a:xfrm>
-          <a:prstGeom prst="roundRect">
-            <a:avLst>
-              <a:gd name="adj" fmla="val 31250"/>
-            </a:avLst>
-          </a:prstGeom>
-          <a:solidFill>
-            <a:srgbClr val="2C5F2D"/>
-          </a:solidFill>
-          <a:ln w="12700">
-            <a:solidFill>
-              <a:srgbClr val="2C5F2D"/>
-            </a:solidFill>
-            <a:prstDash val="solid"/>
-          </a:ln>
-        </p:spPr>
-      </p:sp>
-      <p:sp>
-        <p:nvSpPr>
-          <p:cNvPr id="24" name="Text 20"/>
-          <p:cNvSpPr/>
-          <p:nvPr/>
-        </p:nvSpPr>
-        <p:spPr>
-          <a:xfrm>
-            <a:off x="4892040" y="4270248"/>
-            <a:ext cx="2377440" cy="274320"/>
-          </a:xfrm>
-          <a:prstGeom prst="rect">
-            <a:avLst/>
-          </a:prstGeom>
-          <a:noFill/>
-          <a:ln/>
-        </p:spPr>
-        <p:txBody>
-          <a:bodyPr wrap="square" lIns="0" tIns="0" rIns="0" bIns="0" rtlCol="0" anchor="ctr"/>
-          <a:lstStyle/>
-          <a:p>
-            <a:pPr marL="0" indent="0" algn="ctr">
-              <a:buNone/>
-            </a:pPr>
-            <a:r>
-              <a:rPr lang="en-US" sz="1000" b="1" dirty="0">
-                <a:solidFill>
-                  <a:srgbClr val="FFFFFF"/>
-                </a:solidFill>
-                <a:latin typeface="Calibri" pitchFamily="34" charset="0"/>
-                <a:ea typeface="Calibri" pitchFamily="34" charset="-122"/>
-                <a:cs typeface="Calibri" pitchFamily="34" charset="-120"/>
-              </a:rPr>
-              <a:t>Pillar: Energy · Hardware</a:t>
-            </a:r>
-            <a:endParaRPr lang="en-US" sz="1000" dirty="0"/>
           </a:p>
         </p:txBody>
       </p:sp>

--- a/ClearCart_GreenTech_Assessment.pptx
+++ b/ClearCart_GreenTech_Assessment.pptx
@@ -123,6 +123,51 @@
     </p:ext>
   </p:extLst>
 </p:presentation>
+</file>
+
+<file path=ppt/changesInfos/changesInfo1.xml><?xml version="1.0" encoding="utf-8"?>
+<pc:chgInfo xmlns:a="http://schemas.openxmlformats.org/drawingml/2006/main" xmlns:r="http://schemas.openxmlformats.org/officeDocument/2006/relationships" xmlns:ac="http://schemas.microsoft.com/office/drawing/2013/main/command" xmlns:pc="http://schemas.microsoft.com/office/powerpoint/2013/main/command">
+  <pc:docChgLst>
+    <pc:chgData name="Dilia Navarro" userId="d152c42fb0787e8e" providerId="LiveId" clId="{1F4073E4-B620-435A-BBDE-20BC280D674B}"/>
+    <pc:docChg chg="modSld">
+      <pc:chgData name="Dilia Navarro" userId="d152c42fb0787e8e" providerId="LiveId" clId="{1F4073E4-B620-435A-BBDE-20BC280D674B}" dt="2026-06-04T08:32:39.951" v="40" actId="1035"/>
+      <pc:docMkLst>
+        <pc:docMk/>
+      </pc:docMkLst>
+      <pc:sldChg chg="modSp mod">
+        <pc:chgData name="Dilia Navarro" userId="d152c42fb0787e8e" providerId="LiveId" clId="{1F4073E4-B620-435A-BBDE-20BC280D674B}" dt="2026-06-04T08:32:39.951" v="40" actId="1035"/>
+        <pc:sldMkLst>
+          <pc:docMk/>
+          <pc:sldMk cId="0" sldId="259"/>
+        </pc:sldMkLst>
+        <pc:spChg chg="mod">
+          <ac:chgData name="Dilia Navarro" userId="d152c42fb0787e8e" providerId="LiveId" clId="{1F4073E4-B620-435A-BBDE-20BC280D674B}" dt="2026-06-04T08:32:20.927" v="12" actId="1036"/>
+          <ac:spMkLst>
+            <pc:docMk/>
+            <pc:sldMk cId="0" sldId="259"/>
+            <ac:spMk id="14" creationId="{00000000-0000-0000-0000-000000000000}"/>
+          </ac:spMkLst>
+        </pc:spChg>
+        <pc:spChg chg="mod">
+          <ac:chgData name="Dilia Navarro" userId="d152c42fb0787e8e" providerId="LiveId" clId="{1F4073E4-B620-435A-BBDE-20BC280D674B}" dt="2026-06-04T08:32:27.396" v="25" actId="1036"/>
+          <ac:spMkLst>
+            <pc:docMk/>
+            <pc:sldMk cId="0" sldId="259"/>
+            <ac:spMk id="20" creationId="{00000000-0000-0000-0000-000000000000}"/>
+          </ac:spMkLst>
+        </pc:spChg>
+        <pc:spChg chg="mod">
+          <ac:chgData name="Dilia Navarro" userId="d152c42fb0787e8e" providerId="LiveId" clId="{1F4073E4-B620-435A-BBDE-20BC280D674B}" dt="2026-06-04T08:32:39.951" v="40" actId="1035"/>
+          <ac:spMkLst>
+            <pc:docMk/>
+            <pc:sldMk cId="0" sldId="259"/>
+            <ac:spMk id="26" creationId="{00000000-0000-0000-0000-000000000000}"/>
+          </ac:spMkLst>
+        </pc:spChg>
+      </pc:sldChg>
+    </pc:docChg>
+  </pc:docChgLst>
+</pc:chgInfo>
 </file>
 
 <file path=ppt/notesMasters/notesMaster1.xml><?xml version="1.0" encoding="utf-8"?>
@@ -10054,7 +10099,7 @@
         </p:nvSpPr>
         <p:spPr>
           <a:xfrm>
-            <a:off x="4846320" y="2395728"/>
+            <a:off x="4846320" y="2477147"/>
             <a:ext cx="2377440" cy="274320"/>
           </a:xfrm>
           <a:prstGeom prst="rect">
@@ -10266,7 +10311,7 @@
         </p:nvSpPr>
         <p:spPr>
           <a:xfrm>
-            <a:off x="411480" y="4361688"/>
+            <a:off x="411480" y="4443107"/>
             <a:ext cx="2377440" cy="274320"/>
           </a:xfrm>
           <a:prstGeom prst="rect">
@@ -10478,7 +10523,7 @@
         </p:nvSpPr>
         <p:spPr>
           <a:xfrm>
-            <a:off x="4846320" y="4463288"/>
+            <a:off x="4846320" y="4363080"/>
             <a:ext cx="2377440" cy="274320"/>
           </a:xfrm>
           <a:prstGeom prst="rect">
